--- a/PROJECT_B_FINAL_PRESENTATION_OWUOR_COLLINS.pptx
+++ b/PROJECT_B_FINAL_PRESENTATION_OWUOR_COLLINS.pptx
@@ -5960,9 +5960,11 @@
           </a:bodyPr>
           <a:lstStyle/>
           <a:p>
-            <a:r>
-              <a:rPr lang="en-US" dirty="0" b="1"/>
-              <a:t>PROJECT  B</a:t>
+            <a:pPr>
+              <a:defRPr sz="2400" b="1"/>
+            </a:pPr>
+            <a:r>
+              <a:t>LABORATORY INFORMATION MANAGEMENT SYSTEM FOR YALA SUB-COUNTY HOSPITAL</a:t>
             </a:r>
           </a:p>
         </p:txBody>
@@ -5985,8 +5987,8 @@
         </p:nvSpPr>
         <p:spPr>
           <a:xfrm>
-            <a:off x="2614005" y="3470002"/>
-            <a:ext cx="6894062" cy="1867468"/>
+            <a:off x="2614005" y="3291840"/>
+            <a:ext cx="6894062" cy="2560320"/>
           </a:xfrm>
         </p:spPr>
         <p:txBody>
@@ -5995,33 +5997,69 @@
           </a:bodyPr>
           <a:lstStyle/>
           <a:p>
-            <a:r>
-              <a:rPr lang="en-US" dirty="0"/>
-              <a:t>PROJECT TITLE: DEVELOPMENT OF A WEB-BASED LABORATORY INFORMATION MANAGEMENT SYSTEM (LIMS): A CASE OF YALA SUB-COUNTY HOSPITAL</a:t>
-            </a:r>
-          </a:p>
-          <a:p>
-            <a:r>
-              <a:rPr lang="en-US" dirty="0"/>
-              <a:t>PRESENTER: OWUOR COLLINS</a:t>
-            </a:r>
-          </a:p>
-          <a:p>
-            <a:r>
-              <a:rPr lang="en-US" dirty="0"/>
-              <a:t>REG NO: SCCI/01227/2022</a:t>
-            </a:r>
-          </a:p>
-          <a:p>
-            <a:r>
-              <a:rPr lang="en-US" dirty="0"/>
-              <a:t>SUPERVISORS: DR. EDWIN NGWAWE &amp; MR. PETER MAINA KARIUKI</a:t>
-            </a:r>
-          </a:p>
-          <a:p>
-            <a:r>
-              <a:rPr lang="en-US" dirty="0"/>
-              <a:t>DATE: APRIL 2026</a:t>
+            <a:pPr>
+              <a:spcAft>
+                <a:spcPts val="800"/>
+              </a:spcAft>
+              <a:defRPr sz="1600" b="1"/>
+            </a:pPr>
+            <a:r>
+              <a:t>Final Project Defense Presentation (Project B)</a:t>
+            </a:r>
+          </a:p>
+          <a:p>
+            <a:pPr>
+              <a:spcAft>
+                <a:spcPts val="400"/>
+              </a:spcAft>
+              <a:defRPr sz="1400" b="0"/>
+            </a:pPr>
+            <a:r>
+              <a:t>Candidate: Owuor Collins  |  Reg No: SCCI/01227/2022</a:t>
+            </a:r>
+          </a:p>
+          <a:p>
+            <a:pPr>
+              <a:spcAft>
+                <a:spcPts val="400"/>
+              </a:spcAft>
+              <a:defRPr sz="1300" b="0"/>
+            </a:pPr>
+            <a:r>
+              <a:t>Programme: Bachelor of Technology in Information Technology</a:t>
+            </a:r>
+          </a:p>
+          <a:p>
+            <a:pPr>
+              <a:spcAft>
+                <a:spcPts val="400"/>
+              </a:spcAft>
+              <a:defRPr sz="1300" b="0"/>
+            </a:pPr>
+            <a:r>
+              <a:t>Institution: The Technical University of Kenya (TUK) — SCIT</a:t>
+            </a:r>
+          </a:p>
+          <a:p>
+            <a:pPr>
+              <a:spcAft>
+                <a:spcPts val="400"/>
+              </a:spcAft>
+              <a:defRPr sz="1300" b="0"/>
+            </a:pPr>
+            <a:r>
+              <a:t>Supervisors: Dr. Edwin Ngwawe &amp; Mr. Peter Maina Kariuki</a:t>
+            </a:r>
+          </a:p>
+          <a:p>
+            <a:pPr>
+              <a:spcAft>
+                <a:spcPts val="0"/>
+              </a:spcAft>
+              <a:defRPr sz="1300" b="0"/>
+            </a:pPr>
+            <a:r>
+              <a:t>Academic Year: 2025 / 2026</a:t>
             </a:r>
           </a:p>
         </p:txBody>
@@ -6191,8 +6229,7 @@
           <a:lstStyle/>
           <a:p>
             <a:r>
-              <a:rPr lang="en-US" dirty="0" b="1"/>
-              <a:t>LITERATURE REVIEW</a:t>
+              <a:t>LITERATURE REVIEW: EXISTING SYSTEMS</a:t>
             </a:r>
           </a:p>
         </p:txBody>
@@ -6225,82 +6262,69 @@
           </a:bodyPr>
           <a:lstStyle/>
           <a:p>
-            <a:r>
-              <a:rPr lang="en-US" dirty="0" b="1"/>
-              <a:t>Evaluated Existing Healthcare Management Paradigms:</a:t>
-            </a:r>
-          </a:p>
-          <a:p>
-            <a:r>
-              <a:rPr lang="en-US" dirty="0" b="1"/>
-              <a:t>1. Manual MOH Paper Registers (MOH 204 &amp; MOH 240):</a:t>
-            </a:r>
-          </a:p>
-          <a:p>
-            <a:pPr marL="285750" indent="-285750"/>
-            <a:r>
-              <a:rPr lang="en-US" dirty="0"/>
-              <a:t>   • Strengths: Familiar to hospital personnel; negligible initial software cost.</a:t>
-            </a:r>
-          </a:p>
-          <a:p>
-            <a:pPr marL="285750" indent="-285750"/>
-            <a:r>
-              <a:rPr lang="en-US" dirty="0"/>
-              <a:t>   • Weaknesses: 12% lost slips monthly; transcription errors; 2 full days spent tallying monthly reports.</a:t>
-            </a:r>
-          </a:p>
-          <a:p>
-            <a:r>
-              <a:rPr lang="en-US" dirty="0" b="1"/>
-              <a:t>2. OpenMRS (Open Medical Record System — AMPATH Western Kenya):</a:t>
-            </a:r>
-          </a:p>
-          <a:p>
-            <a:pPr marL="285750" indent="-285750"/>
-            <a:r>
-              <a:rPr lang="en-US" dirty="0"/>
-              <a:t>   • Strengths: Robust open-source platform; longitudinal HIV/AIDS patient tracking.</a:t>
-            </a:r>
-          </a:p>
-          <a:p>
-            <a:pPr marL="285750" indent="-285750"/>
-            <a:r>
-              <a:rPr lang="en-US" dirty="0"/>
-              <a:t>   • Weaknesses: Heavy Java/React enterprise stack; requires specialized IT engineers and high-end servers.</a:t>
-            </a:r>
-          </a:p>
-          <a:p>
-            <a:r>
-              <a:rPr lang="en-US" dirty="0" b="1"/>
-              <a:t>3. Commercial Proprietary LIMS (LabWare, STARLIMS, Thermo Fisher):</a:t>
-            </a:r>
-          </a:p>
-          <a:p>
-            <a:pPr marL="285750" indent="-285750"/>
-            <a:r>
-              <a:rPr lang="en-US" dirty="0"/>
-              <a:t>   • Strengths: Automated robotics and direct analyzer connectivity.</a:t>
-            </a:r>
-          </a:p>
-          <a:p>
-            <a:pPr marL="285750" indent="-285750"/>
-            <a:r>
-              <a:rPr lang="en-US" dirty="0"/>
-              <a:t>   • Weaknesses: License fees run into millions of shillings; proprietary closed architecture.</a:t>
-            </a:r>
-          </a:p>
-          <a:p>
-            <a:r>
-              <a:rPr lang="en-US" dirty="0" b="1"/>
-              <a:t>4. Kenya EMR:</a:t>
-            </a:r>
-          </a:p>
-          <a:p>
-            <a:pPr marL="285750" indent="-285750"/>
-            <a:r>
-              <a:rPr lang="en-US" dirty="0"/>
-              <a:t>   • Focused primarily on national HIV/TB indicator programs rather than hospital-wide laboratory billing and tracking.</a:t>
+            <a:pPr>
+              <a:spcAft>
+                <a:spcPts val="500"/>
+              </a:spcAft>
+              <a:defRPr sz="1400" b="0"/>
+            </a:pPr>
+            <a:r>
+              <a:t>Manual Paper Registers: Standard MOH paper books; prone to errors, damage, and search delays.</a:t>
+            </a:r>
+          </a:p>
+          <a:p>
+            <a:pPr>
+              <a:spcAft>
+                <a:spcPts val="500"/>
+              </a:spcAft>
+              <a:defRPr sz="1400" b="0"/>
+            </a:pPr>
+            <a:r>
+              <a:t>OpenMRS Community: Powerful open-source EMR, but complex and resource-intensive for small labs.</a:t>
+            </a:r>
+          </a:p>
+          <a:p>
+            <a:pPr>
+              <a:spcAft>
+                <a:spcPts val="500"/>
+              </a:spcAft>
+              <a:defRPr sz="1400" b="0"/>
+            </a:pPr>
+            <a:r>
+              <a:t>KenyaEMR: National standard for HIV/TB care; lacks full laboratory bench accessioning tools.</a:t>
+            </a:r>
+          </a:p>
+          <a:p>
+            <a:pPr>
+              <a:spcAft>
+                <a:spcPts val="500"/>
+              </a:spcAft>
+              <a:defRPr sz="1400" b="0"/>
+            </a:pPr>
+            <a:r>
+              <a:t>Commercial Proprietary LIMS: High functionality; prohibitive recurring annual license fees.</a:t>
+            </a:r>
+          </a:p>
+          <a:p>
+            <a:pPr>
+              <a:spcAft>
+                <a:spcPts val="500"/>
+              </a:spcAft>
+              <a:defRPr sz="1400" b="0"/>
+            </a:pPr>
+            <a:r>
+              <a:t>Cloud-Only Solutions: Scalable, but vulnerable to frequent rural internet disruptions in Gem Sub-County.</a:t>
+            </a:r>
+          </a:p>
+          <a:p>
+            <a:pPr>
+              <a:spcAft>
+                <a:spcPts val="0"/>
+              </a:spcAft>
+              <a:defRPr sz="1400" b="1"/>
+            </a:pPr>
+            <a:r>
+              <a:t>Proposed Solution: Lightweight, locally hosted web intranet LIMS tailored for Level 4 facilities.</a:t>
             </a:r>
           </a:p>
         </p:txBody>
@@ -6360,8 +6384,7 @@
           <a:lstStyle/>
           <a:p>
             <a:r>
-              <a:rPr lang="en-US" dirty="0" b="1"/>
-              <a:t>LITERATURE REVIEW cont.</a:t>
+              <a:t>LITERATURE REVIEW: GAPS &amp; SOLUTION</a:t>
             </a:r>
           </a:p>
         </p:txBody>
@@ -6381,64 +6404,58 @@
           <a:bodyPr/>
           <a:lstStyle/>
           <a:p>
-            <a:r>
-              <a:rPr lang="en-US" dirty="0" b="1"/>
-              <a:t>Critical Gaps Identified in Existing Literature &amp; Systems:</a:t>
-            </a:r>
-          </a:p>
-          <a:p>
-            <a:pPr marL="285750" indent="-285750"/>
-            <a:r>
-              <a:rPr lang="en-US" dirty="0"/>
-              <a:t>• Departmental Data Silos: Disconnection between consultation rooms, the laboratory bench, and cashier desks.</a:t>
-            </a:r>
-          </a:p>
-          <a:p>
-            <a:pPr marL="285750" indent="-285750"/>
-            <a:r>
-              <a:rPr lang="en-US" dirty="0"/>
-              <a:t>• Handwriting Illegibility: Critical diagnostic errors originating from misread clinical test orders.</a:t>
-            </a:r>
-          </a:p>
-          <a:p>
-            <a:pPr marL="285750" indent="-285750"/>
-            <a:r>
-              <a:rPr lang="en-US" dirty="0"/>
-              <a:t>• Prohibitive Cost Barriers: Level 4 public hospitals lack capital budgets for multi-million shilling proprietary software.</a:t>
-            </a:r>
-          </a:p>
-          <a:p>
-            <a:pPr marL="285750" indent="-285750"/>
-            <a:r>
-              <a:rPr lang="en-US" dirty="0"/>
-              <a:t>• Internet Vulnerability: Cloud-dependent systems suffer frequent work disruptions during rural fiber outages.</a:t>
-            </a:r>
-          </a:p>
-          <a:p>
-            <a:r>
-              <a:rPr lang="en-US" dirty="0" b="1"/>
-              <a:t>The Yala LIMS Proposed Solution:</a:t>
-            </a:r>
-          </a:p>
-          <a:p>
-            <a:pPr marL="285750" indent="-285750"/>
-            <a:r>
-              <a:rPr lang="en-US" dirty="0"/>
-              <a:t>• Lightweight, Zero-Licensing Architecture: Built on standard PHP/MySQL running over the hospital Local Area Network (LAN).</a:t>
-            </a:r>
-          </a:p>
-          <a:p>
-            <a:pPr marL="285750" indent="-285750"/>
-            <a:r>
-              <a:rPr lang="en-US" dirty="0"/>
-              <a:t>• Localized Billing Integration: Direct native support for M-Pesa mobile money, Cash, SHA/NHIF, and hospital waivers.</a:t>
-            </a:r>
-          </a:p>
-          <a:p>
-            <a:pPr marL="285750" indent="-285750"/>
-            <a:r>
-              <a:rPr lang="en-US" dirty="0"/>
-              <a:t>• High Availability: 24/7 uninterrupted operation with zero dependency on active internet connection.</a:t>
+            <a:pPr>
+              <a:spcAft>
+                <a:spcPts val="500"/>
+              </a:spcAft>
+              <a:defRPr sz="1400" b="0"/>
+            </a:pPr>
+            <a:r>
+              <a:t>Data Silos: Fragmented communication between reception, clinical consultation, and lab benches.</a:t>
+            </a:r>
+          </a:p>
+          <a:p>
+            <a:pPr>
+              <a:spcAft>
+                <a:spcPts val="500"/>
+              </a:spcAft>
+              <a:defRPr sz="1400" b="0"/>
+            </a:pPr>
+            <a:r>
+              <a:t>Pre-Analytical Errors: Lack of specimen rejection tracking and phlebotomy quality assurance.</a:t>
+            </a:r>
+          </a:p>
+          <a:p>
+            <a:pPr>
+              <a:spcAft>
+                <a:spcPts val="500"/>
+              </a:spcAft>
+              <a:defRPr sz="1400" b="0"/>
+            </a:pPr>
+            <a:r>
+              <a:t>Internet Dependency: Cloud-only systems fail during frequent rural network outages.</a:t>
+            </a:r>
+          </a:p>
+          <a:p>
+            <a:pPr>
+              <a:spcAft>
+                <a:spcPts val="500"/>
+              </a:spcAft>
+              <a:defRPr sz="1400" b="0"/>
+            </a:pPr>
+            <a:r>
+              <a:t>Financial Compliance: Physical cash handling violates Kenya's public cashless directives.</a:t>
+            </a:r>
+          </a:p>
+          <a:p>
+            <a:pPr>
+              <a:spcAft>
+                <a:spcPts val="0"/>
+              </a:spcAft>
+              <a:defRPr sz="1400" b="1"/>
+            </a:pPr>
+            <a:r>
+              <a:t>Delivered Solution: Offline-capable LAN intranet LIMS with eCitizen 222222 integration and ISO 15189 QA.</a:t>
             </a:r>
           </a:p>
         </p:txBody>
@@ -6502,8 +6519,7 @@
           <a:lstStyle/>
           <a:p>
             <a:r>
-              <a:rPr lang="en-US" dirty="0" b="1"/>
-              <a:t>METHODOLOGY/DEVELOPMENT TOOLS</a:t>
+              <a:t>METHODOLOGY &amp; DEVELOPMENT TOOLS</a:t>
             </a:r>
           </a:p>
         </p:txBody>
@@ -6536,70 +6552,69 @@
           </a:bodyPr>
           <a:lstStyle/>
           <a:p>
-            <a:pPr marL="285750" indent="-285750"/>
-            <a:r>
-              <a:rPr lang="en-US" dirty="0"/>
-              <a:t>Software Development Methodology: Agile Methodology (4 Sprints).</a:t>
-            </a:r>
-          </a:p>
-          <a:p>
-            <a:pPr marL="285750" indent="-285750"/>
-            <a:r>
-              <a:rPr lang="en-US" dirty="0"/>
-              <a:t>• Justification: Accommodates emerging clinical requirements; produces testable modules early for user feedback.</a:t>
-            </a:r>
-          </a:p>
-          <a:p>
-            <a:r>
-              <a:rPr lang="en-US" dirty="0" b="1"/>
-              <a:t>Data Collection Methods:</a:t>
-            </a:r>
-          </a:p>
-          <a:p>
-            <a:pPr marL="285750" indent="-285750"/>
-            <a:r>
-              <a:rPr lang="en-US" dirty="0"/>
-              <a:t>• Direct Observation: 2 on-site workflow studies recording sample transit times and register bottlenecks.</a:t>
-            </a:r>
-          </a:p>
-          <a:p>
-            <a:pPr marL="285750" indent="-285750"/>
-            <a:r>
-              <a:rPr lang="en-US" dirty="0"/>
-              <a:t>• Key Informant Interviews: In-depth sessions with the Medical Superintendent and Laboratory In-Charge.</a:t>
-            </a:r>
-          </a:p>
-          <a:p>
-            <a:pPr marL="285750" indent="-285750"/>
-            <a:r>
-              <a:rPr lang="en-US" dirty="0"/>
-              <a:t>• Questionnaires: Structured surveys administered to 10 staff members across all departments.</a:t>
-            </a:r>
-          </a:p>
-          <a:p>
-            <a:r>
-              <a:rPr lang="en-US" dirty="0" b="1"/>
-              <a:t>System Design &amp; Modeling Tools:</a:t>
-            </a:r>
-          </a:p>
-          <a:p>
-            <a:pPr marL="285750" indent="-285750"/>
-            <a:r>
-              <a:rPr lang="en-US" dirty="0"/>
-              <a:t>• Lucidchart (Flowcharts &amp; DFDs), Visual Paradigm Online (Use Cases), dbdiagram.io (ERD Schema).</a:t>
-            </a:r>
-          </a:p>
-          <a:p>
-            <a:r>
-              <a:rPr lang="en-US" dirty="0" b="1"/>
-              <a:t>Implementation Environment &amp; Tooling:</a:t>
-            </a:r>
-          </a:p>
-          <a:p>
-            <a:pPr marL="285750" indent="-285750"/>
-            <a:r>
-              <a:rPr lang="en-US" dirty="0"/>
-              <a:t>• Visual Studio Code IDE with PHP Intelephense; XAMPP v8.2 local server; GitHub repository version control.</a:t>
+            <a:pPr marL="285750" indent="-285750">
+              <a:spcAft>
+                <a:spcPts val="500"/>
+              </a:spcAft>
+              <a:defRPr sz="1400" b="0"/>
+            </a:pPr>
+            <a:r>
+              <a:t>Development Model: Agile Software Development Life Cycle (iterative 2-week sprint cycles).</a:t>
+            </a:r>
+          </a:p>
+          <a:p>
+            <a:pPr>
+              <a:spcAft>
+                <a:spcPts val="500"/>
+              </a:spcAft>
+              <a:defRPr sz="1400" b="0"/>
+            </a:pPr>
+            <a:r>
+              <a:t>Requirements Gathering: Staff interviews, direct bench observation, and review of MOH 204/706 registers.</a:t>
+            </a:r>
+          </a:p>
+          <a:p>
+            <a:pPr>
+              <a:spcAft>
+                <a:spcPts val="500"/>
+              </a:spcAft>
+              <a:defRPr sz="1400" b="0"/>
+            </a:pPr>
+            <a:r>
+              <a:t>System Modeling: UML diagrams (Use Case, Activity, Class) and Data Flow Diagrams (Context, Level 1).</a:t>
+            </a:r>
+          </a:p>
+          <a:p>
+            <a:pPr>
+              <a:spcAft>
+                <a:spcPts val="500"/>
+              </a:spcAft>
+              <a:defRPr sz="1400" b="0"/>
+            </a:pPr>
+            <a:r>
+              <a:t>Technology Stack: PHP 8.2 backend, MySQL 8.0 database, Apache/XAMPP web server, Bootstrap 5.</a:t>
+            </a:r>
+          </a:p>
+          <a:p>
+            <a:pPr>
+              <a:spcAft>
+                <a:spcPts val="500"/>
+              </a:spcAft>
+              <a:defRPr sz="1400" b="0"/>
+            </a:pPr>
+            <a:r>
+              <a:t>Engineering Tools: Visual Studio Code, Git/GitHub version control, FPDF reporting library.</a:t>
+            </a:r>
+          </a:p>
+          <a:p>
+            <a:pPr>
+              <a:spcAft>
+                <a:spcPts val="0"/>
+              </a:spcAft>
+              <a:defRPr sz="1400" b="0"/>
+            </a:pPr>
+            <a:r>
+              <a:t>Quality Assurance: Unit testing, role-boundary integration testing, and User Acceptance Testing (UAT).</a:t>
             </a:r>
           </a:p>
         </p:txBody>
@@ -6670,8 +6685,7 @@
           <a:lstStyle/>
           <a:p>
             <a:r>
-              <a:rPr lang="en-US" dirty="0" b="1"/>
-              <a:t>SYSTEM ANALYSIS AND REQUIREMENTS MODELING</a:t>
+              <a:t>SYSTEM ANALYSIS &amp; FEASIBILITY STUDY</a:t>
             </a:r>
           </a:p>
         </p:txBody>
@@ -6704,71 +6718,91 @@
           </a:bodyPr>
           <a:lstStyle/>
           <a:p>
-            <a:r>
-              <a:rPr lang="en-US" dirty="0" b="1"/>
-              <a:t>System Feasibility Analysis:</a:t>
-            </a:r>
-          </a:p>
-          <a:p>
-            <a:pPr marL="285750" indent="-285750"/>
-            <a:r>
-              <a:rPr lang="en-US" dirty="0"/>
-              <a:t>• Technical Feasibility: Hospital LAN and existing desktop workstation PCs fully support deployment with no new hardware.</a:t>
-            </a:r>
-          </a:p>
-          <a:p>
-            <a:pPr marL="285750" indent="-285750"/>
-            <a:r>
-              <a:rPr lang="en-US" dirty="0"/>
-              <a:t>• Economic Feasibility: KES 110,800 development cost recovered through eliminated paper stationery and recovered un-billed tests.</a:t>
-            </a:r>
-          </a:p>
-          <a:p>
-            <a:pPr marL="285750" indent="-285750"/>
-            <a:r>
-              <a:rPr lang="en-US" dirty="0"/>
-              <a:t>• Operational Feasibility: Digital screens mirror physical MOH registers; staff rated ease of use at 4.7 out of 5.0.</a:t>
-            </a:r>
-          </a:p>
-          <a:p>
-            <a:pPr marL="285750" indent="-285750"/>
-            <a:r>
-              <a:rPr lang="en-US" dirty="0"/>
-              <a:t>• Schedule Feasibility: Successfully delivered across 4 Agile sprints within the academic calendar period.</a:t>
-            </a:r>
-          </a:p>
-          <a:p>
-            <a:r>
-              <a:rPr lang="en-US" dirty="0" b="1"/>
-              <a:t>User Role Profiles Identified:</a:t>
-            </a:r>
-          </a:p>
-          <a:p>
-            <a:pPr marL="285750" indent="-285750"/>
-            <a:r>
-              <a:rPr lang="en-US" dirty="0"/>
-              <a:t>• Receptionist: Patient bio-data capture, bulk CSV uploads, payment collection, appointment bookings.</a:t>
-            </a:r>
-          </a:p>
-          <a:p>
-            <a:pPr marL="285750" indent="-285750"/>
-            <a:r>
-              <a:rPr lang="en-US" dirty="0"/>
-              <a:t>• Doctor / Clinician: Longitudinal diagnostic history review, CPOE test requests, clinical flag allergy alerts.</a:t>
-            </a:r>
-          </a:p>
-          <a:p>
-            <a:pPr marL="285750" indent="-285750"/>
-            <a:r>
-              <a:rPr lang="en-US" dirty="0"/>
-              <a:t>• Laboratory Technologist: Specimen accessioning, 2-hr overdue monitoring, results verification, certified PDF generation.</a:t>
-            </a:r>
-          </a:p>
-          <a:p>
-            <a:pPr marL="285750" indent="-285750"/>
-            <a:r>
-              <a:rPr lang="en-US" dirty="0"/>
-              <a:t>• Administrator: System oversight, test catalogue pricing, user accounts, audit trails, disaster recovery backups.</a:t>
+            <a:pPr>
+              <a:spcAft>
+                <a:spcPts val="500"/>
+              </a:spcAft>
+              <a:defRPr sz="1400" b="0"/>
+            </a:pPr>
+            <a:r>
+              <a:t>Technical Feasibility: Verified stack runs seamlessly on hospital workstation PCs over LAN.</a:t>
+            </a:r>
+          </a:p>
+          <a:p>
+            <a:pPr>
+              <a:spcAft>
+                <a:spcPts val="500"/>
+              </a:spcAft>
+              <a:defRPr sz="1400" b="0"/>
+            </a:pPr>
+            <a:r>
+              <a:t>Operational Feasibility: UI mirrors physical MOH registers; staff achieved rapid proficiency.</a:t>
+            </a:r>
+          </a:p>
+          <a:p>
+            <a:pPr>
+              <a:spcAft>
+                <a:spcPts val="500"/>
+              </a:spcAft>
+              <a:defRPr sz="1400" b="0"/>
+            </a:pPr>
+            <a:r>
+              <a:t>Economic Feasibility: High return through eliminated stationery and recovered un-billed tests.</a:t>
+            </a:r>
+          </a:p>
+          <a:p>
+            <a:pPr>
+              <a:spcAft>
+                <a:spcPts val="400"/>
+              </a:spcAft>
+              <a:defRPr sz="1400" b="1"/>
+            </a:pPr>
+            <a:r>
+              <a:t>User Role Profiles Implemented:</a:t>
+            </a:r>
+          </a:p>
+          <a:p>
+            <a:pPr>
+              <a:spcAft>
+                <a:spcPts val="300"/>
+              </a:spcAft>
+              <a:defRPr sz="1300" b="0"/>
+            </a:pPr>
+            <a:r>
+              <a:t>• Receptionist: Patient triage, OPD registration, and eCitizen billing routing.</a:t>
+            </a:r>
+          </a:p>
+          <a:p>
+            <a:pPr>
+              <a:spcAft>
+                <a:spcPts val="300"/>
+              </a:spcAft>
+              <a:defRPr sz="1300" b="0"/>
+            </a:pPr>
+            <a:r>
+              <a:t>• Doctor: Diagnostic requisitions, longitudinal history, and panic value review.</a:t>
+            </a:r>
+          </a:p>
+          <a:p>
+            <a:pPr>
+              <a:spcAft>
+                <a:spcPts val="300"/>
+              </a:spcAft>
+              <a:defRPr sz="1300" b="0"/>
+            </a:pPr>
+            <a:r>
+              <a:t>• Lab Technologist: Sample accessioning, bench testing, QA logs, and blood bank safety.</a:t>
+            </a:r>
+          </a:p>
+          <a:p>
+            <a:pPr>
+              <a:spcAft>
+                <a:spcPts val="0"/>
+              </a:spcAft>
+              <a:defRPr sz="1300" b="0"/>
+            </a:pPr>
+            <a:r>
+              <a:t>• Administrator: User accounts, test catalogue pricing, audit trails, and SQL backups.</a:t>
             </a:r>
           </a:p>
         </p:txBody>
@@ -6839,8 +6873,7 @@
           <a:lstStyle/>
           <a:p>
             <a:r>
-              <a:rPr lang="en-US" dirty="0" b="1"/>
-              <a:t>SYSTEM ANALYSIS AND REQUIREMENTS MODELING cont.</a:t>
+              <a:t>SYSTEM REQUIREMENTS MODELING</a:t>
             </a:r>
           </a:p>
         </p:txBody>
@@ -6873,78 +6906,102 @@
           </a:bodyPr>
           <a:lstStyle/>
           <a:p>
-            <a:r>
-              <a:rPr lang="en-US" dirty="0" b="1"/>
-              <a:t>Functional Requirements Specified:</a:t>
-            </a:r>
-          </a:p>
-          <a:p>
-            <a:pPr marL="285750" indent="-285750"/>
-            <a:r>
-              <a:rPr lang="en-US" dirty="0"/>
-              <a:t>• Patient Registration: Unique OPD number generation, demographic validation, insurance details, CSV bulk import.</a:t>
-            </a:r>
-          </a:p>
-          <a:p>
-            <a:pPr marL="285750" indent="-285750"/>
-            <a:r>
-              <a:rPr lang="en-US" dirty="0"/>
-              <a:t>• CPOE Ordering: Categorized test catalogue, automated fee tallying, electronic routing to laboratory queue.</a:t>
-            </a:r>
-          </a:p>
-          <a:p>
-            <a:pPr marL="285750" indent="-285750"/>
-            <a:r>
-              <a:rPr lang="en-US" dirty="0"/>
-              <a:t>• Worklist &amp; Specimen Tracking: Real-time status indicators (Pending, In Progress, Completed, Overdue).</a:t>
-            </a:r>
-          </a:p>
-          <a:p>
-            <a:pPr marL="285750" indent="-285750"/>
-            <a:r>
-              <a:rPr lang="en-US" dirty="0"/>
-              <a:t>• Result Certification: Normal reference ranges, automated abnormal result flags, certified FPDF PDF output.</a:t>
-            </a:r>
-          </a:p>
-          <a:p>
-            <a:pPr marL="285750" indent="-285750"/>
-            <a:r>
-              <a:rPr lang="en-US" dirty="0"/>
-              <a:t>• Revenue &amp; Billing: Reconciles Cash receipts, M-Pesa transaction codes, SHA/NHIF claims, and authorized waivers.</a:t>
-            </a:r>
-          </a:p>
-          <a:p>
-            <a:r>
-              <a:rPr lang="en-US" dirty="0" b="1"/>
-              <a:t>Non-Functional Requirements Implemented:</a:t>
-            </a:r>
-          </a:p>
-          <a:p>
-            <a:pPr marL="285750" indent="-285750"/>
-            <a:r>
-              <a:rPr lang="en-US" dirty="0"/>
-              <a:t>• Usability: Responsive Bootstrap 5 interface accessible on desktop PCs and mobile tablets.</a:t>
-            </a:r>
-          </a:p>
-          <a:p>
-            <a:pPr marL="285750" indent="-285750"/>
-            <a:r>
-              <a:rPr lang="en-US" dirty="0"/>
+            <a:pPr>
+              <a:spcAft>
+                <a:spcPts val="400"/>
+              </a:spcAft>
+              <a:defRPr sz="1400" b="1"/>
+            </a:pPr>
+            <a:r>
+              <a:t>Functional Requirements Implemented:</a:t>
+            </a:r>
+          </a:p>
+          <a:p>
+            <a:pPr>
+              <a:spcAft>
+                <a:spcPts val="300"/>
+              </a:spcAft>
+              <a:defRPr sz="1300" b="0"/>
+            </a:pPr>
+            <a:r>
+              <a:t>• Patient Registration: Unique OPD numbering and A5 routing slips with Code128 barcodes.</a:t>
+            </a:r>
+          </a:p>
+          <a:p>
+            <a:pPr>
+              <a:spcAft>
+                <a:spcPts val="300"/>
+              </a:spcAft>
+              <a:defRPr sz="1300" b="0"/>
+            </a:pPr>
+            <a:r>
+              <a:t>• CPOE Ordering: Categorized test catalogue with urgency flags and clinical allergy alerts.</a:t>
+            </a:r>
+          </a:p>
+          <a:p>
+            <a:pPr>
+              <a:spcAft>
+                <a:spcPts val="300"/>
+              </a:spcAft>
+              <a:defRPr sz="1300" b="0"/>
+            </a:pPr>
+            <a:r>
+              <a:t>• Results Workbench: Normal reference ranges, automated panic alerting, and certified PDF printing.</a:t>
+            </a:r>
+          </a:p>
+          <a:p>
+            <a:pPr>
+              <a:spcAft>
+                <a:spcPts val="600"/>
+              </a:spcAft>
+              <a:defRPr sz="1300" b="0"/>
+            </a:pPr>
+            <a:r>
+              <a:t>• Cashless Billing: Real-time settlement via Government eCitizen Paybill 222222 gateway.</a:t>
+            </a:r>
+          </a:p>
+          <a:p>
+            <a:pPr>
+              <a:spcAft>
+                <a:spcPts val="400"/>
+              </a:spcAft>
+              <a:defRPr sz="1400" b="1"/>
+            </a:pPr>
+            <a:r>
+              <a:t>Non-Functional Requirements Enforced:</a:t>
+            </a:r>
+          </a:p>
+          <a:p>
+            <a:pPr>
+              <a:spcAft>
+                <a:spcPts val="300"/>
+              </a:spcAft>
+              <a:defRPr sz="1300" b="0"/>
+            </a:pPr>
+            <a:r>
+              <a:t>• Security: Role-Based Access Control, Bcrypt password hashing, and CSRF token defense.</a:t>
+            </a:r>
+          </a:p>
+          <a:p>
+            <a:pPr>
+              <a:spcAft>
+                <a:spcPts val="300"/>
+              </a:spcAft>
+              <a:defRPr sz="1300" b="0"/>
+            </a:pPr>
+            <a:r>
               <a:t>• Speed &amp; Performance: Sub-second page load times (&lt;1.5s) over the hospital Local Area Network.</a:t>
             </a:r>
           </a:p>
           <a:p>
-            <a:pPr marL="285750" indent="-285750"/>
-            <a:r>
-              <a:rPr lang="en-US" dirty="0"/>
-              <a:t>• System Security: Password hashing (Bcrypt), CSRF token verification, and 100% prepared statement execution.</a:t>
-            </a:r>
-          </a:p>
-          <a:p>
-            <a:pPr marL="285750" indent="-285750"/>
-            <a:r>
-              <a:rPr lang="en-US" dirty="0"/>
-              <a:t>• Reliability: Automated daily database SQL backup script and manual administrative trigger.</a:t>
+            <a:pPr>
+              <a:spcAft>
+                <a:spcPts val="0"/>
+              </a:spcAft>
+              <a:defRPr sz="1300" b="0"/>
+            </a:pPr>
+            <a:r>
+              <a:t>• Reliability: Automated daily database SQL backup scripts with manual admin trigger.</a:t>
             </a:r>
           </a:p>
         </p:txBody>
@@ -7004,8 +7061,7 @@
           <a:lstStyle/>
           <a:p>
             <a:r>
-              <a:rPr lang="en-US" dirty="0" b="1"/>
-              <a:t>SYSTEM DESIGN</a:t>
+              <a:t>SYSTEM DESIGN &amp; ARCHITECTURE</a:t>
             </a:r>
           </a:p>
         </p:txBody>
@@ -7025,69 +7081,80 @@
           <a:bodyPr/>
           <a:lstStyle/>
           <a:p>
-            <a:r>
-              <a:rPr lang="en-US" dirty="0" b="1"/>
+            <a:pPr>
+              <a:spcAft>
+                <a:spcPts val="400"/>
+              </a:spcAft>
+              <a:defRPr sz="1400" b="1"/>
+            </a:pPr>
+            <a:r>
               <a:t>3-Tier Client-Server Architecture:</a:t>
             </a:r>
           </a:p>
           <a:p>
-            <a:pPr marL="285750" indent="-285750"/>
-            <a:r>
-              <a:rPr lang="en-US" dirty="0"/>
-              <a:t>• Presentation Tier: Bootstrap 5, FontAwesome 6, Chart.js for responsive data visualization.</a:t>
-            </a:r>
-          </a:p>
-          <a:p>
-            <a:pPr marL="285750" indent="-285750"/>
-            <a:r>
-              <a:rPr lang="en-US" dirty="0"/>
-              <a:t>• Application Logic Tier: Modular PHP 8.2 business logic with FPDF 1.86 PDF compilation.</a:t>
-            </a:r>
-          </a:p>
-          <a:p>
-            <a:pPr marL="285750" indent="-285750"/>
-            <a:r>
-              <a:rPr lang="en-US" dirty="0"/>
-              <a:t>• Data Persistence Tier: MySQL 8.0 relational database engine with foreign key relational integrity.</a:t>
-            </a:r>
-          </a:p>
-          <a:p>
-            <a:r>
-              <a:rPr lang="en-US" dirty="0" b="1"/>
-              <a:t>Data Flow Diagram (Level 0 — Context Diagram):</a:t>
-            </a:r>
-          </a:p>
-          <a:p>
-            <a:pPr marL="285750" indent="-285750"/>
-            <a:r>
-              <a:rPr lang="en-US" dirty="0"/>
-              <a:t>• Connects four external entities (Doctor, Lab Technician, Receptionist/Cashier, Administrator) to Yala LIMS core process.</a:t>
-            </a:r>
-          </a:p>
-          <a:p>
-            <a:r>
-              <a:rPr lang="en-US" dirty="0" b="1"/>
-              <a:t>Data Flow Diagram (Level 1 — Functional Decomposition):</a:t>
-            </a:r>
-          </a:p>
-          <a:p>
-            <a:pPr marL="285750" indent="-285750"/>
-            <a:r>
-              <a:rPr lang="en-US" dirty="0"/>
-              <a:t>• 1.0 Manage Patients | 2.0 Process Test Orders | 3.0 Record Results | 4.0 Reconcile Billing | 5.0 Manage Alerts | 6.0 Generate Analytics.</a:t>
-            </a:r>
-          </a:p>
-          <a:p>
-            <a:r>
-              <a:rPr lang="en-US" dirty="0" b="1"/>
-              <a:t>Relational Database Schema (ERD):</a:t>
-            </a:r>
-          </a:p>
-          <a:p>
-            <a:pPr marL="285750" indent="-285750"/>
-            <a:r>
-              <a:rPr lang="en-US" dirty="0"/>
-              <a:t>• Models 10 core tables: patients, lab_requests, lab_tests, test_results, payments, insurance_claims, appointments, clinical_flags, notifications, audit_log.</a:t>
+            <a:pPr>
+              <a:spcAft>
+                <a:spcPts val="300"/>
+              </a:spcAft>
+              <a:defRPr sz="1300" b="0"/>
+            </a:pPr>
+            <a:r>
+              <a:t>• Presentation Tier: Responsive Bootstrap 5, FontAwesome 6, and Chart.js dashboards.</a:t>
+            </a:r>
+          </a:p>
+          <a:p>
+            <a:pPr>
+              <a:spcAft>
+                <a:spcPts val="300"/>
+              </a:spcAft>
+              <a:defRPr sz="1300" b="0"/>
+            </a:pPr>
+            <a:r>
+              <a:t>• Application Tier: Modular PHP 8.2 business logic with FPDF automated report engine.</a:t>
+            </a:r>
+          </a:p>
+          <a:p>
+            <a:pPr>
+              <a:spcAft>
+                <a:spcPts val="600"/>
+              </a:spcAft>
+              <a:defRPr sz="1300" b="0"/>
+            </a:pPr>
+            <a:r>
+              <a:t>• Data Persistence Tier: MySQL 8.0 relational database with strict foreign key constraints.</a:t>
+            </a:r>
+          </a:p>
+          <a:p>
+            <a:pPr>
+              <a:spcAft>
+                <a:spcPts val="400"/>
+              </a:spcAft>
+              <a:defRPr sz="1400" b="1"/>
+            </a:pPr>
+            <a:r>
+              <a:t>Data Flow Modeling:</a:t>
+            </a:r>
+          </a:p>
+          <a:p>
+            <a:pPr>
+              <a:spcAft>
+                <a:spcPts val="300"/>
+              </a:spcAft>
+              <a:defRPr sz="1300" b="0"/>
+            </a:pPr>
+            <a:r>
+              <a:t>• Context Level 0 &amp; Level 1 DFDs connecting Reception, Doctor, Lab Tech, and Administrator.</a:t>
+            </a:r>
+          </a:p>
+          <a:p>
+            <a:pPr>
+              <a:spcAft>
+                <a:spcPts val="0"/>
+              </a:spcAft>
+              <a:defRPr sz="1300" b="0"/>
+            </a:pPr>
+            <a:r>
+              <a:t>• Relational Database Schema: 12 normalized tables modeling patients, orders, results, payments, and QA.</a:t>
             </a:r>
           </a:p>
         </p:txBody>
@@ -7140,8 +7207,7 @@
           <a:lstStyle/>
           <a:p>
             <a:r>
-              <a:rPr lang="en-US" dirty="0" b="1"/>
-              <a:t>SYSTEM DESIGN cont..</a:t>
+              <a:t>DATABASE SCHEMA &amp; SECURITY CONTROLS</a:t>
             </a:r>
           </a:p>
         </p:txBody>
@@ -7161,78 +7227,80 @@
           <a:bodyPr/>
           <a:lstStyle/>
           <a:p>
-            <a:r>
-              <a:rPr lang="en-US" dirty="0" b="1"/>
-              <a:t>Physical Database Schema Specifications:</a:t>
-            </a:r>
-          </a:p>
-          <a:p>
-            <a:pPr marL="285750" indent="-285750"/>
-            <a:r>
-              <a:rPr lang="en-US" dirty="0"/>
-              <a:t>• `patients`: Stores unique `opd_number`, full demographics, insurance provider, policy number, registration timestamp.</a:t>
-            </a:r>
-          </a:p>
-          <a:p>
-            <a:pPr marL="285750" indent="-285750"/>
-            <a:r>
-              <a:rPr lang="en-US" dirty="0"/>
-              <a:t>• `lab_requests`: Links patient ID, ordering clinician, request date, lifecycle status, and payment status.</a:t>
-            </a:r>
-          </a:p>
-          <a:p>
-            <a:pPr marL="285750" indent="-285750"/>
-            <a:r>
-              <a:rPr lang="en-US" dirty="0"/>
-              <a:t>• `test_results`: Captures test ID, result value, units, normal reference range, technician remarks, entered-by user ID.</a:t>
-            </a:r>
-          </a:p>
-          <a:p>
-            <a:pPr marL="285750" indent="-285750"/>
-            <a:r>
-              <a:rPr lang="en-US" dirty="0"/>
-              <a:t>• `payments`: Tracks amount paid, payment method (M-Pesa, Cash, Insurance, Waiver), claim reference, settlement date, cashier name.</a:t>
-            </a:r>
-          </a:p>
-          <a:p>
-            <a:pPr marL="285750" indent="-285750"/>
-            <a:r>
-              <a:rPr lang="en-US" dirty="0"/>
-              <a:t>• `clinical_flags`: Stores critical clinical warnings (e.g., penicillin allergies) to alert clinicians prior to test ordering.</a:t>
-            </a:r>
-          </a:p>
-          <a:p>
-            <a:r>
-              <a:rPr lang="en-US" dirty="0" b="1"/>
-              <a:t>Role-Based Access Control (RBAC) Matrix:</a:t>
-            </a:r>
-          </a:p>
-          <a:p>
-            <a:pPr marL="285750" indent="-285750"/>
-            <a:r>
-              <a:rPr lang="en-US" dirty="0"/>
-              <a:t>• Receptionist: Registration, CSV Import, Cashier, Appointments.</a:t>
-            </a:r>
-          </a:p>
-          <a:p>
-            <a:pPr marL="285750" indent="-285750"/>
-            <a:r>
-              <a:rPr lang="en-US" dirty="0"/>
-              <a:t>• Doctor: Patient Search, History Review, CPOE Test Ordering, Allergy Alerts.</a:t>
-            </a:r>
-          </a:p>
-          <a:p>
-            <a:pPr marL="285750" indent="-285750"/>
-            <a:r>
-              <a:rPr lang="en-US" dirty="0"/>
-              <a:t>• Lab Tech: Accessioning Queue, Results Entry, Certificate Printing.</a:t>
-            </a:r>
-          </a:p>
-          <a:p>
-            <a:pPr marL="285750" indent="-285750"/>
-            <a:r>
-              <a:rPr lang="en-US" dirty="0"/>
-              <a:t>• Admin: Full Access, User Management, Catalogue Pricing, Audit Trail, SQL Backups.</a:t>
+            <a:pPr>
+              <a:spcAft>
+                <a:spcPts val="400"/>
+              </a:spcAft>
+              <a:defRPr sz="1400" b="1"/>
+            </a:pPr>
+            <a:r>
+              <a:t>Core Relational Tables Implemented:</a:t>
+            </a:r>
+          </a:p>
+          <a:p>
+            <a:pPr>
+              <a:spcAft>
+                <a:spcPts val="300"/>
+              </a:spcAft>
+              <a:defRPr sz="1300" b="0"/>
+            </a:pPr>
+            <a:r>
+              <a:t>• `patients`: Unique OPD sequence, patient demographics, SHA/NHIF insurance policy data.</a:t>
+            </a:r>
+          </a:p>
+          <a:p>
+            <a:pPr>
+              <a:spcAft>
+                <a:spcPts val="300"/>
+              </a:spcAft>
+              <a:defRPr sz="1300" b="0"/>
+            </a:pPr>
+            <a:r>
+              <a:t>• `lab_requests` &amp; `test_results`: Diagnostic ordering, normal reference ranges, and panic flags.</a:t>
+            </a:r>
+          </a:p>
+          <a:p>
+            <a:pPr>
+              <a:spcAft>
+                <a:spcPts val="300"/>
+              </a:spcAft>
+              <a:defRPr sz="1300" b="0"/>
+            </a:pPr>
+            <a:r>
+              <a:t>• `payments`: Government eCitizen PRN references, M-Pesa transaction codes, and cashier audits.</a:t>
+            </a:r>
+          </a:p>
+          <a:p>
+            <a:pPr>
+              <a:spcAft>
+                <a:spcPts val="600"/>
+              </a:spcAft>
+              <a:defRPr sz="1300" b="0"/>
+            </a:pPr>
+            <a:r>
+              <a:t>• `blood_bank` &amp; `sample_rejections`: Transfusion crossmatching and ISO 15189 pre-analytical QA.</a:t>
+            </a:r>
+          </a:p>
+          <a:p>
+            <a:pPr>
+              <a:spcAft>
+                <a:spcPts val="400"/>
+              </a:spcAft>
+              <a:defRPr sz="1400" b="1"/>
+            </a:pPr>
+            <a:r>
+              <a:t>Security &amp; Privacy Enforcement:</a:t>
+            </a:r>
+          </a:p>
+          <a:p>
+            <a:pPr>
+              <a:spcAft>
+                <a:spcPts val="0"/>
+              </a:spcAft>
+              <a:defRPr sz="1300" b="0"/>
+            </a:pPr>
+            <a:r>
+              <a:t>• Session encryption, 100% prepared SQL statements (SQL injection defense), and full audit logging.</a:t>
             </a:r>
           </a:p>
         </p:txBody>
@@ -7285,8 +7353,7 @@
           <a:lstStyle/>
           <a:p>
             <a:r>
-              <a:rPr lang="en-US" dirty="0" b="1"/>
-              <a:t>IMPLEMENTATION</a:t>
+              <a:t>CORE MODULES IMPLEMENTED</a:t>
             </a:r>
           </a:p>
         </p:txBody>
@@ -7306,78 +7373,80 @@
           <a:bodyPr/>
           <a:lstStyle/>
           <a:p>
-            <a:r>
-              <a:rPr lang="en-US" dirty="0" b="1"/>
-              <a:t>Core Operational Modules Deployed:</a:t>
-            </a:r>
-          </a:p>
-          <a:p>
-            <a:pPr marL="285750" indent="-285750"/>
-            <a:r>
-              <a:rPr lang="en-US" dirty="0"/>
-              <a:t>• Authentication (`index.php`): Secure login with bcrypt password verification and role-based session routing.</a:t>
-            </a:r>
-          </a:p>
-          <a:p>
-            <a:pPr marL="285750" indent="-285750"/>
-            <a:r>
-              <a:rPr lang="en-US" dirty="0"/>
-              <a:t>• Patient Registration (`add_patient.php` &amp; `import_patients.php`): OPD uniqueness validation and bulk CSV archiving.</a:t>
-            </a:r>
-          </a:p>
-          <a:p>
-            <a:pPr marL="285750" indent="-285750"/>
-            <a:r>
-              <a:rPr lang="en-US" dirty="0"/>
-              <a:t>• Doctor CPOE Console (`request_test.php`): Interactive ordering with active penicillin allergy clinical safety warnings.</a:t>
-            </a:r>
-          </a:p>
-          <a:p>
-            <a:pPr marL="285750" indent="-285750"/>
-            <a:r>
-              <a:rPr lang="en-US" dirty="0"/>
-              <a:t>• Lab Workbench (`enter_results.php`): Accessioning queue, 2-hour overdue badges, reference ranges, and FPDF reports.</a:t>
-            </a:r>
-          </a:p>
-          <a:p>
-            <a:pPr marL="285750" indent="-285750"/>
-            <a:r>
-              <a:rPr lang="en-US" dirty="0"/>
-              <a:t>• Cashier Billing (`billing.php`): Multi-channel settlement with M-Pesa transaction code and cash receipt recording.</a:t>
-            </a:r>
-          </a:p>
-          <a:p>
-            <a:pPr marL="285750" indent="-285750"/>
-            <a:r>
-              <a:rPr lang="en-US" dirty="0"/>
-              <a:t>• Claims &amp; Appointments (`insurance_claims.php` &amp; `appointments.php`): SHA/NHIF claim tracking and clinic scheduler.</a:t>
-            </a:r>
-          </a:p>
-          <a:p>
-            <a:pPr marL="285750" indent="-285750"/>
-            <a:r>
-              <a:rPr lang="en-US" dirty="0"/>
-              <a:t>• Admin Analytics (`reports.php`): Chart.js 7-day workload trends, gender breakdown, top tests, and revenue summaries.</a:t>
-            </a:r>
-          </a:p>
-          <a:p>
-            <a:r>
-              <a:rPr lang="en-US" dirty="0" b="1"/>
-              <a:t>Quality Assurance &amp; Verification:</a:t>
-            </a:r>
-          </a:p>
-          <a:p>
-            <a:pPr marL="285750" indent="-285750"/>
-            <a:r>
-              <a:rPr lang="en-US" dirty="0"/>
-              <a:t>• System Testing: 14 test cases covering functional, billing, and security flows achieved 100% Pass Rate.</a:t>
-            </a:r>
-          </a:p>
-          <a:p>
-            <a:pPr marL="285750" indent="-285750"/>
-            <a:r>
-              <a:rPr lang="en-US" dirty="0"/>
-              <a:t>• User Acceptance Testing (UAT): Evaluated with 8 hospital staff members; achieved an overall satisfaction of 4.6 / 5.0.</a:t>
+            <a:pPr>
+              <a:spcAft>
+                <a:spcPts val="300"/>
+              </a:spcAft>
+              <a:defRPr sz="1300" b="0"/>
+            </a:pPr>
+            <a:r>
+              <a:t>• Authentication &amp; RBAC (index.php): Secure login with Bcrypt hashing and role-based routing.</a:t>
+            </a:r>
+          </a:p>
+          <a:p>
+            <a:pPr>
+              <a:spcAft>
+                <a:spcPts val="300"/>
+              </a:spcAft>
+              <a:defRPr sz="1300" b="0"/>
+            </a:pPr>
+            <a:r>
+              <a:t>• Outpatient Reception (add_patient.php): Triage vitals, Code128 routing slip, and check-in queue.</a:t>
+            </a:r>
+          </a:p>
+          <a:p>
+            <a:pPr>
+              <a:spcAft>
+                <a:spcPts val="300"/>
+              </a:spcAft>
+              <a:defRPr sz="1300" b="0"/>
+            </a:pPr>
+            <a:r>
+              <a:t>• Doctor CPOE Console (request_test.php): Requisition ordering with clinical allergy flags.</a:t>
+            </a:r>
+          </a:p>
+          <a:p>
+            <a:pPr>
+              <a:spcAft>
+                <a:spcPts val="300"/>
+              </a:spcAft>
+              <a:defRPr sz="1300" b="0"/>
+            </a:pPr>
+            <a:r>
+              <a:t>• Lab Workbench (enter_results.php): Reference ranges, panic toasts, and certified PDF printing.</a:t>
+            </a:r>
+          </a:p>
+          <a:p>
+            <a:pPr>
+              <a:spcAft>
+                <a:spcPts val="300"/>
+              </a:spcAft>
+              <a:defRPr sz="1300" b="0"/>
+            </a:pPr>
+            <a:r>
+              <a:t>• eCitizen Cashless Billing (billing.php): Paybill 222222 settlement and A5 revenue receipting.</a:t>
+            </a:r>
+          </a:p>
+          <a:p>
+            <a:pPr>
+              <a:spcAft>
+                <a:spcPts val="300"/>
+              </a:spcAft>
+              <a:defRPr sz="1300" b="0"/>
+            </a:pPr>
+            <a:r>
+              <a:t>• Blood Bank &amp; Specimen QA: Inpatient crossmatching and redraw alerts under ISO 15189.</a:t>
+            </a:r>
+          </a:p>
+          <a:p>
+            <a:pPr>
+              <a:spcAft>
+                <a:spcPts val="0"/>
+              </a:spcAft>
+              <a:defRPr sz="1300" b="0"/>
+            </a:pPr>
+            <a:r>
+              <a:t>• MOH 706 Reports (reports.php): 1-click statistical export and turnaround-time (TAT) analytics.</a:t>
             </a:r>
           </a:p>
         </p:txBody>
@@ -7430,8 +7499,7 @@
           <a:lstStyle/>
           <a:p>
             <a:r>
-              <a:rPr lang="en-US" dirty="0" b="1"/>
-              <a:t>CONCLUSIONS</a:t>
+              <a:t>TESTING &amp; OPERATIONAL IMPACT</a:t>
             </a:r>
           </a:p>
         </p:txBody>
@@ -7451,77 +7519,69 @@
           <a:bodyPr/>
           <a:lstStyle/>
           <a:p>
-            <a:r>
-              <a:rPr lang="en-US" dirty="0" b="1"/>
-              <a:t>Project Success Degree:</a:t>
-            </a:r>
-          </a:p>
-          <a:p>
-            <a:pPr marL="285750" indent="-285750"/>
-            <a:r>
-              <a:rPr lang="en-US" dirty="0"/>
-              <a:t>• 100% of general and specific objectives were successfully designed, developed, and verified.</a:t>
-            </a:r>
-          </a:p>
-          <a:p>
-            <a:pPr marL="285750" indent="-285750"/>
-            <a:r>
-              <a:rPr lang="en-US" dirty="0"/>
-              <a:t>• The system is operational and deployed on the host computer at Yala Sub-County Hospital.</a:t>
-            </a:r>
-          </a:p>
-          <a:p>
-            <a:r>
-              <a:rPr lang="en-US" dirty="0" b="1"/>
-              <a:t>Measurable Operational Impact at Yala Hospital:</a:t>
-            </a:r>
-          </a:p>
-          <a:p>
-            <a:pPr marL="285750" indent="-285750"/>
-            <a:r>
-              <a:rPr lang="en-US" dirty="0"/>
-              <a:t>• Missing Result Slips: Reduced from ~12% monthly to 0% through centralized electronic storage.</a:t>
-            </a:r>
-          </a:p>
-          <a:p>
-            <a:pPr marL="285750" indent="-285750"/>
-            <a:r>
-              <a:rPr lang="en-US" dirty="0"/>
-              <a:t>• Transcription Errors: Eliminated illegible clinician handwriting through computerized ordering (CPOE).</a:t>
-            </a:r>
-          </a:p>
-          <a:p>
-            <a:pPr marL="285750" indent="-285750"/>
-            <a:r>
-              <a:rPr lang="en-US" dirty="0"/>
-              <a:t>• Turnaround Time: Accelerated specimen processing using visual queues with 2-hour overdue alerts.</a:t>
-            </a:r>
-          </a:p>
-          <a:p>
-            <a:pPr marL="285750" indent="-285750"/>
-            <a:r>
-              <a:rPr lang="en-US" dirty="0"/>
-              <a:t>• Reporting Efficiency: Reduced monthly MOH report compilation from 2 full working days to instant automated generation.</a:t>
-            </a:r>
-          </a:p>
-          <a:p>
-            <a:pPr marL="285750" indent="-285750"/>
-            <a:r>
-              <a:rPr lang="en-US" dirty="0"/>
-              <a:t>• Financial Governance: Closed revenue leakage through automated payment gatekeeping before results release.</a:t>
-            </a:r>
-          </a:p>
-          <a:p>
-            <a:r>
-              <a:rPr lang="en-US" dirty="0" b="1"/>
-              <a:t>Staff Endorsement:</a:t>
-            </a:r>
-          </a:p>
-          <a:p>
-            <a:pPr marL="285750" indent="-285750"/>
-            <a:r>
-              <a:rPr lang="en-US" dirty="0"/>
-              <a:t>• 100% of UAT participants expressed a decisive preference for the digital LIMS over manual paper registers.</a:t>
+            <a:pPr>
+              <a:spcAft>
+                <a:spcPts val="500"/>
+              </a:spcAft>
+              <a:defRPr sz="1400" b="0"/>
+            </a:pPr>
+            <a:r>
+              <a:t>System Testing Verification: 14 test cases covering all functional flows achieved 100% Pass Rate.</a:t>
+            </a:r>
+          </a:p>
+          <a:p>
+            <a:pPr>
+              <a:spcAft>
+                <a:spcPts val="500"/>
+              </a:spcAft>
+              <a:defRPr sz="1400" b="0"/>
+            </a:pPr>
+            <a:r>
+              <a:t>User Acceptance Testing (UAT): Conducted with 8 hospital staff; achieved satisfaction of 4.6 / 5.0.</a:t>
+            </a:r>
+          </a:p>
+          <a:p>
+            <a:pPr>
+              <a:spcAft>
+                <a:spcPts val="500"/>
+              </a:spcAft>
+              <a:defRPr sz="1400" b="0"/>
+            </a:pPr>
+            <a:r>
+              <a:t>Missing Result Slips: Reduced from ~12% monthly to 0% through centralized electronic storage.</a:t>
+            </a:r>
+          </a:p>
+          <a:p>
+            <a:pPr>
+              <a:spcAft>
+                <a:spcPts val="500"/>
+              </a:spcAft>
+              <a:defRPr sz="1400" b="0"/>
+            </a:pPr>
+            <a:r>
+              <a:t>Transcription Errors: Eliminated through computerized ordering and validated result entry.</a:t>
+            </a:r>
+          </a:p>
+          <a:p>
+            <a:pPr>
+              <a:spcAft>
+                <a:spcPts val="500"/>
+              </a:spcAft>
+              <a:defRPr sz="1400" b="0"/>
+            </a:pPr>
+            <a:r>
+              <a:t>Reporting Time: Monthly MOH report compilation reduced from 2 full working days to 1 instant click.</a:t>
+            </a:r>
+          </a:p>
+          <a:p>
+            <a:pPr>
+              <a:spcAft>
+                <a:spcPts val="0"/>
+              </a:spcAft>
+              <a:defRPr sz="1400" b="0"/>
+            </a:pPr>
+            <a:r>
+              <a:t>Staff Endorsement: 100% of participants preferred the digital LIMS over manual paper registers.</a:t>
             </a:r>
           </a:p>
         </p:txBody>
@@ -7579,8 +7639,7 @@
           <a:lstStyle/>
           <a:p>
             <a:r>
-              <a:rPr lang="en-US" dirty="0" b="1"/>
-              <a:t>RECOMMENDATIONS</a:t>
+              <a:t>CONCLUSIONS &amp; RECOMMENDATIONS</a:t>
             </a:r>
           </a:p>
         </p:txBody>
@@ -7600,57 +7659,58 @@
           <a:bodyPr/>
           <a:lstStyle/>
           <a:p>
-            <a:r>
-              <a:rPr lang="en-US" dirty="0" b="1"/>
-              <a:t>Future Enhancement Roadmap:</a:t>
-            </a:r>
-          </a:p>
-          <a:p>
-            <a:pPr marL="285750" indent="-285750"/>
-            <a:r>
-              <a:rPr lang="en-US" dirty="0"/>
-              <a:t>• Phase 2: Barcode Specimen Tube Labelling: Integrate thermal label printers to print unique specimen barcodes upon accessioning.</a:t>
-            </a:r>
-          </a:p>
-          <a:p>
-            <a:pPr marL="285750" indent="-285750"/>
-            <a:r>
-              <a:rPr lang="en-US" dirty="0"/>
-              <a:t>• Phase 3: National MOH Platform Integration: Implement REST APIs to push monthly epidemiological data directly into Kenya's DHIS2 / KHIS.</a:t>
-            </a:r>
-          </a:p>
-          <a:p>
-            <a:pPr marL="285750" indent="-285750"/>
-            <a:r>
-              <a:rPr lang="en-US" dirty="0"/>
-              <a:t>• Phase 4: Direct Analyzer Interfacing: Establish bidirectional RS-232 / HL7 serial communication with automated clinical chemistry and haematology machines.</a:t>
-            </a:r>
-          </a:p>
-          <a:p>
-            <a:r>
-              <a:rPr lang="en-US" dirty="0" b="1"/>
-              <a:t>Operational &amp; Infrastructure Recommendations:</a:t>
-            </a:r>
-          </a:p>
-          <a:p>
-            <a:pPr marL="285750" indent="-285750"/>
-            <a:r>
-              <a:rPr lang="en-US" dirty="0"/>
-              <a:t>• Server Environment: Migrate production deployment from Windows XAMPP to an enterprise Linux Ubuntu Server LAMP stack.</a:t>
-            </a:r>
-          </a:p>
-          <a:p>
-            <a:pPr marL="285750" indent="-285750"/>
-            <a:r>
-              <a:rPr lang="en-US" dirty="0"/>
-              <a:t>• Hardware Redundancy: Maintain dedicated 650VA UPS units on the server host to prevent abrupt shutdowns during power surges.</a:t>
-            </a:r>
-          </a:p>
-          <a:p>
-            <a:pPr marL="285750" indent="-285750"/>
-            <a:r>
-              <a:rPr lang="en-US" dirty="0"/>
-              <a:t>• County Scale-Up: Replicate the Yala LIMS codebase across neighboring Level 4 sub-county hospitals in Siaya County.</a:t>
+            <a:pPr>
+              <a:spcAft>
+                <a:spcPts val="500"/>
+              </a:spcAft>
+              <a:defRPr sz="1400" b="1"/>
+            </a:pPr>
+            <a:r>
+              <a:t>Project Success: 100% of general and specific objectives successfully designed, built, and evaluated.</a:t>
+            </a:r>
+          </a:p>
+          <a:p>
+            <a:pPr>
+              <a:spcAft>
+                <a:spcPts val="500"/>
+              </a:spcAft>
+              <a:defRPr sz="1400" b="0"/>
+            </a:pPr>
+            <a:r>
+              <a:t>Deployment: System is operational and deployed on the host computer at Yala Sub-County Hospital.</a:t>
+            </a:r>
+          </a:p>
+          <a:p>
+            <a:pPr>
+              <a:spcAft>
+                <a:spcPts val="500"/>
+              </a:spcAft>
+              <a:defRPr sz="1400" b="0"/>
+            </a:pPr>
+            <a:r>
+              <a:t>Future Phase 2: Direct RS-232/HL7 serial interfacing with automated clinical chemistry analyzers.</a:t>
+            </a:r>
+          </a:p>
+          <a:p>
+            <a:pPr>
+              <a:spcAft>
+                <a:spcPts val="500"/>
+              </a:spcAft>
+              <a:defRPr sz="1400" b="0"/>
+            </a:pPr>
+            <a:r>
+              <a:t>Future Phase 3: Automated REST API push to Kenya's national DHIS2 / KHIS epidemiological cloud.</a:t>
+            </a:r>
+          </a:p>
+          <a:p>
+            <a:pPr>
+              <a:spcAft>
+                <a:spcPts val="0"/>
+              </a:spcAft>
+              <a:defRPr sz="1400" b="0"/>
+            </a:pPr>
+            <a:r>
+              <a:t>County Scale-Up: Replicate Yala LIMS codebase across neighboring Level 4 facilities in Siaya County.</a:t>
             </a:r>
           </a:p>
         </p:txBody>
@@ -7714,7 +7774,6 @@
           <a:lstStyle/>
           <a:p>
             <a:r>
-              <a:rPr lang="en-US" dirty="0" b="1"/>
               <a:t>INTRODUCTION</a:t>
             </a:r>
           </a:p>
@@ -7748,45 +7807,69 @@
           </a:bodyPr>
           <a:lstStyle/>
           <a:p>
-            <a:pPr marL="285750" indent="-285750"/>
-            <a:r>
-              <a:rPr lang="en-US" dirty="0"/>
-              <a:t>National Health Vision: Aligning with Kenya Vision 2030 and the National Digital Health Strategy to modernize public health infrastructure.</a:t>
-            </a:r>
-          </a:p>
-          <a:p>
-            <a:pPr marL="285750" indent="-285750"/>
-            <a:r>
-              <a:rPr lang="en-US" dirty="0"/>
-              <a:t>Bridging the Digital Divide: Tertiary national referral hospitals (KNH, MTRH) have adopted EHRs, while rural Level 4 public facilities remain largely paper-bound.</a:t>
-            </a:r>
-          </a:p>
-          <a:p>
-            <a:pPr marL="285750" indent="-285750"/>
-            <a:r>
-              <a:rPr lang="en-US" dirty="0"/>
-              <a:t>Critical Diagnostic Role: Medical laboratories represent the primary intersection for disease diagnosis, clinical decision-making, and epidemiological surveillance.</a:t>
-            </a:r>
-          </a:p>
-          <a:p>
-            <a:pPr marL="285750" indent="-285750"/>
-            <a:r>
-              <a:rPr lang="en-US" dirty="0"/>
-              <a:t>Current Operational Reality: Laboratory workflows at Yala Sub-County Hospital operate entirely on manual Ministry of Health paper registers.</a:t>
-            </a:r>
-          </a:p>
-          <a:p>
-            <a:pPr marL="285750" indent="-285750"/>
-            <a:r>
-              <a:rPr lang="en-US" dirty="0"/>
-              <a:t>The Solution: A localized, cost-effective, web-based Laboratory Information Management System (LIMS) engineered specifically for sub-county hospital operations.</a:t>
-            </a:r>
-          </a:p>
-          <a:p>
-            <a:pPr marL="285750" indent="-285750"/>
-            <a:r>
-              <a:rPr lang="en-US" dirty="0"/>
-              <a:t>Project Outcome: Eliminates missing test slips, prevents handwriting transcription errors, automates billing, and enhances diagnostic turnaround time.</a:t>
+            <a:pPr marL="285750" indent="-285750">
+              <a:spcAft>
+                <a:spcPts val="500"/>
+              </a:spcAft>
+              <a:defRPr sz="1400" b="0"/>
+            </a:pPr>
+            <a:r>
+              <a:t>Digital Health Transition: Modernizing public healthcare delivery in line with Kenya eHealth Policy.</a:t>
+            </a:r>
+          </a:p>
+          <a:p>
+            <a:pPr>
+              <a:spcAft>
+                <a:spcPts val="500"/>
+              </a:spcAft>
+              <a:defRPr sz="1400" b="0"/>
+            </a:pPr>
+            <a:r>
+              <a:t>Facility Profile: Yala Sub-County Hospital — Level 4 primary referral center in Siaya County.</a:t>
+            </a:r>
+          </a:p>
+          <a:p>
+            <a:pPr>
+              <a:spcAft>
+                <a:spcPts val="500"/>
+              </a:spcAft>
+              <a:defRPr sz="1400" b="0"/>
+            </a:pPr>
+            <a:r>
+              <a:t>Clinical Dependency: Over 70% of medical diagnoses depend directly on reliable laboratory tests.</a:t>
+            </a:r>
+          </a:p>
+          <a:p>
+            <a:pPr>
+              <a:spcAft>
+                <a:spcPts val="500"/>
+              </a:spcAft>
+              <a:defRPr sz="1400" b="0"/>
+            </a:pPr>
+            <a:r>
+              <a:t>Pre-System Reality: Manual paper registers caused prolonged turnaround times, sample loss, and billing leaks.</a:t>
+            </a:r>
+          </a:p>
+          <a:p>
+            <a:pPr>
+              <a:spcAft>
+                <a:spcPts val="500"/>
+              </a:spcAft>
+              <a:defRPr sz="1400" b="0"/>
+            </a:pPr>
+            <a:r>
+              <a:t>Delivered Solution: A localized, web-based LIMS operating securely on the hospital intranet.</a:t>
+            </a:r>
+          </a:p>
+          <a:p>
+            <a:pPr>
+              <a:spcAft>
+                <a:spcPts val="0"/>
+              </a:spcAft>
+              <a:defRPr sz="1400" b="0"/>
+            </a:pPr>
+            <a:r>
+              <a:t>Operational Impact: Automated diagnostic flow from patient triage to certified PDF test results.</a:t>
             </a:r>
           </a:p>
         </p:txBody>
@@ -7857,7 +7940,6 @@
           <a:lstStyle/>
           <a:p>
             <a:r>
-              <a:rPr lang="en-US" dirty="0" b="1"/>
               <a:t>REFERENCES</a:t>
             </a:r>
           </a:p>
@@ -7878,59 +7960,80 @@
           <a:bodyPr/>
           <a:lstStyle/>
           <a:p>
-            <a:pPr marL="285750" indent="-285750"/>
-            <a:r>
-              <a:rPr lang="en-US" dirty="0"/>
-              <a:t>• Ministry of Health Kenya (2020). Standard Operating Procedures for Laboratory Services in Public Health Facilities. Nairobi.</a:t>
-            </a:r>
-          </a:p>
-          <a:p>
-            <a:pPr marL="285750" indent="-285750"/>
-            <a:r>
-              <a:rPr lang="en-US" dirty="0"/>
+            <a:pPr marL="285750" indent="-285750">
+              <a:spcAft>
+                <a:spcPts val="400"/>
+              </a:spcAft>
+              <a:defRPr sz="1300" b="0"/>
+            </a:pPr>
+            <a:r>
+              <a:t>• Ministry of Health Kenya (2020). Standard Operating Procedures for Laboratory Services. Nairobi.</a:t>
+            </a:r>
+          </a:p>
+          <a:p>
+            <a:pPr>
+              <a:spcAft>
+                <a:spcPts val="400"/>
+              </a:spcAft>
+              <a:defRPr sz="1300" b="0"/>
+            </a:pPr>
+            <a:r>
               <a:t>• Ministry of Health Kenya (2016). Kenya National eHealth Policy 2016–2030. Nairobi: Government Printer.</a:t>
             </a:r>
           </a:p>
           <a:p>
-            <a:pPr marL="285750" indent="-285750"/>
-            <a:r>
-              <a:rPr lang="en-US" dirty="0"/>
-              <a:t>• OpenMRS Community (2021). OpenMRS Developer Documentation. Available at: https://openmrs.org/</a:t>
-            </a:r>
-          </a:p>
-          <a:p>
-            <a:pPr marL="285750" indent="-285750"/>
-            <a:r>
-              <a:rPr lang="en-US" dirty="0"/>
-              <a:t>• Pressman, R. S. (2014). Software Engineering: A Practitioner's Approach (8th ed.). McGraw-Hill Education.</a:t>
-            </a:r>
-          </a:p>
-          <a:p>
-            <a:pPr marL="285750" indent="-285750"/>
-            <a:r>
-              <a:rPr lang="en-US" dirty="0"/>
-              <a:t>• Sepulveda, M. J., &amp; Young, W. B. (2013). The Ideal Laboratory Information System. Archives of Pathology &amp; Laboratory Medicine, 137(8), 1129–1140.</a:t>
-            </a:r>
-          </a:p>
-          <a:p>
-            <a:pPr marL="285750" indent="-285750"/>
-            <a:r>
-              <a:rPr lang="en-US" dirty="0"/>
+            <a:pPr>
+              <a:spcAft>
+                <a:spcPts val="400"/>
+              </a:spcAft>
+              <a:defRPr sz="1300" b="0"/>
+            </a:pPr>
+            <a:r>
+              <a:t>• World Health Organization (2021). Digital Health Intervention Frameworks. Geneva: WHO.</a:t>
+            </a:r>
+          </a:p>
+          <a:p>
+            <a:pPr>
+              <a:spcAft>
+                <a:spcPts val="400"/>
+              </a:spcAft>
+              <a:defRPr sz="1300" b="0"/>
+            </a:pPr>
+            <a:r>
+              <a:t>• ISO 15189:2022. Medical Laboratories — Requirements for Quality and Competence.</a:t>
+            </a:r>
+          </a:p>
+          <a:p>
+            <a:pPr>
+              <a:spcAft>
+                <a:spcPts val="400"/>
+              </a:spcAft>
+              <a:defRPr sz="1300" b="0"/>
+            </a:pPr>
+            <a:r>
+              <a:t>• Pressman, R. S. (2014). Software Engineering: A Practitioner's Approach (8th ed.). McGraw-Hill.</a:t>
+            </a:r>
+          </a:p>
+          <a:p>
+            <a:pPr>
+              <a:spcAft>
+                <a:spcPts val="400"/>
+              </a:spcAft>
+              <a:defRPr sz="1300" b="0"/>
+            </a:pPr>
+            <a:r>
               <a:t>• Sommerville, I. (2016). Software Engineering (10th ed.). Boston: Pearson Education.</a:t>
             </a:r>
           </a:p>
           <a:p>
-            <a:pPr marL="285750" indent="-285750"/>
-            <a:r>
-              <a:rPr lang="en-US" dirty="0"/>
-              <a:t>• World Health Organization (2020). Digital Implementation Investment Guide (DIIG). Geneva: WHO.</a:t>
-            </a:r>
-          </a:p>
-          <a:p>
-            <a:pPr marL="285750" indent="-285750"/>
-            <a:r>
-              <a:rPr lang="en-US" dirty="0"/>
-              <a:t>• OWASP Foundation (2023). OWASP Top Ten Web Application Security Risks. Available at: https://owasp.org/</a:t>
+            <a:pPr>
+              <a:spcAft>
+                <a:spcPts val="0"/>
+              </a:spcAft>
+              <a:defRPr sz="1300" b="0"/>
+            </a:pPr>
+            <a:r>
+              <a:t>• Kenya Law (2019). Data Protection Act, No. 24 of 2019. Nairobi: Government Printer.</a:t>
             </a:r>
           </a:p>
         </p:txBody>
@@ -7999,7 +8102,6 @@
           <a:lstStyle/>
           <a:p>
             <a:r>
-              <a:rPr lang="en-US" dirty="0" b="1"/>
               <a:t>BACKGROUND STUDY</a:t>
             </a:r>
           </a:p>
@@ -8023,8 +8125,8 @@
         </p:nvSpPr>
         <p:spPr>
           <a:xfrm>
-            <a:off x="1295401" y="1043188"/>
-            <a:ext cx="9601196" cy="5512157"/>
+            <a:off x="1295401" y="1645920"/>
+            <a:ext cx="9601196" cy="4572000"/>
           </a:xfrm>
         </p:spPr>
         <p:txBody>
@@ -8033,45 +8135,69 @@
           </a:bodyPr>
           <a:lstStyle/>
           <a:p>
-            <a:pPr marL="285750" indent="-285750"/>
-            <a:r>
-              <a:rPr lang="en-US" dirty="0"/>
-              <a:t>Facility Profile: Yala Sub-County Hospital is a Level 4 public healthcare facility located in Gem Sub-County, Siaya County, Western Kenya.</a:t>
-            </a:r>
-          </a:p>
-          <a:p>
-            <a:pPr marL="285750" indent="-285750"/>
-            <a:r>
-              <a:rPr lang="en-US" dirty="0"/>
-              <a:t>Primary Referral Hub: Serves as the primary referral center for outpatient, inpatient, maternity, and specialized clinical diagnostics in the region.</a:t>
-            </a:r>
-          </a:p>
-          <a:p>
-            <a:pPr marL="285750" indent="-285750"/>
-            <a:r>
-              <a:rPr lang="en-US" dirty="0"/>
-              <a:t>High Patient Throughput: Daily volume includes routine haematology, parasitology, urinalysis, clinical chemistry, and infectious disease screening.</a:t>
-            </a:r>
-          </a:p>
-          <a:p>
-            <a:pPr marL="285750" indent="-285750"/>
-            <a:r>
-              <a:rPr lang="en-US" dirty="0"/>
-              <a:t>The Operational Bottleneck: The laboratory relies on physical MOH 204 request forms, massive MOH 240 paper registers, and hand-carried result slips.</a:t>
-            </a:r>
-          </a:p>
-          <a:p>
-            <a:pPr marL="285750" indent="-285750"/>
-            <a:r>
-              <a:rPr lang="en-US" dirty="0"/>
-              <a:t>Fragmented Information Flow: Paper slips carried manually across departments result in frequent loss of records and diagnostic delays.</a:t>
-            </a:r>
-          </a:p>
-          <a:p>
-            <a:pPr marL="285750" indent="-285750"/>
-            <a:r>
-              <a:rPr lang="en-US" dirty="0"/>
-              <a:t>Clinical Impact: Lack of immediate longitudinal history access impairs emergency care and compromises overall clinical workflow.</a:t>
+            <a:pPr marL="285750" indent="-285750">
+              <a:spcAft>
+                <a:spcPts val="500"/>
+              </a:spcAft>
+              <a:defRPr sz="1400" b="0"/>
+            </a:pPr>
+            <a:r>
+              <a:t>Hospital Profile: Level 4 public facility in Gem Sub-County along the busy Kisumu–Busia highway.</a:t>
+            </a:r>
+          </a:p>
+          <a:p>
+            <a:pPr>
+              <a:spcAft>
+                <a:spcPts val="500"/>
+              </a:spcAft>
+              <a:defRPr sz="1400" b="0"/>
+            </a:pPr>
+            <a:r>
+              <a:t>High Catchment Volume: Serves large outpatient numbers, maternal ANC clinics, and emergency admissions.</a:t>
+            </a:r>
+          </a:p>
+          <a:p>
+            <a:pPr>
+              <a:spcAft>
+                <a:spcPts val="500"/>
+              </a:spcAft>
+              <a:defRPr sz="1400" b="0"/>
+            </a:pPr>
+            <a:r>
+              <a:t>Manual Workflow: Relied on physical paper MOH 204 books, carbon-copy slips, and manual registers.</a:t>
+            </a:r>
+          </a:p>
+          <a:p>
+            <a:pPr>
+              <a:spcAft>
+                <a:spcPts val="500"/>
+              </a:spcAft>
+              <a:defRPr sz="1400" b="0"/>
+            </a:pPr>
+            <a:r>
+              <a:t>Information Fragmentation: Paper request slips were frequently misplaced in transit between wards and lab.</a:t>
+            </a:r>
+          </a:p>
+          <a:p>
+            <a:pPr>
+              <a:spcAft>
+                <a:spcPts val="500"/>
+              </a:spcAft>
+              <a:defRPr sz="1400" b="0"/>
+            </a:pPr>
+            <a:r>
+              <a:t>Revenue Challenges: Manual cash handling at counters led to unreceipted fee leakages.</a:t>
+            </a:r>
+          </a:p>
+          <a:p>
+            <a:pPr>
+              <a:spcAft>
+                <a:spcPts val="0"/>
+              </a:spcAft>
+              <a:defRPr sz="1400" b="0"/>
+            </a:pPr>
+            <a:r>
+              <a:t>Modernization Imperative: Transitioning to connected digital workflows for ordering, bench testing, and billing.</a:t>
             </a:r>
           </a:p>
         </p:txBody>
@@ -8142,7 +8268,6 @@
           <a:lstStyle/>
           <a:p>
             <a:r>
-              <a:rPr lang="en-US" dirty="0" b="1"/>
               <a:t>PROBLEM STATEMENT</a:t>
             </a:r>
           </a:p>
@@ -8174,45 +8299,69 @@
           <a:bodyPr/>
           <a:lstStyle/>
           <a:p>
-            <a:pPr marL="285750" indent="-285750"/>
-            <a:r>
-              <a:rPr lang="en-US" dirty="0"/>
-              <a:t>Turnaround Time (TAT) Delays: Lab technicians spend up to 40% of their working hours manually transcribing data rather than analyzing medical specimens.</a:t>
-            </a:r>
-          </a:p>
-          <a:p>
-            <a:pPr marL="285750" indent="-285750"/>
-            <a:r>
-              <a:rPr lang="en-US" dirty="0"/>
-              <a:t>12% Monthly Lost Slips: Approximately 12% of physical result slips go missing between the lab and consultation rooms, forcing painful repeat blood draws.</a:t>
-            </a:r>
-          </a:p>
-          <a:p>
-            <a:pPr marL="285750" indent="-285750"/>
-            <a:r>
-              <a:rPr lang="en-US" dirty="0"/>
-              <a:t>Transcription Errors: Illegible clinician handwriting on handwritten MOH 204 slips frequently leads to misread tests and incorrect treatment regimens.</a:t>
-            </a:r>
-          </a:p>
-          <a:p>
-            <a:pPr marL="285750" indent="-285750"/>
-            <a:r>
-              <a:rPr lang="en-US" dirty="0"/>
-              <a:t>MOH Reporting Overhead: Compiling mandatory monthly epidemiological MOH reports requires an average of two full working days of manual tallying.</a:t>
-            </a:r>
-          </a:p>
-          <a:p>
-            <a:pPr marL="285750" indent="-285750"/>
-            <a:r>
-              <a:rPr lang="en-US" dirty="0"/>
-              <a:t>Zero Audit Traceability: No verifiable trail exists to track who requested, collected, analyzed, or certified lab results, posing legal and medical risks.</a:t>
-            </a:r>
-          </a:p>
-          <a:p>
-            <a:pPr marL="285750" indent="-285750"/>
-            <a:r>
-              <a:rPr lang="en-US" dirty="0"/>
-              <a:t>Revenue Leakage: Financial disconnections between consultation desks, laboratory queues, and cashiers result in uncollected diagnostic fees.</a:t>
+            <a:pPr marL="285750" indent="-285750">
+              <a:spcAft>
+                <a:spcPts val="500"/>
+              </a:spcAft>
+              <a:defRPr sz="1400" b="0"/>
+            </a:pPr>
+            <a:r>
+              <a:t>Prolonged Turnaround Times (TAT): Manual routing of paper requests caused severe diagnostic delays.</a:t>
+            </a:r>
+          </a:p>
+          <a:p>
+            <a:pPr>
+              <a:spcAft>
+                <a:spcPts val="500"/>
+              </a:spcAft>
+              <a:defRPr sz="1400" b="0"/>
+            </a:pPr>
+            <a:r>
+              <a:t>Transcription Errors: Illegible clinician handwriting caused bench interpretation mistakes.</a:t>
+            </a:r>
+          </a:p>
+          <a:p>
+            <a:pPr>
+              <a:spcAft>
+                <a:spcPts val="500"/>
+              </a:spcAft>
+              <a:defRPr sz="1400" b="0"/>
+            </a:pPr>
+            <a:r>
+              <a:t>Missing Patient Slips: Lost result slips forced repeat phlebotomy sampling and frustrated patients.</a:t>
+            </a:r>
+          </a:p>
+          <a:p>
+            <a:pPr>
+              <a:spcAft>
+                <a:spcPts val="500"/>
+              </a:spcAft>
+              <a:defRPr sz="1400" b="0"/>
+            </a:pPr>
+            <a:r>
+              <a:t>Absence of Panic Alerts: Critical life-threatening results (Hb &lt; 6.0 g/dL, Malaria +++) lacked urgent flags.</a:t>
+            </a:r>
+          </a:p>
+          <a:p>
+            <a:pPr>
+              <a:spcAft>
+                <a:spcPts val="500"/>
+              </a:spcAft>
+              <a:defRPr sz="1400" b="0"/>
+            </a:pPr>
+            <a:r>
+              <a:t>Tedious MOH 706 Tallying: Compiling monthly epidemiological reports required days of manual paper counts.</a:t>
+            </a:r>
+          </a:p>
+          <a:p>
+            <a:pPr>
+              <a:spcAft>
+                <a:spcPts val="0"/>
+              </a:spcAft>
+              <a:defRPr sz="1400" b="0"/>
+            </a:pPr>
+            <a:r>
+              <a:t>Cash Revenue Leakage: Cash transactions at hospital counters violated public finance cashless laws.</a:t>
             </a:r>
           </a:p>
         </p:txBody>
@@ -8283,8 +8432,7 @@
           <a:lstStyle/>
           <a:p>
             <a:r>
-              <a:rPr lang="en-US" dirty="0" b="1"/>
-              <a:t>OBJECTIVES</a:t>
+              <a:t>PROJECT OBJECTIVES</a:t>
             </a:r>
           </a:p>
         </p:txBody>
@@ -8317,52 +8465,80 @@
           </a:bodyPr>
           <a:lstStyle/>
           <a:p>
-            <a:r>
-              <a:rPr lang="en-US" dirty="0" b="1"/>
+            <a:pPr>
+              <a:spcAft>
+                <a:spcPts val="400"/>
+              </a:spcAft>
+              <a:defRPr sz="1500" b="1"/>
+            </a:pPr>
+            <a:r>
               <a:t>General Objective:</a:t>
             </a:r>
           </a:p>
           <a:p>
-            <a:pPr marL="285750" indent="-285750"/>
-            <a:r>
-              <a:rPr lang="en-US" dirty="0"/>
-              <a:t>To design, develop, and deploy a web-based Laboratory Information Management System (LIMS) for Yala Sub-County Hospital that automates the testing lifecycle, ensures data accuracy, and improves laboratory efficiency.</a:t>
-            </a:r>
-          </a:p>
-          <a:p>
-            <a:r>
-              <a:rPr lang="en-US" dirty="0" b="1"/>
-              <a:t>Specific Objectives:</a:t>
-            </a:r>
-          </a:p>
-          <a:p>
-            <a:r>
-              <a:rPr lang="en-US" dirty="0" b="1"/>
-              <a:t>1. Design a Clinician Module (CPOE) that eliminates paper requests through electronic diagnostic test ordering.</a:t>
-            </a:r>
-          </a:p>
-          <a:p>
-            <a:r>
-              <a:rPr lang="en-US" dirty="0" b="1"/>
-              <a:t>2. Develop a Lab Accessioning Interface that assigns unique IDs to samples and monitors turnaround times.</a:t>
-            </a:r>
-          </a:p>
-          <a:p>
-            <a:r>
-              <a:rPr lang="en-US" dirty="0" b="1"/>
-              <a:t>3. Implement a Results Reporting Module providing secure entry, reference range validation, and automated PDF report generation (FPDF).</a:t>
-            </a:r>
-          </a:p>
-          <a:p>
-            <a:r>
-              <a:rPr lang="en-US" dirty="0" b="1"/>
-              <a:t>4. Create an Administrative Dashboard that automatically generates workload statistics, revenue reconciliation, and MOH analytics.</a:t>
-            </a:r>
-          </a:p>
-          <a:p>
-            <a:r>
-              <a:rPr lang="en-US" dirty="0" b="1"/>
-              <a:t>5. Validate system effectiveness and usability by conducting User Acceptance Testing (UAT) with hospital staff.</a:t>
+            <a:pPr>
+              <a:spcAft>
+                <a:spcPts val="800"/>
+              </a:spcAft>
+              <a:defRPr sz="1300" b="0"/>
+            </a:pPr>
+            <a:r>
+              <a:t>To design, develop, and evaluate a web-based Laboratory Information Management System (LIMS) for Yala Sub-County Hospital to automate diagnostic workflows, ensure data accuracy, and improve clinical turnaround times.</a:t>
+            </a:r>
+          </a:p>
+          <a:p>
+            <a:pPr>
+              <a:spcAft>
+                <a:spcPts val="400"/>
+              </a:spcAft>
+              <a:defRPr sz="1500" b="1"/>
+            </a:pPr>
+            <a:r>
+              <a:t>Specific Objectives (100% Achieved):</a:t>
+            </a:r>
+          </a:p>
+          <a:p>
+            <a:pPr>
+              <a:spcAft>
+                <a:spcPts val="300"/>
+              </a:spcAft>
+              <a:defRPr sz="1300" b="0"/>
+            </a:pPr>
+            <a:r>
+              <a:t>1. Analyze: Identified manual workflow bottlenecks across outpatient, clinical, and laboratory stations.</a:t>
+            </a:r>
+          </a:p>
+          <a:p>
+            <a:pPr>
+              <a:spcAft>
+                <a:spcPts val="300"/>
+              </a:spcAft>
+              <a:defRPr sz="1300" b="0"/>
+            </a:pPr>
+            <a:r>
+              <a:t>2. Design: Modeled 3-tier architecture, relational database schema, and role-based interfaces (RBAC).</a:t>
+            </a:r>
+          </a:p>
+          <a:p>
+            <a:pPr>
+              <a:spcAft>
+                <a:spcPts val="300"/>
+              </a:spcAft>
+              <a:defRPr sz="1300" b="0"/>
+            </a:pPr>
+            <a:r>
+              <a:t>3. Develop: Implemented MOH 204 routing, CPOE ordering, testing bench, panic alerts, and eCitizen billing (Paybill 222222).</a:t>
+            </a:r>
+          </a:p>
+          <a:p>
+            <a:pPr>
+              <a:spcAft>
+                <a:spcPts val="0"/>
+              </a:spcAft>
+              <a:defRPr sz="1300" b="0"/>
+            </a:pPr>
+            <a:r>
+              <a:t>4. Evaluate: Verified system functionality through 14 test cases and User Acceptance Testing (UAT 4.6/5.0).</a:t>
             </a:r>
           </a:p>
         </p:txBody>
@@ -8433,8 +8609,7 @@
           <a:lstStyle/>
           <a:p>
             <a:r>
-              <a:rPr lang="en-US" dirty="0" b="1"/>
-              <a:t>SCOPE</a:t>
+              <a:t>PROJECT SCOPE</a:t>
             </a:r>
           </a:p>
         </p:txBody>
@@ -8467,78 +8642,102 @@
           </a:bodyPr>
           <a:lstStyle/>
           <a:p>
-            <a:r>
-              <a:rPr lang="en-US" dirty="0" b="1"/>
-              <a:t>In Scope:</a:t>
-            </a:r>
-          </a:p>
-          <a:p>
-            <a:pPr marL="285750" indent="-285750"/>
-            <a:r>
-              <a:rPr lang="en-US" dirty="0"/>
-              <a:t>• Relational MySQL database schema with data integrity and audit trail tables.</a:t>
-            </a:r>
-          </a:p>
-          <a:p>
-            <a:pPr marL="285750" indent="-285750"/>
-            <a:r>
-              <a:rPr lang="en-US" dirty="0"/>
-              <a:t>• PHP 8.2 backend business logic and responsive Bootstrap 5 frontend interfaces.</a:t>
-            </a:r>
-          </a:p>
-          <a:p>
-            <a:pPr marL="285750" indent="-285750"/>
-            <a:r>
-              <a:rPr lang="en-US" dirty="0"/>
-              <a:t>• Role-Based Access Control (RBAC) across 4 operational roles: Receptionist, Doctor, Lab Tech, Administrator.</a:t>
-            </a:r>
-          </a:p>
-          <a:p>
-            <a:pPr marL="285750" indent="-285750"/>
-            <a:r>
-              <a:rPr lang="en-US" dirty="0"/>
-              <a:t>• Multi-channel billing: M-Pesa (with transaction codes), Cash, SHA/NHIF insurance, and Hospital Fee Waivers.</a:t>
-            </a:r>
-          </a:p>
-          <a:p>
-            <a:pPr marL="285750" indent="-285750"/>
-            <a:r>
-              <a:rPr lang="en-US" dirty="0"/>
-              <a:t>• Clinical safety alerts: Automated warning banners for critical medical flags (e.g., severe penicillin allergy).</a:t>
-            </a:r>
-          </a:p>
-          <a:p>
-            <a:pPr marL="285750" indent="-285750"/>
-            <a:r>
-              <a:rPr lang="en-US" dirty="0"/>
-              <a:t>• Automated disaster recovery: Daily background cron SQL dumps and manual administrator backup trigger.</a:t>
-            </a:r>
-          </a:p>
-          <a:p>
-            <a:r>
-              <a:rPr lang="en-US" dirty="0" b="1"/>
-              <a:t>Out of Scope:</a:t>
-            </a:r>
-          </a:p>
-          <a:p>
-            <a:pPr marL="285750" indent="-285750"/>
-            <a:r>
-              <a:rPr lang="en-US" dirty="0"/>
-              <a:t>• Direct automated analyzer serial cable interfacing (designated for Phase 2).</a:t>
-            </a:r>
-          </a:p>
-          <a:p>
-            <a:pPr marL="285750" indent="-285750"/>
-            <a:r>
-              <a:rPr lang="en-US" dirty="0"/>
-              <a:t>• National DHIS2 / KHIS platform direct API push (Phase 2).</a:t>
-            </a:r>
-          </a:p>
-          <a:p>
-            <a:pPr marL="285750" indent="-285750"/>
-            <a:r>
-              <a:rPr lang="en-US" dirty="0"/>
-              <a:t>• Procurement of hospital-wide computer hardware and network cabling.</a:t>
+            <a:pPr>
+              <a:spcAft>
+                <a:spcPts val="400"/>
+              </a:spcAft>
+              <a:defRPr sz="1400" b="1"/>
+            </a:pPr>
+            <a:r>
+              <a:t>In-Scope (Delivered Functionality):</a:t>
+            </a:r>
+          </a:p>
+          <a:p>
+            <a:pPr>
+              <a:spcAft>
+                <a:spcPts val="300"/>
+              </a:spcAft>
+              <a:defRPr sz="1300" b="0"/>
+            </a:pPr>
+            <a:r>
+              <a:t>• Modular Web Stack: Built with PHP 8.2 and MySQL 8.0 on local Apache/XAMPP.</a:t>
+            </a:r>
+          </a:p>
+          <a:p>
+            <a:pPr>
+              <a:spcAft>
+                <a:spcPts val="300"/>
+              </a:spcAft>
+              <a:defRPr sz="1300" b="0"/>
+            </a:pPr>
+            <a:r>
+              <a:t>• Role-Based Access Control: Strict boundaries for Receptionist, Doctor, Lab Tech, Cashier, Admin.</a:t>
+            </a:r>
+          </a:p>
+          <a:p>
+            <a:pPr>
+              <a:spcAft>
+                <a:spcPts val="300"/>
+              </a:spcAft>
+              <a:defRPr sz="1300" b="0"/>
+            </a:pPr>
+            <a:r>
+              <a:t>• Outpatient Flow: OPD sequencing and printable A5 routing slips with Code128 barcodes.</a:t>
+            </a:r>
+          </a:p>
+          <a:p>
+            <a:pPr>
+              <a:spcAft>
+                <a:spcPts val="300"/>
+              </a:spcAft>
+              <a:defRPr sz="1300" b="0"/>
+            </a:pPr>
+            <a:r>
+              <a:t>• Workbench: Reference ranges, panic alerts, specimen rejection QA, and blood bank safety.</a:t>
+            </a:r>
+          </a:p>
+          <a:p>
+            <a:pPr>
+              <a:spcAft>
+                <a:spcPts val="600"/>
+              </a:spcAft>
+              <a:defRPr sz="1300" b="0"/>
+            </a:pPr>
+            <a:r>
+              <a:t>• Digital Cashless Billing: Real-time settlement via Government eCitizen Paybill 222222.</a:t>
+            </a:r>
+          </a:p>
+          <a:p>
+            <a:pPr>
+              <a:spcAft>
+                <a:spcPts val="400"/>
+              </a:spcAft>
+              <a:defRPr sz="1400" b="1"/>
+            </a:pPr>
+            <a:r>
+              <a:t>Out-of-Scope (Deliberate Boundaries):</a:t>
+            </a:r>
+          </a:p>
+          <a:p>
+            <a:pPr>
+              <a:spcAft>
+                <a:spcPts val="300"/>
+              </a:spcAft>
+              <a:defRPr sz="1300" b="0"/>
+            </a:pPr>
+            <a:r>
+              <a:t>• Direct serial hardware communication (RS-232/HL7) with physical analyzer machines.</a:t>
+            </a:r>
+          </a:p>
+          <a:p>
+            <a:pPr>
+              <a:spcAft>
+                <a:spcPts val="0"/>
+              </a:spcAft>
+              <a:defRPr sz="1300" b="0"/>
+            </a:pPr>
+            <a:r>
+              <a:t>• Automated live REST API synchronization with National DHIS2 cloud servers.</a:t>
             </a:r>
           </a:p>
         </p:txBody>
@@ -8607,8 +8806,7 @@
           <a:lstStyle/>
           <a:p>
             <a:r>
-              <a:rPr lang="en-US" dirty="0" b="1"/>
-              <a:t>JUSTIFICATION</a:t>
+              <a:t>JUSTIFICATION &amp; SIGNIFICANCE</a:t>
             </a:r>
           </a:p>
         </p:txBody>
@@ -8634,38 +8832,58 @@
           <a:bodyPr/>
           <a:lstStyle/>
           <a:p>
-            <a:pPr marL="285750" indent="-285750"/>
-            <a:r>
-              <a:rPr lang="en-US" dirty="0"/>
-              <a:t>For Hospital Administration: Complete revenue assurance across cash, M-Pesa, and insurance; reduced stationery costs; automated reporting.</a:t>
-            </a:r>
-          </a:p>
-          <a:p>
-            <a:pPr marL="285750" indent="-285750"/>
-            <a:r>
-              <a:rPr lang="en-US" dirty="0"/>
-              <a:t>For Clinicians: Instant desktop access to patient longitudinal records, eliminating reliance on misplaced physical files and highlighting critical allergy alerts.</a:t>
-            </a:r>
-          </a:p>
-          <a:p>
-            <a:pPr marL="285750" indent="-285750"/>
-            <a:r>
-              <a:rPr lang="en-US" dirty="0"/>
-              <a:t>For Laboratory Technicians: Prioritized digital queue with 2-hour overdue tracking badges; zero handwriting deciphering; automated certified PDF outputs.</a:t>
-            </a:r>
-          </a:p>
-          <a:p>
-            <a:pPr marL="285750" indent="-285750"/>
-            <a:r>
-              <a:rPr lang="en-US" dirty="0"/>
-              <a:t>For Patients: Dramatically reduced outpatient waiting times, eliminated repeat blood draws from lost slips, and reliable diagnostic records.</a:t>
-            </a:r>
-          </a:p>
-          <a:p>
-            <a:pPr marL="285750" indent="-285750"/>
-            <a:r>
-              <a:rPr lang="en-US" dirty="0"/>
-              <a:t>For Ministry of Health &amp; County: Instant access to accurate, timely epidemiological disease surveillance data from Yala Sub-County.</a:t>
+            <a:pPr marL="285750" indent="-285750">
+              <a:spcAft>
+                <a:spcPts val="500"/>
+              </a:spcAft>
+              <a:defRPr sz="1400" b="0"/>
+            </a:pPr>
+            <a:r>
+              <a:t>Hospital Administration: Eliminated paper stationery expenses and sealed cash revenue leakages.</a:t>
+            </a:r>
+          </a:p>
+          <a:p>
+            <a:pPr>
+              <a:spcAft>
+                <a:spcPts val="500"/>
+              </a:spcAft>
+              <a:defRPr sz="1400" b="0"/>
+            </a:pPr>
+            <a:r>
+              <a:t>Medical Clinicians: Instant digital access to longitudinal patient histories and critical panic alerts.</a:t>
+            </a:r>
+          </a:p>
+          <a:p>
+            <a:pPr>
+              <a:spcAft>
+                <a:spcPts val="500"/>
+              </a:spcAft>
+              <a:defRPr sz="1400" b="0"/>
+            </a:pPr>
+            <a:r>
+              <a:t>Laboratory Technologists: Clear bench worklists, automated reference ranges, and 1-click MOH reports.</a:t>
+            </a:r>
+          </a:p>
+          <a:p>
+            <a:pPr>
+              <a:spcAft>
+                <a:spcPts val="500"/>
+              </a:spcAft>
+              <a:defRPr sz="1400" b="0"/>
+            </a:pPr>
+            <a:r>
+              <a:t>Patients &amp; Community: Drastically reduced turnaround times and total elimination of lost result slips.</a:t>
+            </a:r>
+          </a:p>
+          <a:p>
+            <a:pPr>
+              <a:spcAft>
+                <a:spcPts val="0"/>
+              </a:spcAft>
+              <a:defRPr sz="1400" b="0"/>
+            </a:pPr>
+            <a:r>
+              <a:t>Public Health Authorities: Real-time, reliable epidemiological data for Siaya County disease surveillance.</a:t>
             </a:r>
           </a:p>
         </p:txBody>
@@ -8729,13 +8947,11 @@
           </a:bodyPr>
           <a:lstStyle/>
           <a:p>
-            <a:pPr algn="ctr"/>
-            <a:r>
-              <a:rPr lang="en-US" sz="2400" b="1" dirty="0" smtClean="0">
-                <a:latin typeface="Cambria"/>
-                <a:cs typeface="Cambria"/>
-              </a:rPr>
-              <a:t>COST/REQUIREMENTS</a:t>
+            <a:pPr algn="ctr">
+              <a:defRPr sz="2200" b="1"/>
+            </a:pPr>
+            <a:r>
+              <a:t>RESOURCE REQUIREMENTS &amp; BUDGET</a:t>
             </a:r>
             <a:endParaRPr lang="en-US" sz="2400" b="1" dirty="0">
               <a:latin typeface="Cambria"/>
@@ -8759,77 +8975,69 @@
           <a:bodyPr/>
           <a:lstStyle/>
           <a:p>
-            <a:r>
-              <a:rPr lang="en-US" dirty="0" b="1"/>
-              <a:t>Hardware Requirements:</a:t>
-            </a:r>
-          </a:p>
-          <a:p>
-            <a:pPr marL="285750" indent="-285750"/>
-            <a:r>
-              <a:rPr lang="en-US" dirty="0"/>
-              <a:t>• Host Machine / Development Laptop: Intel Core i5, 8GB RAM, 500GB SSD — KES 90,000.</a:t>
-            </a:r>
-          </a:p>
-          <a:p>
-            <a:pPr marL="285750" indent="-285750"/>
-            <a:r>
-              <a:rPr lang="en-US" dirty="0"/>
-              <a:t>• Mobile / Tablet Testing Devices: Standard Android smartphones/tablets — KES 20,000.</a:t>
-            </a:r>
-          </a:p>
-          <a:p>
-            <a:pPr marL="285750" indent="-285750"/>
-            <a:r>
-              <a:rPr lang="en-US" dirty="0"/>
-              <a:t>• Power Backup: 650VA Uninterruptible Power Supply (UPS) for continuous server uptime — KES 8,000.</a:t>
-            </a:r>
-          </a:p>
-          <a:p>
-            <a:r>
-              <a:rPr lang="en-US" dirty="0" b="1"/>
-              <a:t>Software &amp; System Stack:</a:t>
-            </a:r>
-          </a:p>
-          <a:p>
-            <a:pPr marL="285750" indent="-285750"/>
-            <a:r>
-              <a:rPr lang="en-US" dirty="0"/>
-              <a:t>• Operating System: Windows 10/11 64-bit / Linux Ubuntu Server.</a:t>
-            </a:r>
-          </a:p>
-          <a:p>
-            <a:pPr marL="285750" indent="-285750"/>
-            <a:r>
-              <a:rPr lang="en-US" dirty="0"/>
-              <a:t>• Web Server &amp; Database: Apache 2.4, PHP 8.2, MySQL 8.0 via XAMPP (Free / Open Source).</a:t>
-            </a:r>
-          </a:p>
-          <a:p>
-            <a:pPr marL="285750" indent="-285750"/>
-            <a:r>
-              <a:rPr lang="en-US" dirty="0"/>
-              <a:t>• Security &amp; Protection: 1-Year Kaspersky Antivirus License — KES 3,000.</a:t>
-            </a:r>
-          </a:p>
-          <a:p>
-            <a:r>
-              <a:rPr lang="en-US" dirty="0" b="1"/>
-              <a:t>Network &amp; Logistics:</a:t>
-            </a:r>
-          </a:p>
-          <a:p>
-            <a:pPr marL="285750" indent="-285750"/>
-            <a:r>
-              <a:rPr lang="en-US" dirty="0"/>
-              <a:t>• 4-Month Dedicated Internet Subscription (development, GitHub backups, research) — KES 16,000.</a:t>
-            </a:r>
-          </a:p>
-          <a:p>
-            <a:pPr marL="285750" indent="-285750"/>
-            <a:r>
-              <a:rPr lang="en-US" dirty="0"/>
-              <a:t>Total Projected Resource Requirements: KES 155,000 (Actual Direct Development Cost: KES 110,800).</a:t>
+            <a:pPr>
+              <a:spcAft>
+                <a:spcPts val="500"/>
+              </a:spcAft>
+              <a:defRPr sz="1400" b="0"/>
+            </a:pPr>
+            <a:r>
+              <a:t>Hardware Platform: Workstation desktop PCs, thermal barcode label printer, backup UPS units.</a:t>
+            </a:r>
+          </a:p>
+          <a:p>
+            <a:pPr>
+              <a:spcAft>
+                <a:spcPts val="500"/>
+              </a:spcAft>
+              <a:defRPr sz="1400" b="0"/>
+            </a:pPr>
+            <a:r>
+              <a:t>Networking: Hospital Local Area Network (LAN) switches and intranet cabling infrastructure.</a:t>
+            </a:r>
+          </a:p>
+          <a:p>
+            <a:pPr>
+              <a:spcAft>
+                <a:spcPts val="500"/>
+              </a:spcAft>
+              <a:defRPr sz="1400" b="0"/>
+            </a:pPr>
+            <a:r>
+              <a:t>Software Platform: PHP 8.2, MySQL 8.0, Apache/XAMPP, Windows OS (Zero license costs).</a:t>
+            </a:r>
+          </a:p>
+          <a:p>
+            <a:pPr>
+              <a:spcAft>
+                <a:spcPts val="500"/>
+              </a:spcAft>
+              <a:defRPr sz="1400" b="0"/>
+            </a:pPr>
+            <a:r>
+              <a:t>Direct Capital Costs: Dedicated server host, LAN accessories, and UPS power units (KES 120,000).</a:t>
+            </a:r>
+          </a:p>
+          <a:p>
+            <a:pPr>
+              <a:spcAft>
+                <a:spcPts val="500"/>
+              </a:spcAft>
+              <a:defRPr sz="1400" b="0"/>
+            </a:pPr>
+            <a:r>
+              <a:t>Indirect Costs: Staff training, operational onboarding, and ongoing maintenance (KES 50,000).</a:t>
+            </a:r>
+          </a:p>
+          <a:p>
+            <a:pPr>
+              <a:spcAft>
+                <a:spcPts val="0"/>
+              </a:spcAft>
+              <a:defRPr sz="1400" b="1"/>
+            </a:pPr>
+            <a:r>
+              <a:t>Total Project Investment: KES 170,000 – 210,000 (Cost recovered through sealed revenue leakages).</a:t>
             </a:r>
           </a:p>
         </p:txBody>
@@ -8900,8 +9108,7 @@
           <a:lstStyle/>
           <a:p>
             <a:r>
-              <a:rPr lang="en-US" dirty="0" b="1"/>
-              <a:t>PROJECT SCHEDULE</a:t>
+              <a:t>PROJECT SCHEDULE &amp; PHASES</a:t>
             </a:r>
           </a:p>
         </p:txBody>
@@ -8932,65 +9139,58 @@
           <a:bodyPr/>
           <a:lstStyle/>
           <a:p>
-            <a:pPr marL="285750" indent="-285750"/>
-            <a:r>
-              <a:rPr lang="en-US" dirty="0"/>
-              <a:t>Execution Framework: Executed over six months (Nov 2025 – Apr 2026) using iterative Agile methodology.</a:t>
-            </a:r>
-          </a:p>
-          <a:p>
-            <a:pPr marL="285750" indent="-285750"/>
-            <a:r>
-              <a:rPr lang="en-US" dirty="0"/>
-              <a:t>Phase 1: Concept &amp; Requirements Gathering (Nov – Dec 2025): Problem analysis, site visits, and proposal preparation.</a:t>
-            </a:r>
-          </a:p>
-          <a:p>
-            <a:pPr marL="285750" indent="-285750"/>
-            <a:r>
-              <a:rPr lang="en-US" dirty="0"/>
-              <a:t>Phase 2: Architectural Modeling &amp; Proposal Defense (Jan 2026): DFD, ERD modeling, literature review, and Project A defense.</a:t>
-            </a:r>
-          </a:p>
-          <a:p>
-            <a:r>
-              <a:rPr lang="en-US" dirty="0" b="1"/>
-              <a:t>Phase 3: Core Sprint Development (Feb – Mar 2026):</a:t>
-            </a:r>
-          </a:p>
-          <a:p>
-            <a:pPr marL="285750" indent="-285750"/>
-            <a:r>
-              <a:rPr lang="en-US" dirty="0"/>
-              <a:t>  • Sprint 1: Authentication, RBAC, Patient Registration, Bulk CSV Import.</a:t>
-            </a:r>
-          </a:p>
-          <a:p>
-            <a:pPr marL="285750" indent="-285750"/>
-            <a:r>
-              <a:rPr lang="en-US" dirty="0"/>
-              <a:t>  • Sprint 2: Electronic Test Ordering (CPOE), Catalogue Management, Payment Rows.</a:t>
-            </a:r>
-          </a:p>
-          <a:p>
-            <a:pPr marL="285750" indent="-285750"/>
-            <a:r>
-              <a:rPr lang="en-US" dirty="0"/>
-              <a:t>  • Sprint 3: Lab Queue Accessioning, Results Entry, FPDF Reports, Audit Trail.</a:t>
-            </a:r>
-          </a:p>
-          <a:p>
-            <a:pPr marL="285750" indent="-285750"/>
-            <a:r>
-              <a:rPr lang="en-US" dirty="0"/>
-              <a:t>  • Sprint 4: Admin Analytics Dashboard, Backup Routines, Claims Manager, Scheduling.</a:t>
-            </a:r>
-          </a:p>
-          <a:p>
-            <a:pPr marL="285750" indent="-285750"/>
-            <a:r>
-              <a:rPr lang="en-US" dirty="0"/>
-              <a:t>Phase 4: Testing, UAT Validation &amp; Deployment (Apr 2026): UAT evaluation with 8 hospital staff, final report, Project B defense.</a:t>
+            <a:pPr marL="285750" indent="-285750">
+              <a:spcAft>
+                <a:spcPts val="500"/>
+              </a:spcAft>
+              <a:defRPr sz="1400" b="0"/>
+            </a:pPr>
+            <a:r>
+              <a:t>Agile Development Lifecycle: Executed across 4 iterative sprint cycles over the academic calendar.</a:t>
+            </a:r>
+          </a:p>
+          <a:p>
+            <a:pPr>
+              <a:spcAft>
+                <a:spcPts val="500"/>
+              </a:spcAft>
+              <a:defRPr sz="1400" b="0"/>
+            </a:pPr>
+            <a:r>
+              <a:t>Sprint 1 (Analysis &amp; Inception): Contextual inquiries, manual workflow mapping, and SRS sign-off.</a:t>
+            </a:r>
+          </a:p>
+          <a:p>
+            <a:pPr>
+              <a:spcAft>
+                <a:spcPts val="500"/>
+              </a:spcAft>
+              <a:defRPr sz="1400" b="0"/>
+            </a:pPr>
+            <a:r>
+              <a:t>Sprint 2 (Architecture &amp; UI): Relational schema design, UI wireframing, and RBAC authentication.</a:t>
+            </a:r>
+          </a:p>
+          <a:p>
+            <a:pPr>
+              <a:spcAft>
+                <a:spcPts val="500"/>
+              </a:spcAft>
+              <a:defRPr sz="1400" b="0"/>
+            </a:pPr>
+            <a:r>
+              <a:t>Sprint 3 (Module Implementation): CPOE ordering, lab bench, blood bank, eCitizen, and notifications.</a:t>
+            </a:r>
+          </a:p>
+          <a:p>
+            <a:pPr>
+              <a:spcAft>
+                <a:spcPts val="0"/>
+              </a:spcAft>
+              <a:defRPr sz="1400" b="0"/>
+            </a:pPr>
+            <a:r>
+              <a:t>Sprint 4 (Testing &amp; Verification): 14 test cases, UAT evaluation (4.6/5.0), and hospital deployment.</a:t>
             </a:r>
           </a:p>
         </p:txBody>

--- a/PROJECT_B_FINAL_PRESENTATION_OWUOR_COLLINS.pptx
+++ b/PROJECT_B_FINAL_PRESENTATION_OWUOR_COLLINS.pptx
@@ -325,7 +325,7 @@
           </a:lstStyle>
           <a:p>
             <a:r>
-              <a:rPr lang="en-US" smtClean="0"/>
+              <a:rPr lang="en-US"/>
               <a:t>Click to edit Master title style</a:t>
             </a:r>
             <a:endParaRPr lang="en-US" dirty="0"/>
@@ -444,7 +444,7 @@
           </a:lstStyle>
           <a:p>
             <a:r>
-              <a:rPr lang="en-US" smtClean="0"/>
+              <a:rPr lang="en-US"/>
               <a:t>Click to edit Master subtitle style</a:t>
             </a:r>
             <a:endParaRPr lang="en-US" dirty="0"/>
@@ -473,7 +473,7 @@
           <a:p>
             <a:fld id="{985FAE1C-47D0-494D-BBBC-74279CBF825C}" type="datetimeFigureOut">
               <a:rPr lang="en-US" smtClean="0"/>
-              <a:t>8/12/21</a:t>
+              <a:t>10/6/2026</a:t>
             </a:fld>
             <a:endParaRPr lang="en-US"/>
           </a:p>
@@ -623,7 +623,7 @@
           </a:lstStyle>
           <a:p>
             <a:r>
-              <a:rPr lang="en-US" smtClean="0"/>
+              <a:rPr lang="en-US"/>
               <a:t>Click to edit Master title style</a:t>
             </a:r>
             <a:endParaRPr lang="en-US" dirty="0"/>
@@ -711,7 +711,7 @@
           </a:lstStyle>
           <a:p>
             <a:r>
-              <a:rPr lang="en-US" smtClean="0"/>
+              <a:rPr lang="en-US"/>
               <a:t>Drag picture to placeholder or click icon to add</a:t>
             </a:r>
             <a:endParaRPr lang="en-US" dirty="0"/>
@@ -779,7 +779,7 @@
           <a:p>
             <a:pPr lvl="0"/>
             <a:r>
-              <a:rPr lang="en-US" smtClean="0"/>
+              <a:rPr lang="en-US"/>
               <a:t>Click to edit Master text styles</a:t>
             </a:r>
           </a:p>
@@ -802,7 +802,7 @@
           <a:p>
             <a:fld id="{985FAE1C-47D0-494D-BBBC-74279CBF825C}" type="datetimeFigureOut">
               <a:rPr lang="en-US" smtClean="0"/>
-              <a:t>8/12/21</a:t>
+              <a:t>10/6/2026</a:t>
             </a:fld>
             <a:endParaRPr lang="en-US"/>
           </a:p>
@@ -907,7 +907,7 @@
           </a:lstStyle>
           <a:p>
             <a:r>
-              <a:rPr lang="en-US" smtClean="0"/>
+              <a:rPr lang="en-US"/>
               <a:t>Click to edit Master title style</a:t>
             </a:r>
             <a:endParaRPr lang="en-US" dirty="0"/>
@@ -1027,7 +1027,7 @@
           <a:p>
             <a:pPr lvl="0"/>
             <a:r>
-              <a:rPr lang="en-US" smtClean="0"/>
+              <a:rPr lang="en-US"/>
               <a:t>Click to edit Master text styles</a:t>
             </a:r>
           </a:p>
@@ -1050,7 +1050,7 @@
           <a:p>
             <a:fld id="{985FAE1C-47D0-494D-BBBC-74279CBF825C}" type="datetimeFigureOut">
               <a:rPr lang="en-US" smtClean="0"/>
-              <a:t>8/12/21</a:t>
+              <a:t>10/6/2026</a:t>
             </a:fld>
             <a:endParaRPr lang="en-US"/>
           </a:p>
@@ -1190,7 +1190,7 @@
           </a:lstStyle>
           <a:p>
             <a:r>
-              <a:rPr lang="en-US" smtClean="0"/>
+              <a:rPr lang="en-US"/>
               <a:t>Click to edit Master title style</a:t>
             </a:r>
             <a:endParaRPr lang="en-US" dirty="0"/>
@@ -1247,7 +1247,7 @@
           <a:p>
             <a:pPr lvl="0"/>
             <a:r>
-              <a:rPr lang="en-US" smtClean="0"/>
+              <a:rPr lang="en-US"/>
               <a:t>Click to edit Master text styles</a:t>
             </a:r>
           </a:p>
@@ -1366,7 +1366,7 @@
           <a:p>
             <a:pPr lvl="0"/>
             <a:r>
-              <a:rPr lang="en-US" smtClean="0"/>
+              <a:rPr lang="en-US"/>
               <a:t>Click to edit Master text styles</a:t>
             </a:r>
           </a:p>
@@ -1389,7 +1389,7 @@
           <a:p>
             <a:fld id="{985FAE1C-47D0-494D-BBBC-74279CBF825C}" type="datetimeFigureOut">
               <a:rPr lang="en-US" smtClean="0"/>
-              <a:t>8/12/21</a:t>
+              <a:t>10/6/2026</a:t>
             </a:fld>
             <a:endParaRPr lang="en-US"/>
           </a:p>
@@ -1593,7 +1593,7 @@
           </a:lstStyle>
           <a:p>
             <a:r>
-              <a:rPr lang="en-US" smtClean="0"/>
+              <a:rPr lang="en-US"/>
               <a:t>Click to edit Master title style</a:t>
             </a:r>
             <a:endParaRPr lang="en-US" dirty="0"/>
@@ -1713,7 +1713,7 @@
           <a:p>
             <a:pPr lvl="0"/>
             <a:r>
-              <a:rPr lang="en-US" smtClean="0"/>
+              <a:rPr lang="en-US"/>
               <a:t>Click to edit Master text styles</a:t>
             </a:r>
           </a:p>
@@ -1736,7 +1736,7 @@
           <a:p>
             <a:fld id="{985FAE1C-47D0-494D-BBBC-74279CBF825C}" type="datetimeFigureOut">
               <a:rPr lang="en-US" smtClean="0"/>
-              <a:t>8/12/21</a:t>
+              <a:t>10/6/2026</a:t>
             </a:fld>
             <a:endParaRPr lang="en-US"/>
           </a:p>
@@ -1845,7 +1845,7 @@
           </a:lstStyle>
           <a:p>
             <a:r>
-              <a:rPr lang="en-US" smtClean="0"/>
+              <a:rPr lang="en-US"/>
               <a:t>Click to edit Master title style</a:t>
             </a:r>
             <a:endParaRPr lang="en-US" dirty="0"/>
@@ -1968,7 +1968,7 @@
           <a:p>
             <a:pPr lvl="0"/>
             <a:r>
-              <a:rPr lang="en-US" smtClean="0"/>
+              <a:rPr lang="en-US"/>
               <a:t>Click to edit Master text styles</a:t>
             </a:r>
           </a:p>
@@ -2087,7 +2087,7 @@
           <a:p>
             <a:pPr lvl="0"/>
             <a:r>
-              <a:rPr lang="en-US" smtClean="0"/>
+              <a:rPr lang="en-US"/>
               <a:t>Click to edit Master text styles</a:t>
             </a:r>
           </a:p>
@@ -2110,7 +2110,7 @@
           <a:p>
             <a:fld id="{985FAE1C-47D0-494D-BBBC-74279CBF825C}" type="datetimeFigureOut">
               <a:rPr lang="en-US" smtClean="0"/>
-              <a:t>8/12/21</a:t>
+              <a:t>10/6/2026</a:t>
             </a:fld>
             <a:endParaRPr lang="en-US"/>
           </a:p>
@@ -2315,7 +2315,7 @@
           <a:p>
             <a:pPr marL="0" lvl="0"/>
             <a:r>
-              <a:rPr lang="en-US" smtClean="0"/>
+              <a:rPr lang="en-US"/>
               <a:t>Click to edit Master title style</a:t>
             </a:r>
             <a:endParaRPr lang="en-US" dirty="0"/>
@@ -2438,7 +2438,7 @@
           <a:p>
             <a:pPr lvl="0"/>
             <a:r>
-              <a:rPr lang="en-US" smtClean="0"/>
+              <a:rPr lang="en-US"/>
               <a:t>Click to edit Master text styles</a:t>
             </a:r>
           </a:p>
@@ -2557,7 +2557,7 @@
           <a:p>
             <a:pPr lvl="0"/>
             <a:r>
-              <a:rPr lang="en-US" smtClean="0"/>
+              <a:rPr lang="en-US"/>
               <a:t>Click to edit Master text styles</a:t>
             </a:r>
           </a:p>
@@ -2580,7 +2580,7 @@
           <a:p>
             <a:fld id="{985FAE1C-47D0-494D-BBBC-74279CBF825C}" type="datetimeFigureOut">
               <a:rPr lang="en-US" smtClean="0"/>
-              <a:t>8/12/21</a:t>
+              <a:t>10/6/2026</a:t>
             </a:fld>
             <a:endParaRPr lang="en-US"/>
           </a:p>
@@ -2709,7 +2709,7 @@
           </a:lstStyle>
           <a:p>
             <a:r>
-              <a:rPr lang="en-US" smtClean="0"/>
+              <a:rPr lang="en-US"/>
               <a:t>Click to edit Master title style</a:t>
             </a:r>
             <a:endParaRPr lang="en-US" dirty="0"/>
@@ -2733,35 +2733,35 @@
           <a:p>
             <a:pPr lvl="0"/>
             <a:r>
-              <a:rPr lang="en-US" smtClean="0"/>
+              <a:rPr lang="en-US"/>
               <a:t>Click to edit Master text styles</a:t>
             </a:r>
           </a:p>
           <a:p>
             <a:pPr lvl="1"/>
             <a:r>
-              <a:rPr lang="en-US" smtClean="0"/>
+              <a:rPr lang="en-US"/>
               <a:t>Second level</a:t>
             </a:r>
           </a:p>
           <a:p>
             <a:pPr lvl="2"/>
             <a:r>
-              <a:rPr lang="en-US" smtClean="0"/>
+              <a:rPr lang="en-US"/>
               <a:t>Third level</a:t>
             </a:r>
           </a:p>
           <a:p>
             <a:pPr lvl="3"/>
             <a:r>
-              <a:rPr lang="en-US" smtClean="0"/>
+              <a:rPr lang="en-US"/>
               <a:t>Fourth level</a:t>
             </a:r>
           </a:p>
           <a:p>
             <a:pPr lvl="4"/>
             <a:r>
-              <a:rPr lang="en-US" smtClean="0"/>
+              <a:rPr lang="en-US"/>
               <a:t>Fifth level</a:t>
             </a:r>
             <a:endParaRPr lang="en-US" dirty="0"/>
@@ -2785,7 +2785,7 @@
           <a:p>
             <a:fld id="{985FAE1C-47D0-494D-BBBC-74279CBF825C}" type="datetimeFigureOut">
               <a:rPr lang="en-US" smtClean="0"/>
-              <a:t>8/12/21</a:t>
+              <a:t>10/6/2026</a:t>
             </a:fld>
             <a:endParaRPr lang="en-US"/>
           </a:p>
@@ -2915,7 +2915,7 @@
           <a:lstStyle/>
           <a:p>
             <a:r>
-              <a:rPr lang="en-US" smtClean="0"/>
+              <a:rPr lang="en-US"/>
               <a:t>Click to edit Master title style</a:t>
             </a:r>
             <a:endParaRPr lang="en-US" dirty="0"/>
@@ -2944,35 +2944,35 @@
           <a:p>
             <a:pPr lvl="0"/>
             <a:r>
-              <a:rPr lang="en-US" smtClean="0"/>
+              <a:rPr lang="en-US"/>
               <a:t>Click to edit Master text styles</a:t>
             </a:r>
           </a:p>
           <a:p>
             <a:pPr lvl="1"/>
             <a:r>
-              <a:rPr lang="en-US" smtClean="0"/>
+              <a:rPr lang="en-US"/>
               <a:t>Second level</a:t>
             </a:r>
           </a:p>
           <a:p>
             <a:pPr lvl="2"/>
             <a:r>
-              <a:rPr lang="en-US" smtClean="0"/>
+              <a:rPr lang="en-US"/>
               <a:t>Third level</a:t>
             </a:r>
           </a:p>
           <a:p>
             <a:pPr lvl="3"/>
             <a:r>
-              <a:rPr lang="en-US" smtClean="0"/>
+              <a:rPr lang="en-US"/>
               <a:t>Fourth level</a:t>
             </a:r>
           </a:p>
           <a:p>
             <a:pPr lvl="4"/>
             <a:r>
-              <a:rPr lang="en-US" smtClean="0"/>
+              <a:rPr lang="en-US"/>
               <a:t>Fifth level</a:t>
             </a:r>
             <a:endParaRPr lang="en-US" dirty="0"/>
@@ -2996,7 +2996,7 @@
           <a:p>
             <a:fld id="{985FAE1C-47D0-494D-BBBC-74279CBF825C}" type="datetimeFigureOut">
               <a:rPr lang="en-US" smtClean="0"/>
-              <a:t>8/12/21</a:t>
+              <a:t>10/6/2026</a:t>
             </a:fld>
             <a:endParaRPr lang="en-US"/>
           </a:p>
@@ -3152,7 +3152,7 @@
           <a:lstStyle/>
           <a:p>
             <a:r>
-              <a:rPr lang="en-US" smtClean="0"/>
+              <a:rPr lang="en-US"/>
               <a:t>Click to edit Master title style</a:t>
             </a:r>
             <a:endParaRPr lang="en-US" dirty="0"/>
@@ -3176,35 +3176,35 @@
           <a:p>
             <a:pPr lvl="0"/>
             <a:r>
-              <a:rPr lang="en-US" smtClean="0"/>
+              <a:rPr lang="en-US"/>
               <a:t>Click to edit Master text styles</a:t>
             </a:r>
           </a:p>
           <a:p>
             <a:pPr lvl="1"/>
             <a:r>
-              <a:rPr lang="en-US" smtClean="0"/>
+              <a:rPr lang="en-US"/>
               <a:t>Second level</a:t>
             </a:r>
           </a:p>
           <a:p>
             <a:pPr lvl="2"/>
             <a:r>
-              <a:rPr lang="en-US" smtClean="0"/>
+              <a:rPr lang="en-US"/>
               <a:t>Third level</a:t>
             </a:r>
           </a:p>
           <a:p>
             <a:pPr lvl="3"/>
             <a:r>
-              <a:rPr lang="en-US" smtClean="0"/>
+              <a:rPr lang="en-US"/>
               <a:t>Fourth level</a:t>
             </a:r>
           </a:p>
           <a:p>
             <a:pPr lvl="4"/>
             <a:r>
-              <a:rPr lang="en-US" smtClean="0"/>
+              <a:rPr lang="en-US"/>
               <a:t>Fifth level</a:t>
             </a:r>
             <a:endParaRPr lang="en-US" dirty="0"/>
@@ -3228,7 +3228,7 @@
           <a:p>
             <a:fld id="{985FAE1C-47D0-494D-BBBC-74279CBF825C}" type="datetimeFigureOut">
               <a:rPr lang="en-US" smtClean="0"/>
-              <a:t>8/12/21</a:t>
+              <a:t>10/6/2026</a:t>
             </a:fld>
             <a:endParaRPr lang="en-US"/>
           </a:p>
@@ -3333,7 +3333,7 @@
           </a:lstStyle>
           <a:p>
             <a:r>
-              <a:rPr lang="en-US" smtClean="0"/>
+              <a:rPr lang="en-US"/>
               <a:t>Click to edit Master title style</a:t>
             </a:r>
             <a:endParaRPr lang="en-US" dirty="0"/>
@@ -3453,7 +3453,7 @@
           <a:p>
             <a:pPr lvl="0"/>
             <a:r>
-              <a:rPr lang="en-US" smtClean="0"/>
+              <a:rPr lang="en-US"/>
               <a:t>Click to edit Master text styles</a:t>
             </a:r>
           </a:p>
@@ -3476,7 +3476,7 @@
           <a:p>
             <a:fld id="{985FAE1C-47D0-494D-BBBC-74279CBF825C}" type="datetimeFigureOut">
               <a:rPr lang="en-US" smtClean="0"/>
-              <a:t>8/12/21</a:t>
+              <a:t>10/6/2026</a:t>
             </a:fld>
             <a:endParaRPr lang="en-US"/>
           </a:p>
@@ -3632,7 +3632,7 @@
           <a:lstStyle/>
           <a:p>
             <a:r>
-              <a:rPr lang="en-US" smtClean="0"/>
+              <a:rPr lang="en-US"/>
               <a:t>Click to edit Master title style</a:t>
             </a:r>
             <a:endParaRPr lang="en-US" dirty="0"/>
@@ -3663,35 +3663,35 @@
           <a:p>
             <a:pPr lvl="0"/>
             <a:r>
-              <a:rPr lang="en-US" smtClean="0"/>
+              <a:rPr lang="en-US"/>
               <a:t>Click to edit Master text styles</a:t>
             </a:r>
           </a:p>
           <a:p>
             <a:pPr lvl="1"/>
             <a:r>
-              <a:rPr lang="en-US" smtClean="0"/>
+              <a:rPr lang="en-US"/>
               <a:t>Second level</a:t>
             </a:r>
           </a:p>
           <a:p>
             <a:pPr lvl="2"/>
             <a:r>
-              <a:rPr lang="en-US" smtClean="0"/>
+              <a:rPr lang="en-US"/>
               <a:t>Third level</a:t>
             </a:r>
           </a:p>
           <a:p>
             <a:pPr lvl="3"/>
             <a:r>
-              <a:rPr lang="en-US" smtClean="0"/>
+              <a:rPr lang="en-US"/>
               <a:t>Fourth level</a:t>
             </a:r>
           </a:p>
           <a:p>
             <a:pPr lvl="4"/>
             <a:r>
-              <a:rPr lang="en-US" smtClean="0"/>
+              <a:rPr lang="en-US"/>
               <a:t>Fifth level</a:t>
             </a:r>
             <a:endParaRPr lang="en-US" dirty="0"/>
@@ -3722,35 +3722,35 @@
           <a:p>
             <a:pPr lvl="0"/>
             <a:r>
-              <a:rPr lang="en-US" smtClean="0"/>
+              <a:rPr lang="en-US"/>
               <a:t>Click to edit Master text styles</a:t>
             </a:r>
           </a:p>
           <a:p>
             <a:pPr lvl="1"/>
             <a:r>
-              <a:rPr lang="en-US" smtClean="0"/>
+              <a:rPr lang="en-US"/>
               <a:t>Second level</a:t>
             </a:r>
           </a:p>
           <a:p>
             <a:pPr lvl="2"/>
             <a:r>
-              <a:rPr lang="en-US" smtClean="0"/>
+              <a:rPr lang="en-US"/>
               <a:t>Third level</a:t>
             </a:r>
           </a:p>
           <a:p>
             <a:pPr lvl="3"/>
             <a:r>
-              <a:rPr lang="en-US" smtClean="0"/>
+              <a:rPr lang="en-US"/>
               <a:t>Fourth level</a:t>
             </a:r>
           </a:p>
           <a:p>
             <a:pPr lvl="4"/>
             <a:r>
-              <a:rPr lang="en-US" smtClean="0"/>
+              <a:rPr lang="en-US"/>
               <a:t>Fifth level</a:t>
             </a:r>
             <a:endParaRPr lang="en-US" dirty="0"/>
@@ -3774,7 +3774,7 @@
           <a:p>
             <a:fld id="{985FAE1C-47D0-494D-BBBC-74279CBF825C}" type="datetimeFigureOut">
               <a:rPr lang="en-US" smtClean="0"/>
-              <a:t>8/12/21</a:t>
+              <a:t>10/6/2026</a:t>
             </a:fld>
             <a:endParaRPr lang="en-US"/>
           </a:p>
@@ -3877,7 +3877,7 @@
           </a:lstStyle>
           <a:p>
             <a:r>
-              <a:rPr lang="en-US" smtClean="0"/>
+              <a:rPr lang="en-US"/>
               <a:t>Click to edit Master title style</a:t>
             </a:r>
             <a:endParaRPr lang="en-US" dirty="0"/>
@@ -3955,7 +3955,7 @@
           <a:p>
             <a:pPr lvl="0"/>
             <a:r>
-              <a:rPr lang="en-US" smtClean="0"/>
+              <a:rPr lang="en-US"/>
               <a:t>Click to edit Master text styles</a:t>
             </a:r>
           </a:p>
@@ -3985,35 +3985,35 @@
           <a:p>
             <a:pPr lvl="0"/>
             <a:r>
-              <a:rPr lang="en-US" smtClean="0"/>
+              <a:rPr lang="en-US"/>
               <a:t>Click to edit Master text styles</a:t>
             </a:r>
           </a:p>
           <a:p>
             <a:pPr lvl="1"/>
             <a:r>
-              <a:rPr lang="en-US" smtClean="0"/>
+              <a:rPr lang="en-US"/>
               <a:t>Second level</a:t>
             </a:r>
           </a:p>
           <a:p>
             <a:pPr lvl="2"/>
             <a:r>
-              <a:rPr lang="en-US" smtClean="0"/>
+              <a:rPr lang="en-US"/>
               <a:t>Third level</a:t>
             </a:r>
           </a:p>
           <a:p>
             <a:pPr lvl="3"/>
             <a:r>
-              <a:rPr lang="en-US" smtClean="0"/>
+              <a:rPr lang="en-US"/>
               <a:t>Fourth level</a:t>
             </a:r>
           </a:p>
           <a:p>
             <a:pPr lvl="4"/>
             <a:r>
-              <a:rPr lang="en-US" smtClean="0"/>
+              <a:rPr lang="en-US"/>
               <a:t>Fifth level</a:t>
             </a:r>
             <a:endParaRPr lang="en-US" dirty="0"/>
@@ -4091,7 +4091,7 @@
           <a:p>
             <a:pPr lvl="0"/>
             <a:r>
-              <a:rPr lang="en-US" smtClean="0"/>
+              <a:rPr lang="en-US"/>
               <a:t>Click to edit Master text styles</a:t>
             </a:r>
           </a:p>
@@ -4121,35 +4121,35 @@
           <a:p>
             <a:pPr lvl="0"/>
             <a:r>
-              <a:rPr lang="en-US" smtClean="0"/>
+              <a:rPr lang="en-US"/>
               <a:t>Click to edit Master text styles</a:t>
             </a:r>
           </a:p>
           <a:p>
             <a:pPr lvl="1"/>
             <a:r>
-              <a:rPr lang="en-US" smtClean="0"/>
+              <a:rPr lang="en-US"/>
               <a:t>Second level</a:t>
             </a:r>
           </a:p>
           <a:p>
             <a:pPr lvl="2"/>
             <a:r>
-              <a:rPr lang="en-US" smtClean="0"/>
+              <a:rPr lang="en-US"/>
               <a:t>Third level</a:t>
             </a:r>
           </a:p>
           <a:p>
             <a:pPr lvl="3"/>
             <a:r>
-              <a:rPr lang="en-US" smtClean="0"/>
+              <a:rPr lang="en-US"/>
               <a:t>Fourth level</a:t>
             </a:r>
           </a:p>
           <a:p>
             <a:pPr lvl="4"/>
             <a:r>
-              <a:rPr lang="en-US" smtClean="0"/>
+              <a:rPr lang="en-US"/>
               <a:t>Fifth level</a:t>
             </a:r>
             <a:endParaRPr lang="en-US" dirty="0"/>
@@ -4173,7 +4173,7 @@
           <a:p>
             <a:fld id="{985FAE1C-47D0-494D-BBBC-74279CBF825C}" type="datetimeFigureOut">
               <a:rPr lang="en-US" smtClean="0"/>
-              <a:t>8/12/21</a:t>
+              <a:t>10/6/2026</a:t>
             </a:fld>
             <a:endParaRPr lang="en-US"/>
           </a:p>
@@ -4303,7 +4303,7 @@
           <a:lstStyle/>
           <a:p>
             <a:r>
-              <a:rPr lang="en-US" smtClean="0"/>
+              <a:rPr lang="en-US"/>
               <a:t>Click to edit Master title style</a:t>
             </a:r>
             <a:endParaRPr lang="en-US" dirty="0"/>
@@ -4327,7 +4327,7 @@
           <a:p>
             <a:fld id="{985FAE1C-47D0-494D-BBBC-74279CBF825C}" type="datetimeFigureOut">
               <a:rPr lang="en-US" smtClean="0"/>
-              <a:t>8/12/21</a:t>
+              <a:t>10/6/2026</a:t>
             </a:fld>
             <a:endParaRPr lang="en-US"/>
           </a:p>
@@ -4453,7 +4453,7 @@
           <a:p>
             <a:fld id="{985FAE1C-47D0-494D-BBBC-74279CBF825C}" type="datetimeFigureOut">
               <a:rPr lang="en-US" smtClean="0"/>
-              <a:t>8/12/21</a:t>
+              <a:t>10/6/2026</a:t>
             </a:fld>
             <a:endParaRPr lang="en-US"/>
           </a:p>
@@ -4563,7 +4563,7 @@
           </a:lstStyle>
           <a:p>
             <a:r>
-              <a:rPr lang="en-US" smtClean="0"/>
+              <a:rPr lang="en-US"/>
               <a:t>Click to edit Master title style</a:t>
             </a:r>
             <a:endParaRPr lang="en-US" dirty="0"/>
@@ -4594,35 +4594,35 @@
           <a:p>
             <a:pPr lvl="0"/>
             <a:r>
-              <a:rPr lang="en-US" smtClean="0"/>
+              <a:rPr lang="en-US"/>
               <a:t>Click to edit Master text styles</a:t>
             </a:r>
           </a:p>
           <a:p>
             <a:pPr lvl="1"/>
             <a:r>
-              <a:rPr lang="en-US" smtClean="0"/>
+              <a:rPr lang="en-US"/>
               <a:t>Second level</a:t>
             </a:r>
           </a:p>
           <a:p>
             <a:pPr lvl="2"/>
             <a:r>
-              <a:rPr lang="en-US" smtClean="0"/>
+              <a:rPr lang="en-US"/>
               <a:t>Third level</a:t>
             </a:r>
           </a:p>
           <a:p>
             <a:pPr lvl="3"/>
             <a:r>
-              <a:rPr lang="en-US" smtClean="0"/>
+              <a:rPr lang="en-US"/>
               <a:t>Fourth level</a:t>
             </a:r>
           </a:p>
           <a:p>
             <a:pPr lvl="4"/>
             <a:r>
-              <a:rPr lang="en-US" smtClean="0"/>
+              <a:rPr lang="en-US"/>
               <a:t>Fifth level</a:t>
             </a:r>
             <a:endParaRPr lang="en-US" dirty="0"/>
@@ -4690,7 +4690,7 @@
           <a:p>
             <a:pPr lvl="0"/>
             <a:r>
-              <a:rPr lang="en-US" smtClean="0"/>
+              <a:rPr lang="en-US"/>
               <a:t>Click to edit Master text styles</a:t>
             </a:r>
           </a:p>
@@ -4713,7 +4713,7 @@
           <a:p>
             <a:fld id="{985FAE1C-47D0-494D-BBBC-74279CBF825C}" type="datetimeFigureOut">
               <a:rPr lang="en-US" smtClean="0"/>
-              <a:t>8/12/21</a:t>
+              <a:t>10/6/2026</a:t>
             </a:fld>
             <a:endParaRPr lang="en-US"/>
           </a:p>
@@ -4854,7 +4854,7 @@
           </a:lstStyle>
           <a:p>
             <a:r>
-              <a:rPr lang="en-US" smtClean="0"/>
+              <a:rPr lang="en-US"/>
               <a:t>Click to edit Master title style</a:t>
             </a:r>
             <a:endParaRPr lang="en-US" dirty="0"/>
@@ -4942,7 +4942,7 @@
           </a:lstStyle>
           <a:p>
             <a:r>
-              <a:rPr lang="en-US" smtClean="0"/>
+              <a:rPr lang="en-US"/>
               <a:t>Drag picture to placeholder or click icon to add</a:t>
             </a:r>
             <a:endParaRPr lang="en-US" dirty="0"/>
@@ -5010,7 +5010,7 @@
           <a:p>
             <a:pPr lvl="0"/>
             <a:r>
-              <a:rPr lang="en-US" smtClean="0"/>
+              <a:rPr lang="en-US"/>
               <a:t>Click to edit Master text styles</a:t>
             </a:r>
           </a:p>
@@ -5033,7 +5033,7 @@
           <a:p>
             <a:fld id="{985FAE1C-47D0-494D-BBBC-74279CBF825C}" type="datetimeFigureOut">
               <a:rPr lang="en-US" smtClean="0"/>
-              <a:t>8/12/21</a:t>
+              <a:t>10/6/2026</a:t>
             </a:fld>
             <a:endParaRPr lang="en-US"/>
           </a:p>
@@ -5280,7 +5280,7 @@
           <a:lstStyle/>
           <a:p>
             <a:r>
-              <a:rPr lang="en-US" smtClean="0"/>
+              <a:rPr lang="en-US"/>
               <a:t>Click to edit Master title style</a:t>
             </a:r>
             <a:endParaRPr lang="en-US" dirty="0"/>
@@ -5314,35 +5314,35 @@
           <a:p>
             <a:pPr lvl="0"/>
             <a:r>
-              <a:rPr lang="en-US" smtClean="0"/>
+              <a:rPr lang="en-US"/>
               <a:t>Click to edit Master text styles</a:t>
             </a:r>
           </a:p>
           <a:p>
             <a:pPr lvl="1"/>
             <a:r>
-              <a:rPr lang="en-US" smtClean="0"/>
+              <a:rPr lang="en-US"/>
               <a:t>Second level</a:t>
             </a:r>
           </a:p>
           <a:p>
             <a:pPr lvl="2"/>
             <a:r>
-              <a:rPr lang="en-US" smtClean="0"/>
+              <a:rPr lang="en-US"/>
               <a:t>Third level</a:t>
             </a:r>
           </a:p>
           <a:p>
             <a:pPr lvl="3"/>
             <a:r>
-              <a:rPr lang="en-US" smtClean="0"/>
+              <a:rPr lang="en-US"/>
               <a:t>Fourth level</a:t>
             </a:r>
           </a:p>
           <a:p>
             <a:pPr lvl="4"/>
             <a:r>
-              <a:rPr lang="en-US" smtClean="0"/>
+              <a:rPr lang="en-US"/>
               <a:t>Fifth level</a:t>
             </a:r>
             <a:endParaRPr lang="en-US" dirty="0"/>
@@ -5384,7 +5384,7 @@
           <a:p>
             <a:fld id="{985FAE1C-47D0-494D-BBBC-74279CBF825C}" type="datetimeFigureOut">
               <a:rPr lang="en-US" smtClean="0"/>
-              <a:t>8/12/21</a:t>
+              <a:t>10/6/2026</a:t>
             </a:fld>
             <a:endParaRPr lang="en-US"/>
           </a:p>
@@ -5916,7 +5916,7 @@
 </file>
 
 <file path=ppt/slides/slide1.xml><?xml version="1.0" encoding="utf-8"?>
-<p:sld xmlns:a="http://schemas.openxmlformats.org/drawingml/2006/main" xmlns:ns2="http://schemas.microsoft.com/office/drawing/2014/main" xmlns:ns3="http://schemas.microsoft.com/office/drawing/2010/main" xmlns:ns4="http://schemas.openxmlformats.org/officeDocument/2006/relationships" xmlns:ns5="http://schemas.microsoft.com/office/powerpoint/2010/main" xmlns:p="http://schemas.openxmlformats.org/presentationml/2006/main">
+<p:sld xmlns:a="http://schemas.openxmlformats.org/drawingml/2006/main" xmlns:r="http://schemas.openxmlformats.org/officeDocument/2006/relationships" xmlns:p="http://schemas.openxmlformats.org/presentationml/2006/main">
   <p:cSld>
     <p:spTree>
       <p:nvGrpSpPr>
@@ -5937,7 +5937,7 @@
           <p:cNvPr id="2" name="Title 1">
             <a:extLst>
               <a:ext uri="{FF2B5EF4-FFF2-40B4-BE49-F238E27FC236}">
-                <ns2:creationId id="{FF9ED127-5251-498F-BE06-AEBCF9B00B88}"/>
+                <a16:creationId xmlns:a16="http://schemas.microsoft.com/office/drawing/2014/main" id="{FF9ED127-5251-498F-BE06-AEBCF9B00B88}"/>
               </a:ext>
             </a:extLst>
           </p:cNvPr>
@@ -5974,7 +5974,7 @@
           <p:cNvPr id="3" name="Subtitle 2">
             <a:extLst>
               <a:ext uri="{FF2B5EF4-FFF2-40B4-BE49-F238E27FC236}">
-                <ns2:creationId id="{4444ACC4-9FA8-4D2B-B032-EBD6C4F60C3F}"/>
+                <a16:creationId xmlns:a16="http://schemas.microsoft.com/office/drawing/2014/main" id="{4444ACC4-9FA8-4D2B-B032-EBD6C4F60C3F}"/>
               </a:ext>
             </a:extLst>
           </p:cNvPr>
@@ -6004,6 +6004,7 @@
               <a:defRPr sz="1600" b="1"/>
             </a:pPr>
             <a:r>
+              <a:rPr dirty="0"/>
               <a:t>Final Project Defense Presentation (Project B)</a:t>
             </a:r>
           </a:p>
@@ -6015,6 +6016,7 @@
               <a:defRPr sz="1400" b="0"/>
             </a:pPr>
             <a:r>
+              <a:rPr dirty="0"/>
               <a:t>Candidate: Owuor Collins  |  Reg No: SCCI/01227/2022</a:t>
             </a:r>
           </a:p>
@@ -6026,7 +6028,12 @@
               <a:defRPr sz="1300" b="0"/>
             </a:pPr>
             <a:r>
-              <a:t>Programme: Bachelor of Technology in Information Technology</a:t>
+              <a:rPr dirty="0" err="1"/>
+              <a:t>Programme</a:t>
+            </a:r>
+            <a:r>
+              <a:rPr dirty="0"/>
+              <a:t>: Bachelor of Technology in Information Technology</a:t>
             </a:r>
           </a:p>
           <a:p>
@@ -6037,6 +6044,7 @@
               <a:defRPr sz="1300" b="0"/>
             </a:pPr>
             <a:r>
+              <a:rPr dirty="0"/>
               <a:t>Institution: The Technical University of Kenya (TUK) — SCIT</a:t>
             </a:r>
           </a:p>
@@ -6048,6 +6056,7 @@
               <a:defRPr sz="1300" b="0"/>
             </a:pPr>
             <a:r>
+              <a:rPr dirty="0"/>
               <a:t>Supervisors: Dr. Edwin Ngwawe &amp; Mr. Peter Maina Kariuki</a:t>
             </a:r>
           </a:p>
@@ -6059,6 +6068,7 @@
               <a:defRPr sz="1300" b="0"/>
             </a:pPr>
             <a:r>
+              <a:rPr dirty="0"/>
               <a:t>Academic Year: 2025 / 2026</a:t>
             </a:r>
           </a:p>
@@ -6087,24 +6097,24 @@
           <a:effectLst/>
           <a:extLst>
             <a:ext uri="{909E8E84-426E-40DD-AFC4-6F175D3DCCD1}">
-              <ns3:hiddenFill>
+              <a14:hiddenFill xmlns:a14="http://schemas.microsoft.com/office/drawing/2010/main">
                 <a:solidFill>
                   <a:schemeClr val="accent1"/>
                 </a:solidFill>
-              </ns3:hiddenFill>
+              </a14:hiddenFill>
             </a:ext>
             <a:ext uri="{91240B29-F687-4F45-9708-019B960494DF}">
-              <ns3:hiddenLine w="9525">
+              <a14:hiddenLine xmlns:a14="http://schemas.microsoft.com/office/drawing/2010/main" w="9525">
                 <a:solidFill>
                   <a:schemeClr val="tx1"/>
                 </a:solidFill>
                 <a:miter lim="800000"/>
                 <a:headEnd/>
                 <a:tailEnd/>
-              </ns3:hiddenLine>
+              </a14:hiddenLine>
             </a:ext>
             <a:ext uri="{AF507438-7753-43E0-B8FC-AC1667EBCBE1}">
-              <ns3:hiddenEffects>
+              <a14:hiddenEffects xmlns:a14="http://schemas.microsoft.com/office/drawing/2010/main">
                 <a:effectLst>
                   <a:outerShdw blurRad="63500" dist="38099" dir="2700000" algn="ctr" rotWithShape="0">
                     <a:schemeClr val="bg2">
@@ -6112,7 +6122,7 @@
                     </a:schemeClr>
                   </a:outerShdw>
                 </a:effectLst>
-              </ns3:hiddenEffects>
+              </a14:hiddenEffects>
             </a:ext>
           </a:extLst>
         </p:spPr>
@@ -6138,10 +6148,10 @@
           <p:nvPr/>
         </p:nvPicPr>
         <p:blipFill>
-          <a:blip ns4:embed="rId2">
+          <a:blip r:embed="rId2">
             <a:extLst>
               <a:ext uri="{28A0092B-C50C-407E-A947-70E740481C1C}">
-                <ns3:useLocalDpi val="0"/>
+                <a14:useLocalDpi xmlns:a14="http://schemas.microsoft.com/office/drawing/2010/main" val="0"/>
               </a:ext>
             </a:extLst>
           </a:blip>
@@ -6166,25 +6176,18 @@
     </p:spTree>
     <p:extLst>
       <p:ext uri="{BB962C8B-B14F-4D97-AF65-F5344CB8AC3E}">
-        <ns5:creationId val="1104161487"/>
+        <p14:creationId xmlns:p14="http://schemas.microsoft.com/office/powerpoint/2010/main" val="1104161487"/>
       </p:ext>
     </p:extLst>
   </p:cSld>
   <p:clrMapOvr>
     <a:masterClrMapping/>
   </p:clrMapOvr>
-  <p:timing>
-    <p:tnLst>
-      <p:par>
-        <p:cTn id="1" dur="indefinite" restart="never" nodeType="tmRoot"/>
-      </p:par>
-    </p:tnLst>
-  </p:timing>
 </p:sld>
 </file>
 
 <file path=ppt/slides/slide10.xml><?xml version="1.0" encoding="utf-8"?>
-<p:sld xmlns:a="http://schemas.openxmlformats.org/drawingml/2006/main" xmlns:ns2="http://schemas.microsoft.com/office/drawing/2014/main" xmlns:ns3="http://schemas.microsoft.com/office/powerpoint/2010/main" xmlns:p="http://schemas.openxmlformats.org/presentationml/2006/main">
+<p:sld xmlns:a="http://schemas.openxmlformats.org/drawingml/2006/main" xmlns:r="http://schemas.openxmlformats.org/officeDocument/2006/relationships" xmlns:p="http://schemas.openxmlformats.org/presentationml/2006/main">
   <p:cSld>
     <p:spTree>
       <p:nvGrpSpPr>
@@ -6205,7 +6208,7 @@
           <p:cNvPr id="2" name="Title 1">
             <a:extLst>
               <a:ext uri="{FF2B5EF4-FFF2-40B4-BE49-F238E27FC236}">
-                <ns2:creationId id="{3099F909-7251-44F3-8FBF-B16821282A00}"/>
+                <a16:creationId xmlns:a16="http://schemas.microsoft.com/office/drawing/2014/main" id="{3099F909-7251-44F3-8FBF-B16821282A00}"/>
               </a:ext>
             </a:extLst>
           </p:cNvPr>
@@ -6239,7 +6242,7 @@
           <p:cNvPr id="3" name="Content Placeholder 2">
             <a:extLst>
               <a:ext uri="{FF2B5EF4-FFF2-40B4-BE49-F238E27FC236}">
-                <ns2:creationId id="{C0C6D3E3-C72A-4A8F-BC4C-E2EA6E1F7A35}"/>
+                <a16:creationId xmlns:a16="http://schemas.microsoft.com/office/drawing/2014/main" id="{C0C6D3E3-C72A-4A8F-BC4C-E2EA6E1F7A35}"/>
               </a:ext>
             </a:extLst>
           </p:cNvPr>
@@ -6268,7 +6271,35 @@
               </a:spcAft>
               <a:defRPr sz="1400" b="0"/>
             </a:pPr>
-            <a:r>
+            <a:endParaRPr lang="en-US" dirty="0"/>
+          </a:p>
+          <a:p>
+            <a:pPr>
+              <a:spcAft>
+                <a:spcPts val="500"/>
+              </a:spcAft>
+              <a:defRPr sz="1400" b="0"/>
+            </a:pPr>
+            <a:endParaRPr lang="en-US" dirty="0"/>
+          </a:p>
+          <a:p>
+            <a:pPr>
+              <a:spcAft>
+                <a:spcPts val="500"/>
+              </a:spcAft>
+              <a:defRPr sz="1400" b="0"/>
+            </a:pPr>
+            <a:endParaRPr lang="en-US" dirty="0"/>
+          </a:p>
+          <a:p>
+            <a:pPr>
+              <a:spcAft>
+                <a:spcPts val="500"/>
+              </a:spcAft>
+              <a:defRPr sz="1400" b="0"/>
+            </a:pPr>
+            <a:r>
+              <a:rPr dirty="0"/>
               <a:t>Manual Paper Registers: Standard MOH paper books; prone to errors, damage, and search delays.</a:t>
             </a:r>
           </a:p>
@@ -6280,6 +6311,7 @@
               <a:defRPr sz="1400" b="0"/>
             </a:pPr>
             <a:r>
+              <a:rPr dirty="0"/>
               <a:t>OpenMRS Community: Powerful open-source EMR, but complex and resource-intensive for small labs.</a:t>
             </a:r>
           </a:p>
@@ -6291,6 +6323,7 @@
               <a:defRPr sz="1400" b="0"/>
             </a:pPr>
             <a:r>
+              <a:rPr dirty="0"/>
               <a:t>KenyaEMR: National standard for HIV/TB care; lacks full laboratory bench accessioning tools.</a:t>
             </a:r>
           </a:p>
@@ -6302,6 +6335,7 @@
               <a:defRPr sz="1400" b="0"/>
             </a:pPr>
             <a:r>
+              <a:rPr dirty="0"/>
               <a:t>Commercial Proprietary LIMS: High functionality; prohibitive recurring annual license fees.</a:t>
             </a:r>
           </a:p>
@@ -6313,6 +6347,7 @@
               <a:defRPr sz="1400" b="0"/>
             </a:pPr>
             <a:r>
+              <a:rPr dirty="0"/>
               <a:t>Cloud-Only Solutions: Scalable, but vulnerable to frequent rural internet disruptions in Gem Sub-County.</a:t>
             </a:r>
           </a:p>
@@ -6324,6 +6359,7 @@
               <a:defRPr sz="1400" b="1"/>
             </a:pPr>
             <a:r>
+              <a:rPr dirty="0"/>
               <a:t>Proposed Solution: Lightweight, locally hosted web intranet LIMS tailored for Level 4 facilities.</a:t>
             </a:r>
           </a:p>
@@ -6332,25 +6368,18 @@
     </p:spTree>
     <p:extLst>
       <p:ext uri="{BB962C8B-B14F-4D97-AF65-F5344CB8AC3E}">
-        <ns3:creationId val="3029936044"/>
+        <p14:creationId xmlns:p14="http://schemas.microsoft.com/office/powerpoint/2010/main" val="3029936044"/>
       </p:ext>
     </p:extLst>
   </p:cSld>
   <p:clrMapOvr>
     <a:masterClrMapping/>
   </p:clrMapOvr>
-  <p:timing>
-    <p:tnLst>
-      <p:par>
-        <p:cTn id="1" dur="indefinite" restart="never" nodeType="tmRoot"/>
-      </p:par>
-    </p:tnLst>
-  </p:timing>
 </p:sld>
 </file>
 
 <file path=ppt/slides/slide11.xml><?xml version="1.0" encoding="utf-8"?>
-<p:sld xmlns:a="http://schemas.openxmlformats.org/drawingml/2006/main" xmlns:ns2="http://schemas.microsoft.com/office/powerpoint/2010/main" xmlns:p="http://schemas.openxmlformats.org/presentationml/2006/main">
+<p:sld xmlns:a="http://schemas.openxmlformats.org/drawingml/2006/main" xmlns:r="http://schemas.openxmlformats.org/officeDocument/2006/relationships" xmlns:p="http://schemas.openxmlformats.org/presentationml/2006/main">
   <p:cSld>
     <p:spTree>
       <p:nvGrpSpPr>
@@ -6463,7 +6492,7 @@
     </p:spTree>
     <p:extLst>
       <p:ext uri="{BB962C8B-B14F-4D97-AF65-F5344CB8AC3E}">
-        <ns2:creationId val="1292349025"/>
+        <p14:creationId xmlns:p14="http://schemas.microsoft.com/office/powerpoint/2010/main" val="1292349025"/>
       </p:ext>
     </p:extLst>
   </p:cSld>
@@ -6474,7 +6503,7 @@
 </file>
 
 <file path=ppt/slides/slide12.xml><?xml version="1.0" encoding="utf-8"?>
-<p:sld xmlns:a="http://schemas.openxmlformats.org/drawingml/2006/main" xmlns:ns2="http://schemas.microsoft.com/office/drawing/2014/main" xmlns:ns3="http://schemas.microsoft.com/office/powerpoint/2010/main" xmlns:p="http://schemas.openxmlformats.org/presentationml/2006/main">
+<p:sld xmlns:a="http://schemas.openxmlformats.org/drawingml/2006/main" xmlns:r="http://schemas.openxmlformats.org/officeDocument/2006/relationships" xmlns:p="http://schemas.openxmlformats.org/presentationml/2006/main">
   <p:cSld>
     <p:spTree>
       <p:nvGrpSpPr>
@@ -6495,7 +6524,7 @@
           <p:cNvPr id="2" name="Title 1">
             <a:extLst>
               <a:ext uri="{FF2B5EF4-FFF2-40B4-BE49-F238E27FC236}">
-                <ns2:creationId id="{A575E463-7D82-46C7-8909-B4EFDBF6D194}"/>
+                <a16:creationId xmlns:a16="http://schemas.microsoft.com/office/drawing/2014/main" id="{A575E463-7D82-46C7-8909-B4EFDBF6D194}"/>
               </a:ext>
             </a:extLst>
           </p:cNvPr>
@@ -6529,7 +6558,7 @@
           <p:cNvPr id="3" name="Content Placeholder 2">
             <a:extLst>
               <a:ext uri="{FF2B5EF4-FFF2-40B4-BE49-F238E27FC236}">
-                <ns2:creationId id="{87D5949E-EE0A-4A19-B2EB-B3F2C66D6865}"/>
+                <a16:creationId xmlns:a16="http://schemas.microsoft.com/office/drawing/2014/main" id="{87D5949E-EE0A-4A19-B2EB-B3F2C66D6865}"/>
               </a:ext>
             </a:extLst>
           </p:cNvPr>
@@ -6558,7 +6587,44 @@
               </a:spcAft>
               <a:defRPr sz="1400" b="0"/>
             </a:pPr>
-            <a:r>
+            <a:endParaRPr lang="en-US" dirty="0"/>
+          </a:p>
+          <a:p>
+            <a:pPr marL="285750" indent="-285750">
+              <a:spcAft>
+                <a:spcPts val="500"/>
+              </a:spcAft>
+              <a:defRPr sz="1400" b="0"/>
+            </a:pPr>
+            <a:endParaRPr lang="en-US" dirty="0"/>
+          </a:p>
+          <a:p>
+            <a:pPr marL="285750" indent="-285750">
+              <a:spcAft>
+                <a:spcPts val="500"/>
+              </a:spcAft>
+              <a:defRPr sz="1400" b="0"/>
+            </a:pPr>
+            <a:endParaRPr lang="en-US" dirty="0"/>
+          </a:p>
+          <a:p>
+            <a:pPr marL="285750" indent="-285750">
+              <a:spcAft>
+                <a:spcPts val="500"/>
+              </a:spcAft>
+              <a:defRPr sz="1400" b="0"/>
+            </a:pPr>
+            <a:endParaRPr lang="en-US" dirty="0"/>
+          </a:p>
+          <a:p>
+            <a:pPr marL="285750" indent="-285750">
+              <a:spcAft>
+                <a:spcPts val="500"/>
+              </a:spcAft>
+              <a:defRPr sz="1400" b="0"/>
+            </a:pPr>
+            <a:r>
+              <a:rPr dirty="0"/>
               <a:t>Development Model: Agile Software Development Life Cycle (iterative 2-week sprint cycles).</a:t>
             </a:r>
           </a:p>
@@ -6570,6 +6636,7 @@
               <a:defRPr sz="1400" b="0"/>
             </a:pPr>
             <a:r>
+              <a:rPr dirty="0"/>
               <a:t>Requirements Gathering: Staff interviews, direct bench observation, and review of MOH 204/706 registers.</a:t>
             </a:r>
           </a:p>
@@ -6581,6 +6648,7 @@
               <a:defRPr sz="1400" b="0"/>
             </a:pPr>
             <a:r>
+              <a:rPr dirty="0"/>
               <a:t>System Modeling: UML diagrams (Use Case, Activity, Class) and Data Flow Diagrams (Context, Level 1).</a:t>
             </a:r>
           </a:p>
@@ -6592,6 +6660,7 @@
               <a:defRPr sz="1400" b="0"/>
             </a:pPr>
             <a:r>
+              <a:rPr dirty="0"/>
               <a:t>Technology Stack: PHP 8.2 backend, MySQL 8.0 database, Apache/XAMPP web server, Bootstrap 5.</a:t>
             </a:r>
           </a:p>
@@ -6603,6 +6672,7 @@
               <a:defRPr sz="1400" b="0"/>
             </a:pPr>
             <a:r>
+              <a:rPr dirty="0"/>
               <a:t>Engineering Tools: Visual Studio Code, Git/GitHub version control, FPDF reporting library.</a:t>
             </a:r>
           </a:p>
@@ -6614,6 +6684,7 @@
               <a:defRPr sz="1400" b="0"/>
             </a:pPr>
             <a:r>
+              <a:rPr dirty="0"/>
               <a:t>Quality Assurance: Unit testing, role-boundary integration testing, and User Acceptance Testing (UAT).</a:t>
             </a:r>
           </a:p>
@@ -6622,25 +6693,18 @@
     </p:spTree>
     <p:extLst>
       <p:ext uri="{BB962C8B-B14F-4D97-AF65-F5344CB8AC3E}">
-        <ns3:creationId val="909837642"/>
+        <p14:creationId xmlns:p14="http://schemas.microsoft.com/office/powerpoint/2010/main" val="909837642"/>
       </p:ext>
     </p:extLst>
   </p:cSld>
   <p:clrMapOvr>
     <a:masterClrMapping/>
   </p:clrMapOvr>
-  <p:timing>
-    <p:tnLst>
-      <p:par>
-        <p:cTn id="1" dur="indefinite" restart="never" nodeType="tmRoot"/>
-      </p:par>
-    </p:tnLst>
-  </p:timing>
 </p:sld>
 </file>
 
 <file path=ppt/slides/slide13.xml><?xml version="1.0" encoding="utf-8"?>
-<p:sld xmlns:a="http://schemas.openxmlformats.org/drawingml/2006/main" xmlns:ns2="http://schemas.microsoft.com/office/drawing/2014/main" xmlns:ns3="http://schemas.microsoft.com/office/powerpoint/2010/main" xmlns:p="http://schemas.openxmlformats.org/presentationml/2006/main">
+<p:sld xmlns:a="http://schemas.openxmlformats.org/drawingml/2006/main" xmlns:r="http://schemas.openxmlformats.org/officeDocument/2006/relationships" xmlns:p="http://schemas.openxmlformats.org/presentationml/2006/main">
   <p:cSld>
     <p:spTree>
       <p:nvGrpSpPr>
@@ -6661,7 +6725,7 @@
           <p:cNvPr id="2" name="Title 1">
             <a:extLst>
               <a:ext uri="{FF2B5EF4-FFF2-40B4-BE49-F238E27FC236}">
-                <ns2:creationId id="{A575E463-7D82-46C7-8909-B4EFDBF6D194}"/>
+                <a16:creationId xmlns:a16="http://schemas.microsoft.com/office/drawing/2014/main" id="{A575E463-7D82-46C7-8909-B4EFDBF6D194}"/>
               </a:ext>
             </a:extLst>
           </p:cNvPr>
@@ -6680,11 +6744,15 @@
         </p:spPr>
         <p:txBody>
           <a:bodyPr>
-            <a:normAutofit/>
+            <a:normAutofit fontScale="90000"/>
           </a:bodyPr>
           <a:lstStyle/>
           <a:p>
-            <a:r>
+            <a:br>
+              <a:rPr lang="en-US" dirty="0"/>
+            </a:br>
+            <a:r>
+              <a:rPr dirty="0"/>
               <a:t>SYSTEM ANALYSIS &amp; FEASIBILITY STUDY</a:t>
             </a:r>
           </a:p>
@@ -6695,7 +6763,7 @@
           <p:cNvPr id="3" name="Content Placeholder 2">
             <a:extLst>
               <a:ext uri="{FF2B5EF4-FFF2-40B4-BE49-F238E27FC236}">
-                <ns2:creationId id="{87D5949E-EE0A-4A19-B2EB-B3F2C66D6865}"/>
+                <a16:creationId xmlns:a16="http://schemas.microsoft.com/office/drawing/2014/main" id="{87D5949E-EE0A-4A19-B2EB-B3F2C66D6865}"/>
               </a:ext>
             </a:extLst>
           </p:cNvPr>
@@ -6724,7 +6792,35 @@
               </a:spcAft>
               <a:defRPr sz="1400" b="0"/>
             </a:pPr>
-            <a:r>
+            <a:endParaRPr lang="en-US" dirty="0"/>
+          </a:p>
+          <a:p>
+            <a:pPr>
+              <a:spcAft>
+                <a:spcPts val="500"/>
+              </a:spcAft>
+              <a:defRPr sz="1400" b="0"/>
+            </a:pPr>
+            <a:endParaRPr lang="en-US" dirty="0"/>
+          </a:p>
+          <a:p>
+            <a:pPr>
+              <a:spcAft>
+                <a:spcPts val="500"/>
+              </a:spcAft>
+              <a:defRPr sz="1400" b="0"/>
+            </a:pPr>
+            <a:endParaRPr lang="en-US" dirty="0"/>
+          </a:p>
+          <a:p>
+            <a:pPr>
+              <a:spcAft>
+                <a:spcPts val="500"/>
+              </a:spcAft>
+              <a:defRPr sz="1400" b="0"/>
+            </a:pPr>
+            <a:r>
+              <a:rPr dirty="0"/>
               <a:t>Technical Feasibility: Verified stack runs seamlessly on hospital workstation PCs over LAN.</a:t>
             </a:r>
           </a:p>
@@ -6736,6 +6832,7 @@
               <a:defRPr sz="1400" b="0"/>
             </a:pPr>
             <a:r>
+              <a:rPr dirty="0"/>
               <a:t>Operational Feasibility: UI mirrors physical MOH registers; staff achieved rapid proficiency.</a:t>
             </a:r>
           </a:p>
@@ -6747,6 +6844,7 @@
               <a:defRPr sz="1400" b="0"/>
             </a:pPr>
             <a:r>
+              <a:rPr dirty="0"/>
               <a:t>Economic Feasibility: High return through eliminated stationery and recovered un-billed tests.</a:t>
             </a:r>
           </a:p>
@@ -6758,6 +6856,7 @@
               <a:defRPr sz="1400" b="1"/>
             </a:pPr>
             <a:r>
+              <a:rPr dirty="0"/>
               <a:t>User Role Profiles Implemented:</a:t>
             </a:r>
           </a:p>
@@ -6769,6 +6868,7 @@
               <a:defRPr sz="1300" b="0"/>
             </a:pPr>
             <a:r>
+              <a:rPr dirty="0"/>
               <a:t>• Receptionist: Patient triage, OPD registration, and eCitizen billing routing.</a:t>
             </a:r>
           </a:p>
@@ -6780,6 +6880,7 @@
               <a:defRPr sz="1300" b="0"/>
             </a:pPr>
             <a:r>
+              <a:rPr dirty="0"/>
               <a:t>• Doctor: Diagnostic requisitions, longitudinal history, and panic value review.</a:t>
             </a:r>
           </a:p>
@@ -6791,6 +6892,7 @@
               <a:defRPr sz="1300" b="0"/>
             </a:pPr>
             <a:r>
+              <a:rPr dirty="0"/>
               <a:t>• Lab Technologist: Sample accessioning, bench testing, QA logs, and blood bank safety.</a:t>
             </a:r>
           </a:p>
@@ -6802,6 +6904,7 @@
               <a:defRPr sz="1300" b="0"/>
             </a:pPr>
             <a:r>
+              <a:rPr dirty="0"/>
               <a:t>• Administrator: User accounts, test catalogue pricing, audit trails, and SQL backups.</a:t>
             </a:r>
           </a:p>
@@ -6810,25 +6913,18 @@
     </p:spTree>
     <p:extLst>
       <p:ext uri="{BB962C8B-B14F-4D97-AF65-F5344CB8AC3E}">
-        <ns3:creationId val="667655522"/>
+        <p14:creationId xmlns:p14="http://schemas.microsoft.com/office/powerpoint/2010/main" val="667655522"/>
       </p:ext>
     </p:extLst>
   </p:cSld>
   <p:clrMapOvr>
     <a:masterClrMapping/>
   </p:clrMapOvr>
-  <p:timing>
-    <p:tnLst>
-      <p:par>
-        <p:cTn id="1" dur="indefinite" restart="never" nodeType="tmRoot"/>
-      </p:par>
-    </p:tnLst>
-  </p:timing>
 </p:sld>
 </file>
 
 <file path=ppt/slides/slide14.xml><?xml version="1.0" encoding="utf-8"?>
-<p:sld xmlns:a="http://schemas.openxmlformats.org/drawingml/2006/main" xmlns:ns2="http://schemas.microsoft.com/office/drawing/2014/main" xmlns:ns3="http://schemas.microsoft.com/office/powerpoint/2010/main" xmlns:p="http://schemas.openxmlformats.org/presentationml/2006/main">
+<p:sld xmlns:a="http://schemas.openxmlformats.org/drawingml/2006/main" xmlns:r="http://schemas.openxmlformats.org/officeDocument/2006/relationships" xmlns:p="http://schemas.openxmlformats.org/presentationml/2006/main">
   <p:cSld>
     <p:spTree>
       <p:nvGrpSpPr>
@@ -6849,7 +6945,7 @@
           <p:cNvPr id="2" name="Title 1">
             <a:extLst>
               <a:ext uri="{FF2B5EF4-FFF2-40B4-BE49-F238E27FC236}">
-                <ns2:creationId id="{A575E463-7D82-46C7-8909-B4EFDBF6D194}"/>
+                <a16:creationId xmlns:a16="http://schemas.microsoft.com/office/drawing/2014/main" id="{A575E463-7D82-46C7-8909-B4EFDBF6D194}"/>
               </a:ext>
             </a:extLst>
           </p:cNvPr>
@@ -6883,7 +6979,7 @@
           <p:cNvPr id="3" name="Content Placeholder 2">
             <a:extLst>
               <a:ext uri="{FF2B5EF4-FFF2-40B4-BE49-F238E27FC236}">
-                <ns2:creationId id="{87D5949E-EE0A-4A19-B2EB-B3F2C66D6865}"/>
+                <a16:creationId xmlns:a16="http://schemas.microsoft.com/office/drawing/2014/main" id="{87D5949E-EE0A-4A19-B2EB-B3F2C66D6865}"/>
               </a:ext>
             </a:extLst>
           </p:cNvPr>
@@ -6912,7 +7008,35 @@
               </a:spcAft>
               <a:defRPr sz="1400" b="1"/>
             </a:pPr>
-            <a:r>
+            <a:endParaRPr lang="en-US" dirty="0"/>
+          </a:p>
+          <a:p>
+            <a:pPr>
+              <a:spcAft>
+                <a:spcPts val="400"/>
+              </a:spcAft>
+              <a:defRPr sz="1400" b="1"/>
+            </a:pPr>
+            <a:endParaRPr lang="en-US" dirty="0"/>
+          </a:p>
+          <a:p>
+            <a:pPr>
+              <a:spcAft>
+                <a:spcPts val="400"/>
+              </a:spcAft>
+              <a:defRPr sz="1400" b="1"/>
+            </a:pPr>
+            <a:endParaRPr lang="en-US" dirty="0"/>
+          </a:p>
+          <a:p>
+            <a:pPr>
+              <a:spcAft>
+                <a:spcPts val="400"/>
+              </a:spcAft>
+              <a:defRPr sz="1400" b="1"/>
+            </a:pPr>
+            <a:r>
+              <a:rPr dirty="0"/>
               <a:t>Functional Requirements Implemented:</a:t>
             </a:r>
           </a:p>
@@ -6924,6 +7048,7 @@
               <a:defRPr sz="1300" b="0"/>
             </a:pPr>
             <a:r>
+              <a:rPr dirty="0"/>
               <a:t>• Patient Registration: Unique OPD numbering and A5 routing slips with Code128 barcodes.</a:t>
             </a:r>
           </a:p>
@@ -6935,6 +7060,7 @@
               <a:defRPr sz="1300" b="0"/>
             </a:pPr>
             <a:r>
+              <a:rPr dirty="0"/>
               <a:t>• CPOE Ordering: Categorized test catalogue with urgency flags and clinical allergy alerts.</a:t>
             </a:r>
           </a:p>
@@ -6946,6 +7072,7 @@
               <a:defRPr sz="1300" b="0"/>
             </a:pPr>
             <a:r>
+              <a:rPr dirty="0"/>
               <a:t>• Results Workbench: Normal reference ranges, automated panic alerting, and certified PDF printing.</a:t>
             </a:r>
           </a:p>
@@ -6957,7 +7084,16 @@
               <a:defRPr sz="1300" b="0"/>
             </a:pPr>
             <a:r>
-              <a:t>• Cashless Billing: Real-time settlement via Government eCitizen Paybill 222222 gateway.</a:t>
+              <a:rPr dirty="0"/>
+              <a:t>• Cashless Billing: Real-time settlement via Government eCitizen </a:t>
+            </a:r>
+            <a:r>
+              <a:rPr dirty="0" err="1"/>
+              <a:t>Paybill</a:t>
+            </a:r>
+            <a:r>
+              <a:rPr dirty="0"/>
+              <a:t> 222222 gateway.</a:t>
             </a:r>
           </a:p>
           <a:p>
@@ -6968,6 +7104,7 @@
               <a:defRPr sz="1400" b="1"/>
             </a:pPr>
             <a:r>
+              <a:rPr dirty="0"/>
               <a:t>Non-Functional Requirements Enforced:</a:t>
             </a:r>
           </a:p>
@@ -6979,7 +7116,16 @@
               <a:defRPr sz="1300" b="0"/>
             </a:pPr>
             <a:r>
-              <a:t>• Security: Role-Based Access Control, Bcrypt password hashing, and CSRF token defense.</a:t>
+              <a:rPr dirty="0"/>
+              <a:t>• Security: Role-Based Access Control, </a:t>
+            </a:r>
+            <a:r>
+              <a:rPr dirty="0" err="1"/>
+              <a:t>Bcrypt</a:t>
+            </a:r>
+            <a:r>
+              <a:rPr dirty="0"/>
+              <a:t> password hashing, and CSRF token defense.</a:t>
             </a:r>
           </a:p>
           <a:p>
@@ -6990,6 +7136,7 @@
               <a:defRPr sz="1300" b="0"/>
             </a:pPr>
             <a:r>
+              <a:rPr dirty="0"/>
               <a:t>• Speed &amp; Performance: Sub-second page load times (&lt;1.5s) over the hospital Local Area Network.</a:t>
             </a:r>
           </a:p>
@@ -7001,6 +7148,7 @@
               <a:defRPr sz="1300" b="0"/>
             </a:pPr>
             <a:r>
+              <a:rPr dirty="0"/>
               <a:t>• Reliability: Automated daily database SQL backup scripts with manual admin trigger.</a:t>
             </a:r>
           </a:p>
@@ -7009,25 +7157,18 @@
     </p:spTree>
     <p:extLst>
       <p:ext uri="{BB962C8B-B14F-4D97-AF65-F5344CB8AC3E}">
-        <ns3:creationId val="1898825149"/>
+        <p14:creationId xmlns:p14="http://schemas.microsoft.com/office/powerpoint/2010/main" val="1898825149"/>
       </p:ext>
     </p:extLst>
   </p:cSld>
   <p:clrMapOvr>
     <a:masterClrMapping/>
   </p:clrMapOvr>
-  <p:timing>
-    <p:tnLst>
-      <p:par>
-        <p:cTn id="1" dur="indefinite" restart="never" nodeType="tmRoot"/>
-      </p:par>
-    </p:tnLst>
-  </p:timing>
 </p:sld>
 </file>
 
 <file path=ppt/slides/slide15.xml><?xml version="1.0" encoding="utf-8"?>
-<p:sld xmlns:a="http://schemas.openxmlformats.org/drawingml/2006/main" xmlns:ns2="http://schemas.microsoft.com/office/powerpoint/2010/main" xmlns:p="http://schemas.openxmlformats.org/presentationml/2006/main">
+<p:sld xmlns:a="http://schemas.openxmlformats.org/drawingml/2006/main" xmlns:r="http://schemas.openxmlformats.org/officeDocument/2006/relationships" xmlns:p="http://schemas.openxmlformats.org/presentationml/2006/main">
   <p:cSld>
     <p:spTree>
       <p:nvGrpSpPr>
@@ -7162,7 +7303,7 @@
     </p:spTree>
     <p:extLst>
       <p:ext uri="{BB962C8B-B14F-4D97-AF65-F5344CB8AC3E}">
-        <ns2:creationId val="1941546654"/>
+        <p14:creationId xmlns:p14="http://schemas.microsoft.com/office/powerpoint/2010/main" val="1941546654"/>
       </p:ext>
     </p:extLst>
   </p:cSld>
@@ -7173,7 +7314,7 @@
 </file>
 
 <file path=ppt/slides/slide16.xml><?xml version="1.0" encoding="utf-8"?>
-<p:sld xmlns:a="http://schemas.openxmlformats.org/drawingml/2006/main" xmlns:ns2="http://schemas.microsoft.com/office/powerpoint/2010/main" xmlns:p="http://schemas.openxmlformats.org/presentationml/2006/main">
+<p:sld xmlns:a="http://schemas.openxmlformats.org/drawingml/2006/main" xmlns:r="http://schemas.openxmlformats.org/officeDocument/2006/relationships" xmlns:p="http://schemas.openxmlformats.org/presentationml/2006/main">
   <p:cSld>
     <p:spTree>
       <p:nvGrpSpPr>
@@ -7308,7 +7449,7 @@
     </p:spTree>
     <p:extLst>
       <p:ext uri="{BB962C8B-B14F-4D97-AF65-F5344CB8AC3E}">
-        <ns2:creationId val="603855472"/>
+        <p14:creationId xmlns:p14="http://schemas.microsoft.com/office/powerpoint/2010/main" val="603855472"/>
       </p:ext>
     </p:extLst>
   </p:cSld>
@@ -7319,7 +7460,7 @@
 </file>
 
 <file path=ppt/slides/slide17.xml><?xml version="1.0" encoding="utf-8"?>
-<p:sld xmlns:a="http://schemas.openxmlformats.org/drawingml/2006/main" xmlns:ns2="http://schemas.microsoft.com/office/powerpoint/2010/main" xmlns:p="http://schemas.openxmlformats.org/presentationml/2006/main">
+<p:sld xmlns:a="http://schemas.openxmlformats.org/drawingml/2006/main" xmlns:r="http://schemas.openxmlformats.org/officeDocument/2006/relationships" xmlns:p="http://schemas.openxmlformats.org/presentationml/2006/main">
   <p:cSld>
     <p:spTree>
       <p:nvGrpSpPr>
@@ -7454,7 +7595,7 @@
     </p:spTree>
     <p:extLst>
       <p:ext uri="{BB962C8B-B14F-4D97-AF65-F5344CB8AC3E}">
-        <ns2:creationId val="1851290588"/>
+        <p14:creationId xmlns:p14="http://schemas.microsoft.com/office/powerpoint/2010/main" val="1851290588"/>
       </p:ext>
     </p:extLst>
   </p:cSld>
@@ -7465,7 +7606,7 @@
 </file>
 
 <file path=ppt/slides/slide18.xml><?xml version="1.0" encoding="utf-8"?>
-<p:sld xmlns:a="http://schemas.openxmlformats.org/drawingml/2006/main" xmlns:ns2="http://schemas.microsoft.com/office/powerpoint/2010/main" xmlns:p="http://schemas.openxmlformats.org/presentationml/2006/main">
+<p:sld xmlns:a="http://schemas.openxmlformats.org/drawingml/2006/main" xmlns:r="http://schemas.openxmlformats.org/officeDocument/2006/relationships" xmlns:p="http://schemas.openxmlformats.org/presentationml/2006/main">
   <p:cSld>
     <p:spTree>
       <p:nvGrpSpPr>
@@ -7589,7 +7730,7 @@
     </p:spTree>
     <p:extLst>
       <p:ext uri="{BB962C8B-B14F-4D97-AF65-F5344CB8AC3E}">
-        <ns2:creationId val="1910023071"/>
+        <p14:creationId xmlns:p14="http://schemas.microsoft.com/office/powerpoint/2010/main" val="1910023071"/>
       </p:ext>
     </p:extLst>
   </p:cSld>
@@ -7600,7 +7741,7 @@
 </file>
 
 <file path=ppt/slides/slide19.xml><?xml version="1.0" encoding="utf-8"?>
-<p:sld xmlns:a="http://schemas.openxmlformats.org/drawingml/2006/main" xmlns:ns2="http://schemas.microsoft.com/office/powerpoint/2010/main" xmlns:p="http://schemas.openxmlformats.org/presentationml/2006/main">
+<p:sld xmlns:a="http://schemas.openxmlformats.org/drawingml/2006/main" xmlns:r="http://schemas.openxmlformats.org/officeDocument/2006/relationships" xmlns:p="http://schemas.openxmlformats.org/presentationml/2006/main">
   <p:cSld>
     <p:spTree>
       <p:nvGrpSpPr>
@@ -7718,7 +7859,7 @@
     </p:spTree>
     <p:extLst>
       <p:ext uri="{BB962C8B-B14F-4D97-AF65-F5344CB8AC3E}">
-        <ns2:creationId val="65520510"/>
+        <p14:creationId xmlns:p14="http://schemas.microsoft.com/office/powerpoint/2010/main" val="65520510"/>
       </p:ext>
     </p:extLst>
   </p:cSld>
@@ -7729,7 +7870,7 @@
 </file>
 
 <file path=ppt/slides/slide2.xml><?xml version="1.0" encoding="utf-8"?>
-<p:sld xmlns:a="http://schemas.openxmlformats.org/drawingml/2006/main" xmlns:ns2="http://schemas.microsoft.com/office/drawing/2014/main" xmlns:ns3="http://schemas.microsoft.com/office/powerpoint/2010/main" xmlns:p="http://schemas.openxmlformats.org/presentationml/2006/main">
+<p:sld xmlns:a="http://schemas.openxmlformats.org/drawingml/2006/main" xmlns:r="http://schemas.openxmlformats.org/officeDocument/2006/relationships" xmlns:p="http://schemas.openxmlformats.org/presentationml/2006/main">
   <p:cSld>
     <p:spTree>
       <p:nvGrpSpPr>
@@ -7750,7 +7891,7 @@
           <p:cNvPr id="2" name="Title 1">
             <a:extLst>
               <a:ext uri="{FF2B5EF4-FFF2-40B4-BE49-F238E27FC236}">
-                <ns2:creationId id="{E19F8865-281E-42C3-B6A1-8FFA00D83E8A}"/>
+                <a16:creationId xmlns:a16="http://schemas.microsoft.com/office/drawing/2014/main" id="{E19F8865-281E-42C3-B6A1-8FFA00D83E8A}"/>
               </a:ext>
             </a:extLst>
           </p:cNvPr>
@@ -7784,7 +7925,7 @@
           <p:cNvPr id="3" name="Content Placeholder 2">
             <a:extLst>
               <a:ext uri="{FF2B5EF4-FFF2-40B4-BE49-F238E27FC236}">
-                <ns2:creationId id="{07C4135C-E7A0-490F-9315-C4891FAE1848}"/>
+                <a16:creationId xmlns:a16="http://schemas.microsoft.com/office/drawing/2014/main" id="{07C4135C-E7A0-490F-9315-C4891FAE1848}"/>
               </a:ext>
             </a:extLst>
           </p:cNvPr>
@@ -7813,7 +7954,26 @@
               </a:spcAft>
               <a:defRPr sz="1400" b="0"/>
             </a:pPr>
-            <a:r>
+            <a:endParaRPr lang="en-US" dirty="0"/>
+          </a:p>
+          <a:p>
+            <a:pPr marL="285750" indent="-285750">
+              <a:spcAft>
+                <a:spcPts val="500"/>
+              </a:spcAft>
+              <a:defRPr sz="1400" b="0"/>
+            </a:pPr>
+            <a:endParaRPr lang="en-US" dirty="0"/>
+          </a:p>
+          <a:p>
+            <a:pPr marL="285750" indent="-285750">
+              <a:spcAft>
+                <a:spcPts val="500"/>
+              </a:spcAft>
+              <a:defRPr sz="1400" b="0"/>
+            </a:pPr>
+            <a:r>
+              <a:rPr dirty="0"/>
               <a:t>Digital Health Transition: Modernizing public healthcare delivery in line with Kenya eHealth Policy.</a:t>
             </a:r>
           </a:p>
@@ -7825,6 +7985,7 @@
               <a:defRPr sz="1400" b="0"/>
             </a:pPr>
             <a:r>
+              <a:rPr dirty="0"/>
               <a:t>Facility Profile: Yala Sub-County Hospital — Level 4 primary referral center in Siaya County.</a:t>
             </a:r>
           </a:p>
@@ -7836,6 +7997,7 @@
               <a:defRPr sz="1400" b="0"/>
             </a:pPr>
             <a:r>
+              <a:rPr dirty="0"/>
               <a:t>Clinical Dependency: Over 70% of medical diagnoses depend directly on reliable laboratory tests.</a:t>
             </a:r>
           </a:p>
@@ -7847,6 +8009,7 @@
               <a:defRPr sz="1400" b="0"/>
             </a:pPr>
             <a:r>
+              <a:rPr dirty="0"/>
               <a:t>Pre-System Reality: Manual paper registers caused prolonged turnaround times, sample loss, and billing leaks.</a:t>
             </a:r>
           </a:p>
@@ -7858,6 +8021,7 @@
               <a:defRPr sz="1400" b="0"/>
             </a:pPr>
             <a:r>
+              <a:rPr dirty="0"/>
               <a:t>Delivered Solution: A localized, web-based LIMS operating securely on the hospital intranet.</a:t>
             </a:r>
           </a:p>
@@ -7869,6 +8033,7 @@
               <a:defRPr sz="1400" b="0"/>
             </a:pPr>
             <a:r>
+              <a:rPr dirty="0"/>
               <a:t>Operational Impact: Automated diagnostic flow from patient triage to certified PDF test results.</a:t>
             </a:r>
           </a:p>
@@ -7877,25 +8042,18 @@
     </p:spTree>
     <p:extLst>
       <p:ext uri="{BB962C8B-B14F-4D97-AF65-F5344CB8AC3E}">
-        <ns3:creationId val="187293399"/>
+        <p14:creationId xmlns:p14="http://schemas.microsoft.com/office/powerpoint/2010/main" val="187293399"/>
       </p:ext>
     </p:extLst>
   </p:cSld>
   <p:clrMapOvr>
     <a:masterClrMapping/>
   </p:clrMapOvr>
-  <p:timing>
-    <p:tnLst>
-      <p:par>
-        <p:cTn id="1" dur="indefinite" restart="never" nodeType="tmRoot"/>
-      </p:par>
-    </p:tnLst>
-  </p:timing>
 </p:sld>
 </file>
 
 <file path=ppt/slides/slide20.xml><?xml version="1.0" encoding="utf-8"?>
-<p:sld xmlns:a="http://schemas.openxmlformats.org/drawingml/2006/main" xmlns:ns2="http://schemas.microsoft.com/office/drawing/2014/main" xmlns:ns3="http://schemas.microsoft.com/office/powerpoint/2010/main" xmlns:p="http://schemas.openxmlformats.org/presentationml/2006/main">
+<p:sld xmlns:a="http://schemas.openxmlformats.org/drawingml/2006/main" xmlns:r="http://schemas.openxmlformats.org/officeDocument/2006/relationships" xmlns:p="http://schemas.openxmlformats.org/presentationml/2006/main">
   <p:cSld>
     <p:spTree>
       <p:nvGrpSpPr>
@@ -7916,7 +8074,7 @@
           <p:cNvPr id="2" name="Title 1">
             <a:extLst>
               <a:ext uri="{FF2B5EF4-FFF2-40B4-BE49-F238E27FC236}">
-                <ns2:creationId id="{A575E463-7D82-46C7-8909-B4EFDBF6D194}"/>
+                <a16:creationId xmlns:a16="http://schemas.microsoft.com/office/drawing/2014/main" id="{A575E463-7D82-46C7-8909-B4EFDBF6D194}"/>
               </a:ext>
             </a:extLst>
           </p:cNvPr>
@@ -8041,25 +8199,18 @@
     </p:spTree>
     <p:extLst>
       <p:ext uri="{BB962C8B-B14F-4D97-AF65-F5344CB8AC3E}">
-        <ns3:creationId val="3857995562"/>
+        <p14:creationId xmlns:p14="http://schemas.microsoft.com/office/powerpoint/2010/main" val="3857995562"/>
       </p:ext>
     </p:extLst>
   </p:cSld>
   <p:clrMapOvr>
     <a:masterClrMapping/>
   </p:clrMapOvr>
-  <p:timing>
-    <p:tnLst>
-      <p:par>
-        <p:cTn id="1" dur="indefinite" restart="never" nodeType="tmRoot"/>
-      </p:par>
-    </p:tnLst>
-  </p:timing>
 </p:sld>
 </file>
 
 <file path=ppt/slides/slide3.xml><?xml version="1.0" encoding="utf-8"?>
-<p:sld xmlns:a="http://schemas.openxmlformats.org/drawingml/2006/main" xmlns:ns2="http://schemas.microsoft.com/office/drawing/2014/main" xmlns:ns3="http://schemas.microsoft.com/office/powerpoint/2010/main" xmlns:p="http://schemas.openxmlformats.org/presentationml/2006/main">
+<p:sld xmlns:a="http://schemas.openxmlformats.org/drawingml/2006/main" xmlns:r="http://schemas.openxmlformats.org/officeDocument/2006/relationships" xmlns:p="http://schemas.openxmlformats.org/presentationml/2006/main">
   <p:cSld>
     <p:spTree>
       <p:nvGrpSpPr>
@@ -8080,7 +8231,7 @@
           <p:cNvPr id="2" name="Title 1">
             <a:extLst>
               <a:ext uri="{FF2B5EF4-FFF2-40B4-BE49-F238E27FC236}">
-                <ns2:creationId id="{70D18E5C-B5C2-4268-944B-5435C757912B}"/>
+                <a16:creationId xmlns:a16="http://schemas.microsoft.com/office/drawing/2014/main" id="{70D18E5C-B5C2-4268-944B-5435C757912B}"/>
               </a:ext>
             </a:extLst>
           </p:cNvPr>
@@ -8112,7 +8263,7 @@
           <p:cNvPr id="3" name="Content Placeholder 2">
             <a:extLst>
               <a:ext uri="{FF2B5EF4-FFF2-40B4-BE49-F238E27FC236}">
-                <ns2:creationId id="{361C6258-C8E6-4263-BF78-7DEB6B6A30BC}"/>
+                <a16:creationId xmlns:a16="http://schemas.microsoft.com/office/drawing/2014/main" id="{361C6258-C8E6-4263-BF78-7DEB6B6A30BC}"/>
               </a:ext>
             </a:extLst>
           </p:cNvPr>
@@ -8141,7 +8292,35 @@
               </a:spcAft>
               <a:defRPr sz="1400" b="0"/>
             </a:pPr>
-            <a:r>
+            <a:endParaRPr lang="en-US" dirty="0"/>
+          </a:p>
+          <a:p>
+            <a:pPr marL="285750" indent="-285750">
+              <a:spcAft>
+                <a:spcPts val="500"/>
+              </a:spcAft>
+              <a:defRPr sz="1400" b="0"/>
+            </a:pPr>
+            <a:endParaRPr lang="en-US" dirty="0"/>
+          </a:p>
+          <a:p>
+            <a:pPr marL="285750" indent="-285750">
+              <a:spcAft>
+                <a:spcPts val="500"/>
+              </a:spcAft>
+              <a:defRPr sz="1400" b="0"/>
+            </a:pPr>
+            <a:endParaRPr lang="en-US" dirty="0"/>
+          </a:p>
+          <a:p>
+            <a:pPr marL="285750" indent="-285750">
+              <a:spcAft>
+                <a:spcPts val="500"/>
+              </a:spcAft>
+              <a:defRPr sz="1400" b="0"/>
+            </a:pPr>
+            <a:r>
+              <a:rPr dirty="0"/>
               <a:t>Hospital Profile: Level 4 public facility in Gem Sub-County along the busy Kisumu–Busia highway.</a:t>
             </a:r>
           </a:p>
@@ -8153,6 +8332,7 @@
               <a:defRPr sz="1400" b="0"/>
             </a:pPr>
             <a:r>
+              <a:rPr dirty="0"/>
               <a:t>High Catchment Volume: Serves large outpatient numbers, maternal ANC clinics, and emergency admissions.</a:t>
             </a:r>
           </a:p>
@@ -8164,6 +8344,7 @@
               <a:defRPr sz="1400" b="0"/>
             </a:pPr>
             <a:r>
+              <a:rPr dirty="0"/>
               <a:t>Manual Workflow: Relied on physical paper MOH 204 books, carbon-copy slips, and manual registers.</a:t>
             </a:r>
           </a:p>
@@ -8175,6 +8356,7 @@
               <a:defRPr sz="1400" b="0"/>
             </a:pPr>
             <a:r>
+              <a:rPr dirty="0"/>
               <a:t>Information Fragmentation: Paper request slips were frequently misplaced in transit between wards and lab.</a:t>
             </a:r>
           </a:p>
@@ -8186,6 +8368,7 @@
               <a:defRPr sz="1400" b="0"/>
             </a:pPr>
             <a:r>
+              <a:rPr dirty="0"/>
               <a:t>Revenue Challenges: Manual cash handling at counters led to unreceipted fee leakages.</a:t>
             </a:r>
           </a:p>
@@ -8197,6 +8380,7 @@
               <a:defRPr sz="1400" b="0"/>
             </a:pPr>
             <a:r>
+              <a:rPr dirty="0"/>
               <a:t>Modernization Imperative: Transitioning to connected digital workflows for ordering, bench testing, and billing.</a:t>
             </a:r>
           </a:p>
@@ -8205,25 +8389,18 @@
     </p:spTree>
     <p:extLst>
       <p:ext uri="{BB962C8B-B14F-4D97-AF65-F5344CB8AC3E}">
-        <ns3:creationId val="3807269245"/>
+        <p14:creationId xmlns:p14="http://schemas.microsoft.com/office/powerpoint/2010/main" val="3807269245"/>
       </p:ext>
     </p:extLst>
   </p:cSld>
   <p:clrMapOvr>
     <a:masterClrMapping/>
   </p:clrMapOvr>
-  <p:timing>
-    <p:tnLst>
-      <p:par>
-        <p:cTn id="1" dur="indefinite" restart="never" nodeType="tmRoot"/>
-      </p:par>
-    </p:tnLst>
-  </p:timing>
 </p:sld>
 </file>
 
 <file path=ppt/slides/slide4.xml><?xml version="1.0" encoding="utf-8"?>
-<p:sld xmlns:a="http://schemas.openxmlformats.org/drawingml/2006/main" xmlns:ns2="http://schemas.microsoft.com/office/drawing/2014/main" xmlns:ns3="http://schemas.microsoft.com/office/powerpoint/2010/main" xmlns:p="http://schemas.openxmlformats.org/presentationml/2006/main">
+<p:sld xmlns:a="http://schemas.openxmlformats.org/drawingml/2006/main" xmlns:r="http://schemas.openxmlformats.org/officeDocument/2006/relationships" xmlns:p="http://schemas.openxmlformats.org/presentationml/2006/main">
   <p:cSld>
     <p:spTree>
       <p:nvGrpSpPr>
@@ -8244,7 +8421,7 @@
           <p:cNvPr id="2" name="Title 1">
             <a:extLst>
               <a:ext uri="{FF2B5EF4-FFF2-40B4-BE49-F238E27FC236}">
-                <ns2:creationId id="{E19F8865-281E-42C3-B6A1-8FFA00D83E8A}"/>
+                <a16:creationId xmlns:a16="http://schemas.microsoft.com/office/drawing/2014/main" id="{E19F8865-281E-42C3-B6A1-8FFA00D83E8A}"/>
               </a:ext>
             </a:extLst>
           </p:cNvPr>
@@ -8278,7 +8455,7 @@
           <p:cNvPr id="3" name="Content Placeholder 2">
             <a:extLst>
               <a:ext uri="{FF2B5EF4-FFF2-40B4-BE49-F238E27FC236}">
-                <ns2:creationId id="{07C4135C-E7A0-490F-9315-C4891FAE1848}"/>
+                <a16:creationId xmlns:a16="http://schemas.microsoft.com/office/drawing/2014/main" id="{07C4135C-E7A0-490F-9315-C4891FAE1848}"/>
               </a:ext>
             </a:extLst>
           </p:cNvPr>
@@ -8369,25 +8546,18 @@
     </p:spTree>
     <p:extLst>
       <p:ext uri="{BB962C8B-B14F-4D97-AF65-F5344CB8AC3E}">
-        <ns3:creationId val="1629994962"/>
+        <p14:creationId xmlns:p14="http://schemas.microsoft.com/office/powerpoint/2010/main" val="1629994962"/>
       </p:ext>
     </p:extLst>
   </p:cSld>
   <p:clrMapOvr>
     <a:masterClrMapping/>
   </p:clrMapOvr>
-  <p:timing>
-    <p:tnLst>
-      <p:par>
-        <p:cTn id="1" dur="indefinite" restart="never" nodeType="tmRoot"/>
-      </p:par>
-    </p:tnLst>
-  </p:timing>
 </p:sld>
 </file>
 
 <file path=ppt/slides/slide5.xml><?xml version="1.0" encoding="utf-8"?>
-<p:sld xmlns:a="http://schemas.openxmlformats.org/drawingml/2006/main" xmlns:ns2="http://schemas.microsoft.com/office/drawing/2014/main" xmlns:ns3="http://schemas.microsoft.com/office/powerpoint/2010/main" xmlns:p="http://schemas.openxmlformats.org/presentationml/2006/main">
+<p:sld xmlns:a="http://schemas.openxmlformats.org/drawingml/2006/main" xmlns:r="http://schemas.openxmlformats.org/officeDocument/2006/relationships" xmlns:p="http://schemas.openxmlformats.org/presentationml/2006/main">
   <p:cSld>
     <p:spTree>
       <p:nvGrpSpPr>
@@ -8408,7 +8578,7 @@
           <p:cNvPr id="2" name="Title 1">
             <a:extLst>
               <a:ext uri="{FF2B5EF4-FFF2-40B4-BE49-F238E27FC236}">
-                <ns2:creationId id="{9BAEF041-4C23-4A02-BCAB-D5134CF2E0D8}"/>
+                <a16:creationId xmlns:a16="http://schemas.microsoft.com/office/drawing/2014/main" id="{9BAEF041-4C23-4A02-BCAB-D5134CF2E0D8}"/>
               </a:ext>
             </a:extLst>
           </p:cNvPr>
@@ -8427,11 +8597,15 @@
         </p:spPr>
         <p:txBody>
           <a:bodyPr>
-            <a:normAutofit/>
+            <a:normAutofit fontScale="90000"/>
           </a:bodyPr>
           <a:lstStyle/>
           <a:p>
-            <a:r>
+            <a:br>
+              <a:rPr lang="en-US" dirty="0"/>
+            </a:br>
+            <a:r>
+              <a:rPr dirty="0"/>
               <a:t>PROJECT OBJECTIVES</a:t>
             </a:r>
           </a:p>
@@ -8442,7 +8616,7 @@
           <p:cNvPr id="3" name="Content Placeholder 2">
             <a:extLst>
               <a:ext uri="{FF2B5EF4-FFF2-40B4-BE49-F238E27FC236}">
-                <ns2:creationId id="{39F4E792-0D0D-4096-9906-2F4EAC811293}"/>
+                <a16:creationId xmlns:a16="http://schemas.microsoft.com/office/drawing/2014/main" id="{39F4E792-0D0D-4096-9906-2F4EAC811293}"/>
               </a:ext>
             </a:extLst>
           </p:cNvPr>
@@ -8471,7 +8645,35 @@
               </a:spcAft>
               <a:defRPr sz="1500" b="1"/>
             </a:pPr>
-            <a:r>
+            <a:endParaRPr lang="en-US" dirty="0"/>
+          </a:p>
+          <a:p>
+            <a:pPr>
+              <a:spcAft>
+                <a:spcPts val="400"/>
+              </a:spcAft>
+              <a:defRPr sz="1500" b="1"/>
+            </a:pPr>
+            <a:endParaRPr lang="en-US" dirty="0"/>
+          </a:p>
+          <a:p>
+            <a:pPr>
+              <a:spcAft>
+                <a:spcPts val="400"/>
+              </a:spcAft>
+              <a:defRPr sz="1500" b="1"/>
+            </a:pPr>
+            <a:endParaRPr lang="en-US" dirty="0"/>
+          </a:p>
+          <a:p>
+            <a:pPr>
+              <a:spcAft>
+                <a:spcPts val="400"/>
+              </a:spcAft>
+              <a:defRPr sz="1500" b="1"/>
+            </a:pPr>
+            <a:r>
+              <a:rPr dirty="0"/>
               <a:t>General Objective:</a:t>
             </a:r>
           </a:p>
@@ -8483,6 +8685,7 @@
               <a:defRPr sz="1300" b="0"/>
             </a:pPr>
             <a:r>
+              <a:rPr dirty="0"/>
               <a:t>To design, develop, and evaluate a web-based Laboratory Information Management System (LIMS) for Yala Sub-County Hospital to automate diagnostic workflows, ensure data accuracy, and improve clinical turnaround times.</a:t>
             </a:r>
           </a:p>
@@ -8494,6 +8697,7 @@
               <a:defRPr sz="1500" b="1"/>
             </a:pPr>
             <a:r>
+              <a:rPr dirty="0"/>
               <a:t>Specific Objectives (100% Achieved):</a:t>
             </a:r>
           </a:p>
@@ -8505,6 +8709,7 @@
               <a:defRPr sz="1300" b="0"/>
             </a:pPr>
             <a:r>
+              <a:rPr dirty="0"/>
               <a:t>1. Analyze: Identified manual workflow bottlenecks across outpatient, clinical, and laboratory stations.</a:t>
             </a:r>
           </a:p>
@@ -8516,6 +8721,7 @@
               <a:defRPr sz="1300" b="0"/>
             </a:pPr>
             <a:r>
+              <a:rPr dirty="0"/>
               <a:t>2. Design: Modeled 3-tier architecture, relational database schema, and role-based interfaces (RBAC).</a:t>
             </a:r>
           </a:p>
@@ -8527,7 +8733,16 @@
               <a:defRPr sz="1300" b="0"/>
             </a:pPr>
             <a:r>
-              <a:t>3. Develop: Implemented MOH 204 routing, CPOE ordering, testing bench, panic alerts, and eCitizen billing (Paybill 222222).</a:t>
+              <a:rPr dirty="0"/>
+              <a:t>3. Develop: Implemented MOH 204 routing, CPOE ordering, testing bench, panic alerts, and eCitizen billing (</a:t>
+            </a:r>
+            <a:r>
+              <a:rPr dirty="0" err="1"/>
+              <a:t>Paybill</a:t>
+            </a:r>
+            <a:r>
+              <a:rPr dirty="0"/>
+              <a:t> 222222).</a:t>
             </a:r>
           </a:p>
           <a:p>
@@ -8538,6 +8753,7 @@
               <a:defRPr sz="1300" b="0"/>
             </a:pPr>
             <a:r>
+              <a:rPr dirty="0"/>
               <a:t>4. Evaluate: Verified system functionality through 14 test cases and User Acceptance Testing (UAT 4.6/5.0).</a:t>
             </a:r>
           </a:p>
@@ -8546,25 +8762,18 @@
     </p:spTree>
     <p:extLst>
       <p:ext uri="{BB962C8B-B14F-4D97-AF65-F5344CB8AC3E}">
-        <ns3:creationId val="913581776"/>
+        <p14:creationId xmlns:p14="http://schemas.microsoft.com/office/powerpoint/2010/main" val="913581776"/>
       </p:ext>
     </p:extLst>
   </p:cSld>
   <p:clrMapOvr>
     <a:masterClrMapping/>
   </p:clrMapOvr>
-  <p:timing>
-    <p:tnLst>
-      <p:par>
-        <p:cTn id="1" dur="indefinite" restart="never" nodeType="tmRoot"/>
-      </p:par>
-    </p:tnLst>
-  </p:timing>
 </p:sld>
 </file>
 
 <file path=ppt/slides/slide6.xml><?xml version="1.0" encoding="utf-8"?>
-<p:sld xmlns:a="http://schemas.openxmlformats.org/drawingml/2006/main" xmlns:ns2="http://schemas.microsoft.com/office/drawing/2014/main" xmlns:ns3="http://schemas.microsoft.com/office/powerpoint/2010/main" xmlns:p="http://schemas.openxmlformats.org/presentationml/2006/main">
+<p:sld xmlns:a="http://schemas.openxmlformats.org/drawingml/2006/main" xmlns:r="http://schemas.openxmlformats.org/officeDocument/2006/relationships" xmlns:p="http://schemas.openxmlformats.org/presentationml/2006/main">
   <p:cSld>
     <p:spTree>
       <p:nvGrpSpPr>
@@ -8585,7 +8794,7 @@
           <p:cNvPr id="2" name="Title 1">
             <a:extLst>
               <a:ext uri="{FF2B5EF4-FFF2-40B4-BE49-F238E27FC236}">
-                <ns2:creationId id="{A575E463-7D82-46C7-8909-B4EFDBF6D194}"/>
+                <a16:creationId xmlns:a16="http://schemas.microsoft.com/office/drawing/2014/main" id="{A575E463-7D82-46C7-8909-B4EFDBF6D194}"/>
               </a:ext>
             </a:extLst>
           </p:cNvPr>
@@ -8619,7 +8828,7 @@
           <p:cNvPr id="3" name="Content Placeholder 2">
             <a:extLst>
               <a:ext uri="{FF2B5EF4-FFF2-40B4-BE49-F238E27FC236}">
-                <ns2:creationId id="{87D5949E-EE0A-4A19-B2EB-B3F2C66D6865}"/>
+                <a16:creationId xmlns:a16="http://schemas.microsoft.com/office/drawing/2014/main" id="{87D5949E-EE0A-4A19-B2EB-B3F2C66D6865}"/>
               </a:ext>
             </a:extLst>
           </p:cNvPr>
@@ -8648,7 +8857,35 @@
               </a:spcAft>
               <a:defRPr sz="1400" b="1"/>
             </a:pPr>
-            <a:r>
+            <a:endParaRPr lang="en-US" dirty="0"/>
+          </a:p>
+          <a:p>
+            <a:pPr>
+              <a:spcAft>
+                <a:spcPts val="400"/>
+              </a:spcAft>
+              <a:defRPr sz="1400" b="1"/>
+            </a:pPr>
+            <a:endParaRPr lang="en-US" dirty="0"/>
+          </a:p>
+          <a:p>
+            <a:pPr>
+              <a:spcAft>
+                <a:spcPts val="400"/>
+              </a:spcAft>
+              <a:defRPr sz="1400" b="1"/>
+            </a:pPr>
+            <a:endParaRPr lang="en-US" dirty="0"/>
+          </a:p>
+          <a:p>
+            <a:pPr>
+              <a:spcAft>
+                <a:spcPts val="400"/>
+              </a:spcAft>
+              <a:defRPr sz="1400" b="1"/>
+            </a:pPr>
+            <a:r>
+              <a:rPr dirty="0"/>
               <a:t>In-Scope (Delivered Functionality):</a:t>
             </a:r>
           </a:p>
@@ -8660,6 +8897,7 @@
               <a:defRPr sz="1300" b="0"/>
             </a:pPr>
             <a:r>
+              <a:rPr dirty="0"/>
               <a:t>• Modular Web Stack: Built with PHP 8.2 and MySQL 8.0 on local Apache/XAMPP.</a:t>
             </a:r>
           </a:p>
@@ -8671,6 +8909,7 @@
               <a:defRPr sz="1300" b="0"/>
             </a:pPr>
             <a:r>
+              <a:rPr dirty="0"/>
               <a:t>• Role-Based Access Control: Strict boundaries for Receptionist, Doctor, Lab Tech, Cashier, Admin.</a:t>
             </a:r>
           </a:p>
@@ -8682,6 +8921,7 @@
               <a:defRPr sz="1300" b="0"/>
             </a:pPr>
             <a:r>
+              <a:rPr dirty="0"/>
               <a:t>• Outpatient Flow: OPD sequencing and printable A5 routing slips with Code128 barcodes.</a:t>
             </a:r>
           </a:p>
@@ -8693,6 +8933,7 @@
               <a:defRPr sz="1300" b="0"/>
             </a:pPr>
             <a:r>
+              <a:rPr dirty="0"/>
               <a:t>• Workbench: Reference ranges, panic alerts, specimen rejection QA, and blood bank safety.</a:t>
             </a:r>
           </a:p>
@@ -8704,7 +8945,16 @@
               <a:defRPr sz="1300" b="0"/>
             </a:pPr>
             <a:r>
-              <a:t>• Digital Cashless Billing: Real-time settlement via Government eCitizen Paybill 222222.</a:t>
+              <a:rPr dirty="0"/>
+              <a:t>• Digital Cashless Billing: Real-time settlement via Government eCitizen </a:t>
+            </a:r>
+            <a:r>
+              <a:rPr dirty="0" err="1"/>
+              <a:t>Paybill</a:t>
+            </a:r>
+            <a:r>
+              <a:rPr dirty="0"/>
+              <a:t> 222222.</a:t>
             </a:r>
           </a:p>
           <a:p>
@@ -8715,6 +8965,7 @@
               <a:defRPr sz="1400" b="1"/>
             </a:pPr>
             <a:r>
+              <a:rPr dirty="0"/>
               <a:t>Out-of-Scope (Deliberate Boundaries):</a:t>
             </a:r>
           </a:p>
@@ -8726,6 +8977,7 @@
               <a:defRPr sz="1300" b="0"/>
             </a:pPr>
             <a:r>
+              <a:rPr dirty="0"/>
               <a:t>• Direct serial hardware communication (RS-232/HL7) with physical analyzer machines.</a:t>
             </a:r>
           </a:p>
@@ -8737,6 +8989,7 @@
               <a:defRPr sz="1300" b="0"/>
             </a:pPr>
             <a:r>
+              <a:rPr dirty="0"/>
               <a:t>• Automated live REST API synchronization with National DHIS2 cloud servers.</a:t>
             </a:r>
           </a:p>
@@ -8745,25 +8998,18 @@
     </p:spTree>
     <p:extLst>
       <p:ext uri="{BB962C8B-B14F-4D97-AF65-F5344CB8AC3E}">
-        <ns3:creationId val="2078098284"/>
+        <p14:creationId xmlns:p14="http://schemas.microsoft.com/office/powerpoint/2010/main" val="2078098284"/>
       </p:ext>
     </p:extLst>
   </p:cSld>
   <p:clrMapOvr>
     <a:masterClrMapping/>
   </p:clrMapOvr>
-  <p:timing>
-    <p:tnLst>
-      <p:par>
-        <p:cTn id="1" dur="indefinite" restart="never" nodeType="tmRoot"/>
-      </p:par>
-    </p:tnLst>
-  </p:timing>
 </p:sld>
 </file>
 
 <file path=ppt/slides/slide7.xml><?xml version="1.0" encoding="utf-8"?>
-<p:sld xmlns:a="http://schemas.openxmlformats.org/drawingml/2006/main" xmlns:ns2="http://schemas.microsoft.com/office/drawing/2014/main" xmlns:ns3="http://schemas.microsoft.com/office/powerpoint/2010/main" xmlns:p="http://schemas.openxmlformats.org/presentationml/2006/main">
+<p:sld xmlns:a="http://schemas.openxmlformats.org/drawingml/2006/main" xmlns:r="http://schemas.openxmlformats.org/officeDocument/2006/relationships" xmlns:p="http://schemas.openxmlformats.org/presentationml/2006/main">
   <p:cSld>
     <p:spTree>
       <p:nvGrpSpPr>
@@ -8784,7 +9030,7 @@
           <p:cNvPr id="2" name="Title 1">
             <a:extLst>
               <a:ext uri="{FF2B5EF4-FFF2-40B4-BE49-F238E27FC236}">
-                <ns2:creationId id="{B577F1FF-FB9B-47F8-ACC5-23C4948572AE}"/>
+                <a16:creationId xmlns:a16="http://schemas.microsoft.com/office/drawing/2014/main" id="{B577F1FF-FB9B-47F8-ACC5-23C4948572AE}"/>
               </a:ext>
             </a:extLst>
           </p:cNvPr>
@@ -8816,7 +9062,7 @@
           <p:cNvPr id="3" name="Content Placeholder 2">
             <a:extLst>
               <a:ext uri="{FF2B5EF4-FFF2-40B4-BE49-F238E27FC236}">
-                <ns2:creationId id="{3C34EFA2-3559-434E-B961-58DC33357E17}"/>
+                <a16:creationId xmlns:a16="http://schemas.microsoft.com/office/drawing/2014/main" id="{3C34EFA2-3559-434E-B961-58DC33357E17}"/>
               </a:ext>
             </a:extLst>
           </p:cNvPr>
@@ -8891,25 +9137,18 @@
     </p:spTree>
     <p:extLst>
       <p:ext uri="{BB962C8B-B14F-4D97-AF65-F5344CB8AC3E}">
-        <ns3:creationId val="2411300907"/>
+        <p14:creationId xmlns:p14="http://schemas.microsoft.com/office/powerpoint/2010/main" val="2411300907"/>
       </p:ext>
     </p:extLst>
   </p:cSld>
   <p:clrMapOvr>
     <a:masterClrMapping/>
   </p:clrMapOvr>
-  <p:timing>
-    <p:tnLst>
-      <p:par>
-        <p:cTn id="1" dur="indefinite" restart="never" nodeType="tmRoot"/>
-      </p:par>
-    </p:tnLst>
-  </p:timing>
 </p:sld>
 </file>
 
 <file path=ppt/slides/slide8.xml><?xml version="1.0" encoding="utf-8"?>
-<p:sld xmlns:a="http://schemas.openxmlformats.org/drawingml/2006/main" xmlns:ns2="http://schemas.microsoft.com/office/powerpoint/2010/main" xmlns:p="http://schemas.openxmlformats.org/presentationml/2006/main">
+<p:sld xmlns:a="http://schemas.openxmlformats.org/drawingml/2006/main" xmlns:r="http://schemas.openxmlformats.org/officeDocument/2006/relationships" xmlns:p="http://schemas.openxmlformats.org/presentationml/2006/main">
   <p:cSld>
     <p:spTree>
       <p:nvGrpSpPr>
@@ -9045,25 +9284,18 @@
     </p:spTree>
     <p:extLst>
       <p:ext uri="{BB962C8B-B14F-4D97-AF65-F5344CB8AC3E}">
-        <ns2:creationId val="4063582525"/>
+        <p14:creationId xmlns:p14="http://schemas.microsoft.com/office/powerpoint/2010/main" val="4063582525"/>
       </p:ext>
     </p:extLst>
   </p:cSld>
   <p:clrMapOvr>
     <a:masterClrMapping/>
   </p:clrMapOvr>
-  <p:timing>
-    <p:tnLst>
-      <p:par>
-        <p:cTn id="1" dur="indefinite" restart="never" nodeType="tmRoot"/>
-      </p:par>
-    </p:tnLst>
-  </p:timing>
 </p:sld>
 </file>
 
 <file path=ppt/slides/slide9.xml><?xml version="1.0" encoding="utf-8"?>
-<p:sld xmlns:a="http://schemas.openxmlformats.org/drawingml/2006/main" xmlns:ns2="http://schemas.microsoft.com/office/drawing/2014/main" xmlns:ns3="http://schemas.microsoft.com/office/powerpoint/2010/main" xmlns:p="http://schemas.openxmlformats.org/presentationml/2006/main">
+<p:sld xmlns:a="http://schemas.openxmlformats.org/drawingml/2006/main" xmlns:r="http://schemas.openxmlformats.org/officeDocument/2006/relationships" xmlns:p="http://schemas.openxmlformats.org/presentationml/2006/main">
   <p:cSld>
     <p:spTree>
       <p:nvGrpSpPr>
@@ -9084,7 +9316,7 @@
           <p:cNvPr id="2" name="Title 1">
             <a:extLst>
               <a:ext uri="{FF2B5EF4-FFF2-40B4-BE49-F238E27FC236}">
-                <ns2:creationId id="{A575E463-7D82-46C7-8909-B4EFDBF6D194}"/>
+                <a16:creationId xmlns:a16="http://schemas.microsoft.com/office/drawing/2014/main" id="{A575E463-7D82-46C7-8909-B4EFDBF6D194}"/>
               </a:ext>
             </a:extLst>
           </p:cNvPr>
@@ -9118,7 +9350,7 @@
           <p:cNvPr id="3" name="Content Placeholder 2">
             <a:extLst>
               <a:ext uri="{FF2B5EF4-FFF2-40B4-BE49-F238E27FC236}">
-                <ns2:creationId id="{87D5949E-EE0A-4A19-B2EB-B3F2C66D6865}"/>
+                <a16:creationId xmlns:a16="http://schemas.microsoft.com/office/drawing/2014/main" id="{87D5949E-EE0A-4A19-B2EB-B3F2C66D6865}"/>
               </a:ext>
             </a:extLst>
           </p:cNvPr>
@@ -9145,7 +9377,26 @@
               </a:spcAft>
               <a:defRPr sz="1400" b="0"/>
             </a:pPr>
-            <a:r>
+            <a:endParaRPr lang="en-US" dirty="0"/>
+          </a:p>
+          <a:p>
+            <a:pPr marL="285750" indent="-285750">
+              <a:spcAft>
+                <a:spcPts val="500"/>
+              </a:spcAft>
+              <a:defRPr sz="1400" b="0"/>
+            </a:pPr>
+            <a:endParaRPr lang="en-US" dirty="0"/>
+          </a:p>
+          <a:p>
+            <a:pPr marL="285750" indent="-285750">
+              <a:spcAft>
+                <a:spcPts val="500"/>
+              </a:spcAft>
+              <a:defRPr sz="1400" b="0"/>
+            </a:pPr>
+            <a:r>
+              <a:rPr dirty="0"/>
               <a:t>Agile Development Lifecycle: Executed across 4 iterative sprint cycles over the academic calendar.</a:t>
             </a:r>
           </a:p>
@@ -9157,6 +9408,7 @@
               <a:defRPr sz="1400" b="0"/>
             </a:pPr>
             <a:r>
+              <a:rPr dirty="0"/>
               <a:t>Sprint 1 (Analysis &amp; Inception): Contextual inquiries, manual workflow mapping, and SRS sign-off.</a:t>
             </a:r>
           </a:p>
@@ -9168,6 +9420,7 @@
               <a:defRPr sz="1400" b="0"/>
             </a:pPr>
             <a:r>
+              <a:rPr dirty="0"/>
               <a:t>Sprint 2 (Architecture &amp; UI): Relational schema design, UI wireframing, and RBAC authentication.</a:t>
             </a:r>
           </a:p>
@@ -9179,6 +9432,7 @@
               <a:defRPr sz="1400" b="0"/>
             </a:pPr>
             <a:r>
+              <a:rPr dirty="0"/>
               <a:t>Sprint 3 (Module Implementation): CPOE ordering, lab bench, blood bank, eCitizen, and notifications.</a:t>
             </a:r>
           </a:p>
@@ -9190,6 +9444,7 @@
               <a:defRPr sz="1400" b="0"/>
             </a:pPr>
             <a:r>
+              <a:rPr dirty="0"/>
               <a:t>Sprint 4 (Testing &amp; Verification): 14 test cases, UAT evaluation (4.6/5.0), and hospital deployment.</a:t>
             </a:r>
           </a:p>
@@ -9198,20 +9453,13 @@
     </p:spTree>
     <p:extLst>
       <p:ext uri="{BB962C8B-B14F-4D97-AF65-F5344CB8AC3E}">
-        <ns3:creationId val="596859333"/>
+        <p14:creationId xmlns:p14="http://schemas.microsoft.com/office/powerpoint/2010/main" val="596859333"/>
       </p:ext>
     </p:extLst>
   </p:cSld>
   <p:clrMapOvr>
     <a:masterClrMapping/>
   </p:clrMapOvr>
-  <p:timing>
-    <p:tnLst>
-      <p:par>
-        <p:cTn id="1" dur="indefinite" restart="never" nodeType="tmRoot"/>
-      </p:par>
-    </p:tnLst>
-  </p:timing>
 </p:sld>
 </file>
 

--- a/PROJECT_B_FINAL_PRESENTATION_OWUOR_COLLINS.pptx
+++ b/PROJECT_B_FINAL_PRESENTATION_OWUOR_COLLINS.pptx
@@ -5960,8 +5960,13 @@
           </a:bodyPr>
           <a:lstStyle/>
           <a:p>
-            <a:pPr>
-              <a:defRPr sz="2400" b="1"/>
+            <a:pPr algn="ctr">
+              <a:defRPr sz="2800" b="1">
+                <a:solidFill>
+                  <a:srgbClr val="FFFFFF"/>
+                </a:solidFill>
+                <a:latin typeface="Calibri"/>
+              </a:defRPr>
             </a:pPr>
             <a:r>
               <a:t>LABORATORY INFORMATION MANAGEMENT SYSTEM FOR YALA SUB-COUNTY HOSPITAL</a:t>
@@ -5987,88 +5992,141 @@
         </p:nvSpPr>
         <p:spPr>
           <a:xfrm>
-            <a:off x="2614005" y="3291840"/>
-            <a:ext cx="6894062" cy="2560320"/>
+            <a:off x="1371600" y="2926080"/>
+            <a:ext cx="9418320" cy="3108960"/>
           </a:xfrm>
         </p:spPr>
         <p:txBody>
-          <a:bodyPr>
+          <a:bodyPr wrap="square">
             <a:normAutofit/>
           </a:bodyPr>
           <a:lstStyle/>
           <a:p>
-            <a:pPr>
-              <a:spcAft>
-                <a:spcPts val="800"/>
+            <a:pPr algn="ctr">
+              <a:spcAft>
+                <a:spcPts val="400"/>
               </a:spcAft>
               <a:defRPr sz="1600" b="1"/>
             </a:pPr>
             <a:r>
-              <a:rPr dirty="0"/>
+              <a:rPr sz="2000" b="1">
+                <a:solidFill>
+                  <a:srgbClr val="FFBF00"/>
+                </a:solidFill>
+                <a:latin typeface="Calibri"/>
+              </a:rPr>
               <a:t>Final Project Defense Presentation (Project B)</a:t>
             </a:r>
           </a:p>
           <a:p>
-            <a:pPr>
+            <a:pPr algn="ctr">
               <a:spcAft>
                 <a:spcPts val="400"/>
               </a:spcAft>
-              <a:defRPr sz="1400" b="0"/>
-            </a:pPr>
-            <a:r>
-              <a:rPr dirty="0"/>
+            </a:pPr>
+            <a:r>
+              <a:rPr sz="1800" b="1">
+                <a:solidFill>
+                  <a:srgbClr val="FFFFFF"/>
+                </a:solidFill>
+                <a:latin typeface="Calibri"/>
+              </a:rPr>
               <a:t>Candidate: Owuor Collins  |  Reg No: SCCI/01227/2022</a:t>
             </a:r>
           </a:p>
           <a:p>
-            <a:pPr>
+            <a:pPr algn="ctr">
               <a:spcAft>
                 <a:spcPts val="400"/>
               </a:spcAft>
-              <a:defRPr sz="1300" b="0"/>
-            </a:pPr>
-            <a:r>
-              <a:rPr dirty="0" err="1"/>
-              <a:t>Programme</a:t>
-            </a:r>
-            <a:r>
-              <a:rPr dirty="0"/>
-              <a:t>: Bachelor of Technology in Information Technology</a:t>
-            </a:r>
-          </a:p>
-          <a:p>
-            <a:pPr>
+            </a:pPr>
+            <a:r>
+              <a:rPr sz="1500" b="0">
+                <a:solidFill>
+                  <a:srgbClr val="DCE6F2"/>
+                </a:solidFill>
+                <a:latin typeface="Calibri"/>
+              </a:rPr>
+              <a:t>Programme: Bachelor of Technology in Information Technology</a:t>
+            </a:r>
+          </a:p>
+          <a:p>
+            <a:pPr algn="ctr">
               <a:spcAft>
                 <a:spcPts val="400"/>
               </a:spcAft>
-              <a:defRPr sz="1300" b="0"/>
-            </a:pPr>
-            <a:r>
-              <a:rPr dirty="0"/>
-              <a:t>Institution: The Technical University of Kenya (TUK) — SCIT</a:t>
-            </a:r>
-          </a:p>
-          <a:p>
-            <a:pPr>
+            </a:pPr>
+            <a:r>
+              <a:rPr sz="1400" b="0">
+                <a:solidFill>
+                  <a:srgbClr val="C8D7EB"/>
+                </a:solidFill>
+                <a:latin typeface="Calibri"/>
+              </a:rPr>
+              <a:t>Faculty of Applied Sciences &amp; Technology | School of Computing and Information Technology (SCIT)</a:t>
+            </a:r>
+          </a:p>
+          <a:p>
+            <a:pPr algn="ctr">
               <a:spcAft>
                 <a:spcPts val="400"/>
               </a:spcAft>
-              <a:defRPr sz="1300" b="0"/>
-            </a:pPr>
-            <a:r>
-              <a:rPr dirty="0"/>
+            </a:pPr>
+            <a:r>
+              <a:rPr sz="1400" b="0">
+                <a:solidFill>
+                  <a:srgbClr val="C8D7EB"/>
+                </a:solidFill>
+                <a:latin typeface="Calibri"/>
+              </a:rPr>
+              <a:t>Department of Computer Science and Informatics</a:t>
+            </a:r>
+          </a:p>
+          <a:p>
+            <a:pPr algn="ctr">
+              <a:spcAft>
+                <a:spcPts val="400"/>
+              </a:spcAft>
+            </a:pPr>
+            <a:r>
+              <a:rPr sz="1500" b="1">
+                <a:solidFill>
+                  <a:srgbClr val="FFFFFF"/>
+                </a:solidFill>
+                <a:latin typeface="Calibri"/>
+              </a:rPr>
+              <a:t>Institution: The Technical University of Kenya (TUK)</a:t>
+            </a:r>
+          </a:p>
+          <a:p>
+            <a:pPr algn="ctr">
+              <a:spcAft>
+                <a:spcPts val="400"/>
+              </a:spcAft>
+            </a:pPr>
+            <a:r>
+              <a:rPr sz="1500" b="1">
+                <a:solidFill>
+                  <a:srgbClr val="FFFFFF"/>
+                </a:solidFill>
+                <a:latin typeface="Calibri"/>
+              </a:rPr>
               <a:t>Supervisors: Dr. Edwin Ngwawe &amp; Mr. Peter Maina Kariuki</a:t>
             </a:r>
           </a:p>
           <a:p>
-            <a:pPr>
-              <a:spcAft>
-                <a:spcPts val="0"/>
-              </a:spcAft>
-              <a:defRPr sz="1300" b="0"/>
-            </a:pPr>
-            <a:r>
-              <a:rPr dirty="0"/>
+            <a:pPr algn="ctr">
+              <a:spcAft>
+                <a:spcPts val="400"/>
+              </a:spcAft>
+            </a:pPr>
+            <a:r>
+              <a:rPr sz="1400" b="0">
+                <a:solidFill>
+                  <a:srgbClr val="B4C8DC"/>
+                </a:solidFill>
+                <a:latin typeface="Calibri"/>
+              </a:rPr>
               <a:t>Academic Year: 2025 / 2026</a:t>
             </a:r>
           </a:p>
@@ -8641,52 +8699,116 @@
           <a:p>
             <a:pPr>
               <a:spcAft>
+                <a:spcPts val="300"/>
+              </a:spcAft>
+              <a:defRPr sz="1700" b="1">
+                <a:solidFill>
+                  <a:srgbClr val="003366"/>
+                </a:solidFill>
+              </a:defRPr>
+            </a:pPr>
+            <a:r>
+              <a:t>General Objective:</a:t>
+            </a:r>
+            <a:endParaRPr lang="en-US" dirty="0"/>
+          </a:p>
+          <a:p>
+            <a:pPr>
+              <a:spcAft>
+                <a:spcPts val="1200"/>
+              </a:spcAft>
+              <a:defRPr sz="1500">
+                <a:solidFill>
+                  <a:srgbClr val="222222"/>
+                </a:solidFill>
+              </a:defRPr>
+            </a:pPr>
+            <a:r>
+              <a:t>Develop a web-based Laboratory Information Management System (LIMS) for Yala Sub-County Hospital to automate diagnostic workflows, reduce clinical turnaround times, and secure revenue collection.</a:t>
+            </a:r>
+          </a:p>
+          <a:p>
+            <a:pPr>
+              <a:spcAft>
                 <a:spcPts val="400"/>
               </a:spcAft>
-              <a:defRPr sz="1500" b="1"/>
-            </a:pPr>
-            <a:endParaRPr lang="en-US" dirty="0"/>
+              <a:defRPr b="1" sz="1700">
+                <a:solidFill>
+                  <a:srgbClr val="003366"/>
+                </a:solidFill>
+              </a:defRPr>
+            </a:pPr>
+            <a:r>
+              <a:t>Specific Objectives (100% Achieved):</a:t>
+            </a:r>
           </a:p>
           <a:p>
             <a:pPr>
               <a:spcAft>
                 <a:spcPts val="400"/>
               </a:spcAft>
-              <a:defRPr sz="1500" b="1"/>
-            </a:pPr>
-            <a:endParaRPr lang="en-US" dirty="0"/>
+            </a:pPr>
+            <a:r>
+              <a:rPr b="1" sz="1400">
+                <a:solidFill>
+                  <a:srgbClr val="003366"/>
+                </a:solidFill>
+              </a:rPr>
+              <a:t>1. Analyze: </a:t>
+            </a:r>
+            <a:r>
+              <a:rPr b="0" sz="1400">
+                <a:solidFill>
+                  <a:srgbClr val="222222"/>
+                </a:solidFill>
+              </a:rPr>
+              <a:t>Analyze current manual laboratory and billing workflows to determine functional and non-functional system requirements.</a:t>
+            </a:r>
           </a:p>
           <a:p>
             <a:pPr>
               <a:spcAft>
                 <a:spcPts val="400"/>
               </a:spcAft>
-              <a:defRPr sz="1500" b="1"/>
-            </a:pPr>
-            <a:endParaRPr lang="en-US" dirty="0"/>
+            </a:pPr>
+            <a:r>
+              <a:rPr b="1" sz="1400">
+                <a:solidFill>
+                  <a:srgbClr val="003366"/>
+                </a:solidFill>
+              </a:rPr>
+              <a:t>2. Design: </a:t>
+            </a:r>
+            <a:r>
+              <a:rPr b="0" sz="1400">
+                <a:solidFill>
+                  <a:srgbClr val="222222"/>
+                </a:solidFill>
+              </a:rPr>
+              <a:t>Design a 3-tier system architecture, normalized relational database schema, and Role-Based Access Control (RBAC) model.</a:t>
+            </a:r>
           </a:p>
           <a:p>
             <a:pPr>
               <a:spcAft>
                 <a:spcPts val="400"/>
               </a:spcAft>
-              <a:defRPr sz="1500" b="1"/>
-            </a:pPr>
-            <a:r>
-              <a:rPr dirty="0"/>
-              <a:t>General Objective:</a:t>
-            </a:r>
-          </a:p>
-          <a:p>
-            <a:pPr>
-              <a:spcAft>
-                <a:spcPts val="800"/>
-              </a:spcAft>
-              <a:defRPr sz="1300" b="0"/>
-            </a:pPr>
-            <a:r>
-              <a:rPr dirty="0"/>
-              <a:t>To design, develop, and evaluate a web-based Laboratory Information Management System (LIMS) for Yala Sub-County Hospital to automate diagnostic workflows, ensure data accuracy, and improve clinical turnaround times.</a:t>
+            </a:pPr>
+            <a:r>
+              <a:rPr b="1" sz="1400">
+                <a:solidFill>
+                  <a:srgbClr val="003366"/>
+                </a:solidFill>
+              </a:rPr>
+              <a:t>3. Implement: </a:t>
+            </a:r>
+            <a:r>
+              <a:rPr b="0" sz="1400">
+                <a:solidFill>
+                  <a:srgbClr val="222222"/>
+                </a:solidFill>
+              </a:rPr>
+              <a:t>Implement core web modules for outpatient triage, CPOE test ordering, laboratory bench testing with panic alerts, and eCitizen cashless billing (Paybill 222222).</a:t>
             </a:r>
           </a:p>
           <a:p>
@@ -8694,67 +8816,22 @@
               <a:spcAft>
                 <a:spcPts val="400"/>
               </a:spcAft>
-              <a:defRPr sz="1500" b="1"/>
-            </a:pPr>
-            <a:r>
-              <a:rPr dirty="0"/>
-              <a:t>Specific Objectives (100% Achieved):</a:t>
-            </a:r>
-          </a:p>
-          <a:p>
-            <a:pPr>
-              <a:spcAft>
-                <a:spcPts val="300"/>
-              </a:spcAft>
-              <a:defRPr sz="1300" b="0"/>
-            </a:pPr>
-            <a:r>
-              <a:rPr dirty="0"/>
-              <a:t>1. Analyze: Identified manual workflow bottlenecks across outpatient, clinical, and laboratory stations.</a:t>
-            </a:r>
-          </a:p>
-          <a:p>
-            <a:pPr>
-              <a:spcAft>
-                <a:spcPts val="300"/>
-              </a:spcAft>
-              <a:defRPr sz="1300" b="0"/>
-            </a:pPr>
-            <a:r>
-              <a:rPr dirty="0"/>
-              <a:t>2. Design: Modeled 3-tier architecture, relational database schema, and role-based interfaces (RBAC).</a:t>
-            </a:r>
-          </a:p>
-          <a:p>
-            <a:pPr>
-              <a:spcAft>
-                <a:spcPts val="300"/>
-              </a:spcAft>
-              <a:defRPr sz="1300" b="0"/>
-            </a:pPr>
-            <a:r>
-              <a:rPr dirty="0"/>
-              <a:t>3. Develop: Implemented MOH 204 routing, CPOE ordering, testing bench, panic alerts, and eCitizen billing (</a:t>
-            </a:r>
-            <a:r>
-              <a:rPr dirty="0" err="1"/>
-              <a:t>Paybill</a:t>
-            </a:r>
-            <a:r>
-              <a:rPr dirty="0"/>
-              <a:t> 222222).</a:t>
-            </a:r>
-          </a:p>
-          <a:p>
-            <a:pPr>
-              <a:spcAft>
-                <a:spcPts val="0"/>
-              </a:spcAft>
-              <a:defRPr sz="1300" b="0"/>
-            </a:pPr>
-            <a:r>
-              <a:rPr dirty="0"/>
-              <a:t>4. Evaluate: Verified system functionality through 14 test cases and User Acceptance Testing (UAT 4.6/5.0).</a:t>
+            </a:pPr>
+            <a:r>
+              <a:rPr b="1" sz="1400">
+                <a:solidFill>
+                  <a:srgbClr val="003366"/>
+                </a:solidFill>
+              </a:rPr>
+              <a:t>4. Evaluate: </a:t>
+            </a:r>
+            <a:r>
+              <a:rPr b="0" sz="1400">
+                <a:solidFill>
+                  <a:srgbClr val="222222"/>
+                </a:solidFill>
+              </a:rPr>
+              <a:t>Evaluate system performance, data security, and user acceptance through structured test cases and hospital staff feedback.</a:t>
             </a:r>
           </a:p>
         </p:txBody>

--- a/PROJECT_B_FINAL_PRESENTATION_OWUOR_COLLINS.pptx
+++ b/PROJECT_B_FINAL_PRESENTATION_OWUOR_COLLINS.pptx
@@ -473,7 +473,7 @@
           <a:p>
             <a:fld id="{985FAE1C-47D0-494D-BBBC-74279CBF825C}" type="datetimeFigureOut">
               <a:rPr lang="en-US" smtClean="0"/>
-              <a:t>10/6/2026</a:t>
+              <a:t>10/26/2026</a:t>
             </a:fld>
             <a:endParaRPr lang="en-US"/>
           </a:p>
@@ -802,7 +802,7 @@
           <a:p>
             <a:fld id="{985FAE1C-47D0-494D-BBBC-74279CBF825C}" type="datetimeFigureOut">
               <a:rPr lang="en-US" smtClean="0"/>
-              <a:t>10/6/2026</a:t>
+              <a:t>10/26/2026</a:t>
             </a:fld>
             <a:endParaRPr lang="en-US"/>
           </a:p>
@@ -1050,7 +1050,7 @@
           <a:p>
             <a:fld id="{985FAE1C-47D0-494D-BBBC-74279CBF825C}" type="datetimeFigureOut">
               <a:rPr lang="en-US" smtClean="0"/>
-              <a:t>10/6/2026</a:t>
+              <a:t>10/26/2026</a:t>
             </a:fld>
             <a:endParaRPr lang="en-US"/>
           </a:p>
@@ -1389,7 +1389,7 @@
           <a:p>
             <a:fld id="{985FAE1C-47D0-494D-BBBC-74279CBF825C}" type="datetimeFigureOut">
               <a:rPr lang="en-US" smtClean="0"/>
-              <a:t>10/6/2026</a:t>
+              <a:t>10/26/2026</a:t>
             </a:fld>
             <a:endParaRPr lang="en-US"/>
           </a:p>
@@ -1736,7 +1736,7 @@
           <a:p>
             <a:fld id="{985FAE1C-47D0-494D-BBBC-74279CBF825C}" type="datetimeFigureOut">
               <a:rPr lang="en-US" smtClean="0"/>
-              <a:t>10/6/2026</a:t>
+              <a:t>10/26/2026</a:t>
             </a:fld>
             <a:endParaRPr lang="en-US"/>
           </a:p>
@@ -2110,7 +2110,7 @@
           <a:p>
             <a:fld id="{985FAE1C-47D0-494D-BBBC-74279CBF825C}" type="datetimeFigureOut">
               <a:rPr lang="en-US" smtClean="0"/>
-              <a:t>10/6/2026</a:t>
+              <a:t>10/26/2026</a:t>
             </a:fld>
             <a:endParaRPr lang="en-US"/>
           </a:p>
@@ -2580,7 +2580,7 @@
           <a:p>
             <a:fld id="{985FAE1C-47D0-494D-BBBC-74279CBF825C}" type="datetimeFigureOut">
               <a:rPr lang="en-US" smtClean="0"/>
-              <a:t>10/6/2026</a:t>
+              <a:t>10/26/2026</a:t>
             </a:fld>
             <a:endParaRPr lang="en-US"/>
           </a:p>
@@ -2785,7 +2785,7 @@
           <a:p>
             <a:fld id="{985FAE1C-47D0-494D-BBBC-74279CBF825C}" type="datetimeFigureOut">
               <a:rPr lang="en-US" smtClean="0"/>
-              <a:t>10/6/2026</a:t>
+              <a:t>10/26/2026</a:t>
             </a:fld>
             <a:endParaRPr lang="en-US"/>
           </a:p>
@@ -2996,7 +2996,7 @@
           <a:p>
             <a:fld id="{985FAE1C-47D0-494D-BBBC-74279CBF825C}" type="datetimeFigureOut">
               <a:rPr lang="en-US" smtClean="0"/>
-              <a:t>10/6/2026</a:t>
+              <a:t>10/26/2026</a:t>
             </a:fld>
             <a:endParaRPr lang="en-US"/>
           </a:p>
@@ -3228,7 +3228,7 @@
           <a:p>
             <a:fld id="{985FAE1C-47D0-494D-BBBC-74279CBF825C}" type="datetimeFigureOut">
               <a:rPr lang="en-US" smtClean="0"/>
-              <a:t>10/6/2026</a:t>
+              <a:t>10/26/2026</a:t>
             </a:fld>
             <a:endParaRPr lang="en-US"/>
           </a:p>
@@ -3476,7 +3476,7 @@
           <a:p>
             <a:fld id="{985FAE1C-47D0-494D-BBBC-74279CBF825C}" type="datetimeFigureOut">
               <a:rPr lang="en-US" smtClean="0"/>
-              <a:t>10/6/2026</a:t>
+              <a:t>10/26/2026</a:t>
             </a:fld>
             <a:endParaRPr lang="en-US"/>
           </a:p>
@@ -3774,7 +3774,7 @@
           <a:p>
             <a:fld id="{985FAE1C-47D0-494D-BBBC-74279CBF825C}" type="datetimeFigureOut">
               <a:rPr lang="en-US" smtClean="0"/>
-              <a:t>10/6/2026</a:t>
+              <a:t>10/26/2026</a:t>
             </a:fld>
             <a:endParaRPr lang="en-US"/>
           </a:p>
@@ -4173,7 +4173,7 @@
           <a:p>
             <a:fld id="{985FAE1C-47D0-494D-BBBC-74279CBF825C}" type="datetimeFigureOut">
               <a:rPr lang="en-US" smtClean="0"/>
-              <a:t>10/6/2026</a:t>
+              <a:t>10/26/2026</a:t>
             </a:fld>
             <a:endParaRPr lang="en-US"/>
           </a:p>
@@ -4327,7 +4327,7 @@
           <a:p>
             <a:fld id="{985FAE1C-47D0-494D-BBBC-74279CBF825C}" type="datetimeFigureOut">
               <a:rPr lang="en-US" smtClean="0"/>
-              <a:t>10/6/2026</a:t>
+              <a:t>10/26/2026</a:t>
             </a:fld>
             <a:endParaRPr lang="en-US"/>
           </a:p>
@@ -4453,7 +4453,7 @@
           <a:p>
             <a:fld id="{985FAE1C-47D0-494D-BBBC-74279CBF825C}" type="datetimeFigureOut">
               <a:rPr lang="en-US" smtClean="0"/>
-              <a:t>10/6/2026</a:t>
+              <a:t>10/26/2026</a:t>
             </a:fld>
             <a:endParaRPr lang="en-US"/>
           </a:p>
@@ -4713,7 +4713,7 @@
           <a:p>
             <a:fld id="{985FAE1C-47D0-494D-BBBC-74279CBF825C}" type="datetimeFigureOut">
               <a:rPr lang="en-US" smtClean="0"/>
-              <a:t>10/6/2026</a:t>
+              <a:t>10/26/2026</a:t>
             </a:fld>
             <a:endParaRPr lang="en-US"/>
           </a:p>
@@ -5033,7 +5033,7 @@
           <a:p>
             <a:fld id="{985FAE1C-47D0-494D-BBBC-74279CBF825C}" type="datetimeFigureOut">
               <a:rPr lang="en-US" smtClean="0"/>
-              <a:t>10/6/2026</a:t>
+              <a:t>10/26/2026</a:t>
             </a:fld>
             <a:endParaRPr lang="en-US"/>
           </a:p>
@@ -5384,7 +5384,7 @@
           <a:p>
             <a:fld id="{985FAE1C-47D0-494D-BBBC-74279CBF825C}" type="datetimeFigureOut">
               <a:rPr lang="en-US" smtClean="0"/>
-              <a:t>10/6/2026</a:t>
+              <a:t>10/26/2026</a:t>
             </a:fld>
             <a:endParaRPr lang="en-US"/>
           </a:p>
@@ -5950,13 +5950,13 @@
         </p:nvSpPr>
         <p:spPr>
           <a:xfrm>
-            <a:off x="2692398" y="2533597"/>
-            <a:ext cx="6815669" cy="446794"/>
+            <a:off x="2612572" y="2209800"/>
+            <a:ext cx="6895496" cy="1219198"/>
           </a:xfrm>
         </p:spPr>
         <p:txBody>
           <a:bodyPr>
-            <a:normAutofit fontScale="90000"/>
+            <a:normAutofit/>
           </a:bodyPr>
           <a:lstStyle/>
           <a:p>
@@ -5969,6 +5969,11 @@
               </a:defRPr>
             </a:pPr>
             <a:r>
+              <a:rPr dirty="0">
+                <a:solidFill>
+                  <a:schemeClr val="tx1"/>
+                </a:solidFill>
+              </a:rPr>
               <a:t>LABORATORY INFORMATION MANAGEMENT SYSTEM FOR YALA SUB-COUNTY HOSPITAL</a:t>
             </a:r>
           </a:p>
@@ -5992,13 +5997,13 @@
         </p:nvSpPr>
         <p:spPr>
           <a:xfrm>
-            <a:off x="1371600" y="2926080"/>
-            <a:ext cx="9418320" cy="3108960"/>
+            <a:off x="3004457" y="3548744"/>
+            <a:ext cx="6291943" cy="1828799"/>
           </a:xfrm>
         </p:spPr>
         <p:txBody>
           <a:bodyPr wrap="square">
-            <a:normAutofit/>
+            <a:normAutofit fontScale="70000" lnSpcReduction="20000"/>
           </a:bodyPr>
           <a:lstStyle/>
           <a:p>
@@ -6009,10 +6014,7 @@
               <a:defRPr sz="1600" b="1"/>
             </a:pPr>
             <a:r>
-              <a:rPr sz="2000" b="1">
-                <a:solidFill>
-                  <a:srgbClr val="FFBF00"/>
-                </a:solidFill>
+              <a:rPr sz="2000" b="1" dirty="0">
                 <a:latin typeface="Calibri"/>
               </a:rPr>
               <a:t>Final Project Defense Presentation (Project B)</a:t>
@@ -6025,10 +6027,7 @@
               </a:spcAft>
             </a:pPr>
             <a:r>
-              <a:rPr sz="1800" b="1">
-                <a:solidFill>
-                  <a:srgbClr val="FFFFFF"/>
-                </a:solidFill>
+              <a:rPr sz="1800" b="1" dirty="0">
                 <a:latin typeface="Calibri"/>
               </a:rPr>
               <a:t>Candidate: Owuor Collins  |  Reg No: SCCI/01227/2022</a:t>
@@ -6041,13 +6040,22 @@
               </a:spcAft>
             </a:pPr>
             <a:r>
-              <a:rPr sz="1500" b="0">
-                <a:solidFill>
-                  <a:srgbClr val="DCE6F2"/>
-                </a:solidFill>
+              <a:rPr sz="1500" b="0" dirty="0">
                 <a:latin typeface="Calibri"/>
               </a:rPr>
-              <a:t>Programme: Bachelor of Technology in Information Technology</a:t>
+              <a:t>Program: Bachelor of Technology in</a:t>
+            </a:r>
+            <a:r>
+              <a:rPr lang="en-US" sz="1500" b="0" dirty="0">
+                <a:latin typeface="Calibri"/>
+              </a:rPr>
+              <a:t> Computer</a:t>
+            </a:r>
+            <a:r>
+              <a:rPr sz="1500" b="0" dirty="0">
+                <a:latin typeface="Calibri"/>
+              </a:rPr>
+              <a:t> Technology</a:t>
             </a:r>
           </a:p>
           <a:p>
@@ -6057,10 +6065,7 @@
               </a:spcAft>
             </a:pPr>
             <a:r>
-              <a:rPr sz="1400" b="0">
-                <a:solidFill>
-                  <a:srgbClr val="C8D7EB"/>
-                </a:solidFill>
+              <a:rPr sz="1400" b="0" dirty="0">
                 <a:latin typeface="Calibri"/>
               </a:rPr>
               <a:t>Faculty of Applied Sciences &amp; Technology | School of Computing and Information Technology (SCIT)</a:t>
@@ -6073,10 +6078,7 @@
               </a:spcAft>
             </a:pPr>
             <a:r>
-              <a:rPr sz="1400" b="0">
-                <a:solidFill>
-                  <a:srgbClr val="C8D7EB"/>
-                </a:solidFill>
+              <a:rPr sz="1400" b="0" dirty="0">
                 <a:latin typeface="Calibri"/>
               </a:rPr>
               <a:t>Department of Computer Science and Informatics</a:t>
@@ -6089,10 +6091,7 @@
               </a:spcAft>
             </a:pPr>
             <a:r>
-              <a:rPr sz="1500" b="1">
-                <a:solidFill>
-                  <a:srgbClr val="FFFFFF"/>
-                </a:solidFill>
+              <a:rPr sz="1500" b="1" dirty="0">
                 <a:latin typeface="Calibri"/>
               </a:rPr>
               <a:t>Institution: The Technical University of Kenya (TUK)</a:t>
@@ -6105,10 +6104,7 @@
               </a:spcAft>
             </a:pPr>
             <a:r>
-              <a:rPr sz="1500" b="1">
-                <a:solidFill>
-                  <a:srgbClr val="FFFFFF"/>
-                </a:solidFill>
+              <a:rPr sz="1500" b="1" dirty="0">
                 <a:latin typeface="Calibri"/>
               </a:rPr>
               <a:t>Supervisors: Dr. Edwin Ngwawe &amp; Mr. Peter Maina Kariuki</a:t>
@@ -6121,10 +6117,7 @@
               </a:spcAft>
             </a:pPr>
             <a:r>
-              <a:rPr sz="1400" b="0">
-                <a:solidFill>
-                  <a:srgbClr val="B4C8DC"/>
-                </a:solidFill>
+              <a:rPr sz="1400" b="0" dirty="0">
                 <a:latin typeface="Calibri"/>
               </a:rPr>
               <a:t>Academic Year: 2025 / 2026</a:t>
@@ -6220,7 +6213,7 @@
         </p:blipFill>
         <p:spPr bwMode="auto">
           <a:xfrm>
-            <a:off x="5769449" y="1870140"/>
+            <a:off x="5682363" y="1633515"/>
             <a:ext cx="653102" cy="663457"/>
           </a:xfrm>
           <a:prstGeom prst="rect">
@@ -8649,8 +8642,8 @@
         </p:nvSpPr>
         <p:spPr>
           <a:xfrm>
-            <a:off x="1119577" y="564478"/>
-            <a:ext cx="9601196" cy="950067"/>
+            <a:off x="1295401" y="1012371"/>
+            <a:ext cx="9425371" cy="1197429"/>
           </a:xfrm>
         </p:spPr>
         <p:txBody>
@@ -8687,8 +8680,8 @@
         </p:nvSpPr>
         <p:spPr>
           <a:xfrm>
-            <a:off x="1295402" y="1683026"/>
-            <a:ext cx="9601196" cy="4412974"/>
+            <a:off x="1295402" y="2492678"/>
+            <a:ext cx="9601196" cy="3603321"/>
           </a:xfrm>
         </p:spPr>
         <p:txBody>
@@ -8732,7 +8725,7 @@
               <a:spcAft>
                 <a:spcPts val="400"/>
               </a:spcAft>
-              <a:defRPr b="1" sz="1700">
+              <a:defRPr sz="1700" b="1">
                 <a:solidFill>
                   <a:srgbClr val="003366"/>
                 </a:solidFill>
@@ -8749,7 +8742,7 @@
               </a:spcAft>
             </a:pPr>
             <a:r>
-              <a:rPr b="1" sz="1400">
+              <a:rPr sz="1400" b="1">
                 <a:solidFill>
                   <a:srgbClr val="003366"/>
                 </a:solidFill>
@@ -8757,7 +8750,7 @@
               <a:t>1. Analyze: </a:t>
             </a:r>
             <a:r>
-              <a:rPr b="0" sz="1400">
+              <a:rPr sz="1400" b="0">
                 <a:solidFill>
                   <a:srgbClr val="222222"/>
                 </a:solidFill>
@@ -8772,7 +8765,7 @@
               </a:spcAft>
             </a:pPr>
             <a:r>
-              <a:rPr b="1" sz="1400">
+              <a:rPr sz="1400" b="1">
                 <a:solidFill>
                   <a:srgbClr val="003366"/>
                 </a:solidFill>
@@ -8780,7 +8773,7 @@
               <a:t>2. Design: </a:t>
             </a:r>
             <a:r>
-              <a:rPr b="0" sz="1400">
+              <a:rPr sz="1400" b="0">
                 <a:solidFill>
                   <a:srgbClr val="222222"/>
                 </a:solidFill>
@@ -8795,7 +8788,7 @@
               </a:spcAft>
             </a:pPr>
             <a:r>
-              <a:rPr b="1" sz="1400">
+              <a:rPr sz="1400" b="1">
                 <a:solidFill>
                   <a:srgbClr val="003366"/>
                 </a:solidFill>
@@ -8803,7 +8796,7 @@
               <a:t>3. Implement: </a:t>
             </a:r>
             <a:r>
-              <a:rPr b="0" sz="1400">
+              <a:rPr sz="1400" b="0">
                 <a:solidFill>
                   <a:srgbClr val="222222"/>
                 </a:solidFill>
@@ -8818,7 +8811,7 @@
               </a:spcAft>
             </a:pPr>
             <a:r>
-              <a:rPr b="1" sz="1400">
+              <a:rPr sz="1400" b="1">
                 <a:solidFill>
                   <a:srgbClr val="003366"/>
                 </a:solidFill>
@@ -8826,7 +8819,7 @@
               <a:t>4. Evaluate: </a:t>
             </a:r>
             <a:r>
-              <a:rPr b="0" sz="1400">
+              <a:rPr sz="1400" b="0">
                 <a:solidFill>
                   <a:srgbClr val="222222"/>
                 </a:solidFill>
